--- a/APSR-Presentation.pptx
+++ b/APSR-Presentation.pptx
@@ -1,33 +1,36 @@
 
 <file path=ppt/presentation.xml><?xml version="1.0" encoding="utf-8"?>
-<p:presentation xmlns:a="http://schemas.openxmlformats.org/drawingml/2006/main" xmlns:r="http://schemas.openxmlformats.org/officeDocument/2006/relationships" xmlns:mc="http://schemas.openxmlformats.org/markup-compatibility/2006" xmlns:mv="urn:schemas-microsoft-com:mac:vml" xmlns:p="http://schemas.openxmlformats.org/presentationml/2006/main" xmlns:c="http://schemas.openxmlformats.org/drawingml/2006/chart" xmlns:dgm="http://schemas.openxmlformats.org/drawingml/2006/diagram" xmlns:o="urn:schemas-microsoft-com:office:office" xmlns:v="urn:schemas-microsoft-com:vml" xmlns:pvml="urn:schemas-microsoft-com:office:powerpoint" xmlns:com="http://schemas.openxmlformats.org/drawingml/2006/compatibility" xmlns:p14="http://schemas.microsoft.com/office/powerpoint/2010/main" xmlns:p15="http://schemas.microsoft.com/office/powerpoint/2012/main" xmlns:ahyp="http://schemas.microsoft.com/office/drawing/2018/hyperlinkcolor" autoCompressPictures="0" embedTrueTypeFonts="1" strictFirstAndLastChars="0" saveSubsetFonts="1">
+<p:presentation xmlns:a="http://schemas.openxmlformats.org/drawingml/2006/main" xmlns:r="http://schemas.openxmlformats.org/officeDocument/2006/relationships" xmlns:p="http://schemas.openxmlformats.org/presentationml/2006/main" strictFirstAndLastChars="0" embedTrueTypeFonts="1" saveSubsetFonts="1" autoCompressPictures="0">
   <p:sldMasterIdLst>
-    <p:sldMasterId id="2147483659" r:id="rId4"/>
+    <p:sldMasterId id="2147483659" r:id="rId1"/>
   </p:sldMasterIdLst>
   <p:notesMasterIdLst>
-    <p:notesMasterId r:id="rId5"/>
+    <p:notesMasterId r:id="rId12"/>
   </p:notesMasterIdLst>
   <p:sldIdLst>
-    <p:sldId id="256" r:id="rId6"/>
-    <p:sldId id="257" r:id="rId7"/>
-    <p:sldId id="258" r:id="rId8"/>
-    <p:sldId id="259" r:id="rId9"/>
-    <p:sldId id="260" r:id="rId10"/>
-    <p:sldId id="261" r:id="rId11"/>
-    <p:sldId id="262" r:id="rId12"/>
+    <p:sldId id="256" r:id="rId2"/>
+    <p:sldId id="257" r:id="rId3"/>
+    <p:sldId id="258" r:id="rId4"/>
+    <p:sldId id="259" r:id="rId5"/>
+    <p:sldId id="260" r:id="rId6"/>
+    <p:sldId id="261" r:id="rId7"/>
+    <p:sldId id="262" r:id="rId8"/>
+    <p:sldId id="263" r:id="rId9"/>
+    <p:sldId id="264" r:id="rId10"/>
+    <p:sldId id="265" r:id="rId11"/>
   </p:sldIdLst>
-  <p:sldSz cy="5143500" cx="9144000"/>
+  <p:sldSz cx="9144000" cy="5143500" type="screen16x9"/>
   <p:notesSz cx="6858000" cy="9144000"/>
   <p:embeddedFontLst>
     <p:embeddedFont>
-      <p:font typeface="Montserrat"/>
+      <p:font typeface="Lato" panose="020F0502020204030203" pitchFamily="34" charset="0"/>
       <p:regular r:id="rId13"/>
       <p:bold r:id="rId14"/>
       <p:italic r:id="rId15"/>
       <p:boldItalic r:id="rId16"/>
     </p:embeddedFont>
     <p:embeddedFont>
-      <p:font typeface="Lato"/>
+      <p:font typeface="Montserrat" panose="00000500000000000000" pitchFamily="2" charset="0"/>
       <p:regular r:id="rId17"/>
       <p:bold r:id="rId18"/>
       <p:italic r:id="rId19"/>
@@ -35,7 +38,7 @@
     </p:embeddedFont>
   </p:embeddedFontLst>
   <p:defaultTextStyle>
-    <a:defPPr lvl="0" marR="0" rtl="0" algn="l">
+    <a:defPPr marR="0" lvl="0" algn="l" rtl="0">
       <a:lnSpc>
         <a:spcPct val="100000"/>
       </a:lnSpc>
@@ -46,7 +49,7 @@
         <a:spcPts val="0"/>
       </a:spcAft>
     </a:defPPr>
-    <a:lvl1pPr lvl="0" marR="0" rtl="0" algn="l">
+    <a:lvl1pPr marR="0" lvl="0" algn="l" rtl="0">
       <a:lnSpc>
         <a:spcPct val="100000"/>
       </a:lnSpc>
@@ -60,7 +63,7 @@
         <a:srgbClr val="000000"/>
       </a:buClr>
       <a:buFont typeface="Arial"/>
-      <a:defRPr b="0" i="0" sz="1400" u="none" cap="none" strike="noStrike">
+      <a:defRPr sz="1400" b="0" i="0" u="none" strike="noStrike" cap="none">
         <a:solidFill>
           <a:srgbClr val="000000"/>
         </a:solidFill>
@@ -70,7 +73,7 @@
         <a:sym typeface="Arial"/>
       </a:defRPr>
     </a:lvl1pPr>
-    <a:lvl2pPr lvl="1" marR="0" rtl="0" algn="l">
+    <a:lvl2pPr marR="0" lvl="1" algn="l" rtl="0">
       <a:lnSpc>
         <a:spcPct val="100000"/>
       </a:lnSpc>
@@ -84,7 +87,7 @@
         <a:srgbClr val="000000"/>
       </a:buClr>
       <a:buFont typeface="Arial"/>
-      <a:defRPr b="0" i="0" sz="1400" u="none" cap="none" strike="noStrike">
+      <a:defRPr sz="1400" b="0" i="0" u="none" strike="noStrike" cap="none">
         <a:solidFill>
           <a:srgbClr val="000000"/>
         </a:solidFill>
@@ -94,7 +97,7 @@
         <a:sym typeface="Arial"/>
       </a:defRPr>
     </a:lvl2pPr>
-    <a:lvl3pPr lvl="2" marR="0" rtl="0" algn="l">
+    <a:lvl3pPr marR="0" lvl="2" algn="l" rtl="0">
       <a:lnSpc>
         <a:spcPct val="100000"/>
       </a:lnSpc>
@@ -108,7 +111,7 @@
         <a:srgbClr val="000000"/>
       </a:buClr>
       <a:buFont typeface="Arial"/>
-      <a:defRPr b="0" i="0" sz="1400" u="none" cap="none" strike="noStrike">
+      <a:defRPr sz="1400" b="0" i="0" u="none" strike="noStrike" cap="none">
         <a:solidFill>
           <a:srgbClr val="000000"/>
         </a:solidFill>
@@ -118,7 +121,7 @@
         <a:sym typeface="Arial"/>
       </a:defRPr>
     </a:lvl3pPr>
-    <a:lvl4pPr lvl="3" marR="0" rtl="0" algn="l">
+    <a:lvl4pPr marR="0" lvl="3" algn="l" rtl="0">
       <a:lnSpc>
         <a:spcPct val="100000"/>
       </a:lnSpc>
@@ -132,7 +135,7 @@
         <a:srgbClr val="000000"/>
       </a:buClr>
       <a:buFont typeface="Arial"/>
-      <a:defRPr b="0" i="0" sz="1400" u="none" cap="none" strike="noStrike">
+      <a:defRPr sz="1400" b="0" i="0" u="none" strike="noStrike" cap="none">
         <a:solidFill>
           <a:srgbClr val="000000"/>
         </a:solidFill>
@@ -142,7 +145,7 @@
         <a:sym typeface="Arial"/>
       </a:defRPr>
     </a:lvl4pPr>
-    <a:lvl5pPr lvl="4" marR="0" rtl="0" algn="l">
+    <a:lvl5pPr marR="0" lvl="4" algn="l" rtl="0">
       <a:lnSpc>
         <a:spcPct val="100000"/>
       </a:lnSpc>
@@ -156,7 +159,7 @@
         <a:srgbClr val="000000"/>
       </a:buClr>
       <a:buFont typeface="Arial"/>
-      <a:defRPr b="0" i="0" sz="1400" u="none" cap="none" strike="noStrike">
+      <a:defRPr sz="1400" b="0" i="0" u="none" strike="noStrike" cap="none">
         <a:solidFill>
           <a:srgbClr val="000000"/>
         </a:solidFill>
@@ -166,7 +169,7 @@
         <a:sym typeface="Arial"/>
       </a:defRPr>
     </a:lvl5pPr>
-    <a:lvl6pPr lvl="5" marR="0" rtl="0" algn="l">
+    <a:lvl6pPr marR="0" lvl="5" algn="l" rtl="0">
       <a:lnSpc>
         <a:spcPct val="100000"/>
       </a:lnSpc>
@@ -180,7 +183,7 @@
         <a:srgbClr val="000000"/>
       </a:buClr>
       <a:buFont typeface="Arial"/>
-      <a:defRPr b="0" i="0" sz="1400" u="none" cap="none" strike="noStrike">
+      <a:defRPr sz="1400" b="0" i="0" u="none" strike="noStrike" cap="none">
         <a:solidFill>
           <a:srgbClr val="000000"/>
         </a:solidFill>
@@ -190,7 +193,7 @@
         <a:sym typeface="Arial"/>
       </a:defRPr>
     </a:lvl6pPr>
-    <a:lvl7pPr lvl="6" marR="0" rtl="0" algn="l">
+    <a:lvl7pPr marR="0" lvl="6" algn="l" rtl="0">
       <a:lnSpc>
         <a:spcPct val="100000"/>
       </a:lnSpc>
@@ -204,7 +207,7 @@
         <a:srgbClr val="000000"/>
       </a:buClr>
       <a:buFont typeface="Arial"/>
-      <a:defRPr b="0" i="0" sz="1400" u="none" cap="none" strike="noStrike">
+      <a:defRPr sz="1400" b="0" i="0" u="none" strike="noStrike" cap="none">
         <a:solidFill>
           <a:srgbClr val="000000"/>
         </a:solidFill>
@@ -214,7 +217,7 @@
         <a:sym typeface="Arial"/>
       </a:defRPr>
     </a:lvl7pPr>
-    <a:lvl8pPr lvl="7" marR="0" rtl="0" algn="l">
+    <a:lvl8pPr marR="0" lvl="7" algn="l" rtl="0">
       <a:lnSpc>
         <a:spcPct val="100000"/>
       </a:lnSpc>
@@ -228,7 +231,7 @@
         <a:srgbClr val="000000"/>
       </a:buClr>
       <a:buFont typeface="Arial"/>
-      <a:defRPr b="0" i="0" sz="1400" u="none" cap="none" strike="noStrike">
+      <a:defRPr sz="1400" b="0" i="0" u="none" strike="noStrike" cap="none">
         <a:solidFill>
           <a:srgbClr val="000000"/>
         </a:solidFill>
@@ -238,7 +241,7 @@
         <a:sym typeface="Arial"/>
       </a:defRPr>
     </a:lvl8pPr>
-    <a:lvl9pPr lvl="8" marR="0" rtl="0" algn="l">
+    <a:lvl9pPr marR="0" lvl="8" algn="l" rtl="0">
       <a:lnSpc>
         <a:spcPct val="100000"/>
       </a:lnSpc>
@@ -252,7 +255,7 @@
         <a:srgbClr val="000000"/>
       </a:buClr>
       <a:buFont typeface="Arial"/>
-      <a:defRPr b="0" i="0" sz="1400" u="none" cap="none" strike="noStrike">
+      <a:defRPr sz="1400" b="0" i="0" u="none" strike="noStrike" cap="none">
         <a:solidFill>
           <a:srgbClr val="000000"/>
         </a:solidFill>
@@ -265,7 +268,7 @@
   </p:defaultTextStyle>
   <p:extLst>
     <p:ext uri="{EFAFB233-063F-42B5-8137-9DF3F51BA10A}">
-      <p15:sldGuideLst>
+      <p15:sldGuideLst xmlns:p15="http://schemas.microsoft.com/office/powerpoint/2012/main">
         <p15:guide id="1" orient="horz" pos="1620">
           <p15:clr>
             <a:srgbClr val="747775"/>
@@ -282,12 +285,25 @@
 </p:presentation>
 </file>
 
+<file path=ppt/revisionInfo.xml><?xml version="1.0" encoding="utf-8"?>
+<p1510:revInfo xmlns:a="http://schemas.openxmlformats.org/drawingml/2006/main" xmlns:r="http://schemas.openxmlformats.org/officeDocument/2006/relationships" xmlns:p1510="http://schemas.microsoft.com/office/powerpoint/2015/10/main">
+  <p1510:revLst>
+    <p1510:client id="{5303AA2E-1358-5AA9-6D92-B181E7019280}" v="124" dt="2026-07-27T19:27:08.372"/>
+  </p1510:revLst>
+</p1510:revInfo>
+</file>
+
 <file path=ppt/notesMasters/notesMaster1.xml><?xml version="1.0" encoding="utf-8"?>
-<p:notesMaster xmlns:a="http://schemas.openxmlformats.org/drawingml/2006/main" xmlns:r="http://schemas.openxmlformats.org/officeDocument/2006/relationships" xmlns:mc="http://schemas.openxmlformats.org/markup-compatibility/2006" xmlns:mv="urn:schemas-microsoft-com:mac:vml" xmlns:p="http://schemas.openxmlformats.org/presentationml/2006/main" xmlns:c="http://schemas.openxmlformats.org/drawingml/2006/chart" xmlns:dgm="http://schemas.openxmlformats.org/drawingml/2006/diagram" xmlns:o="urn:schemas-microsoft-com:office:office" xmlns:v="urn:schemas-microsoft-com:vml" xmlns:pvml="urn:schemas-microsoft-com:office:powerpoint" xmlns:com="http://schemas.openxmlformats.org/drawingml/2006/compatibility" xmlns:p14="http://schemas.microsoft.com/office/powerpoint/2010/main" xmlns:p15="http://schemas.microsoft.com/office/powerpoint/2012/main" xmlns:ahyp="http://schemas.microsoft.com/office/drawing/2018/hyperlinkcolor">
+<p:notesMaster xmlns:a="http://schemas.openxmlformats.org/drawingml/2006/main" xmlns:r="http://schemas.openxmlformats.org/officeDocument/2006/relationships" xmlns:p="http://schemas.openxmlformats.org/presentationml/2006/main">
   <p:cSld>
+    <p:bg>
+      <p:bgRef idx="1001">
+        <a:schemeClr val="bg1"/>
+      </p:bgRef>
+    </p:bg>
     <p:spTree>
       <p:nvGrpSpPr>
-        <p:cNvPr id="2" name="Shape 2"/>
+        <p:cNvPr id="1" name="Shape 2"/>
         <p:cNvGrpSpPr/>
         <p:nvPr/>
       </p:nvGrpSpPr>
@@ -302,9 +318,11 @@
       <p:sp>
         <p:nvSpPr>
           <p:cNvPr id="3" name="Google Shape;3;n"/>
-          <p:cNvSpPr/>
+          <p:cNvSpPr>
+            <a:spLocks noGrp="1" noRot="1" noChangeAspect="1"/>
+          </p:cNvSpPr>
           <p:nvPr>
-            <p:ph idx="2" type="sldImg"/>
+            <p:ph type="sldImg" idx="2"/>
           </p:nvPr>
         </p:nvSpPr>
         <p:spPr>
@@ -313,9 +331,13 @@
             <a:ext cx="6096075" cy="3429000"/>
           </a:xfrm>
           <a:custGeom>
-            <a:rect b="b" l="l" r="r" t="t"/>
+            <a:avLst/>
+            <a:gdLst/>
+            <a:ahLst/>
+            <a:cxnLst/>
+            <a:rect l="l" t="t" r="r" b="b"/>
             <a:pathLst>
-              <a:path extrusionOk="0" h="120000" w="120000">
+              <a:path w="120000" h="120000" extrusionOk="0">
                 <a:moveTo>
                   <a:pt x="0" y="0"/>
                 </a:moveTo>
@@ -333,23 +355,25 @@
             </a:pathLst>
           </a:custGeom>
           <a:noFill/>
-          <a:ln cap="flat" cmpd="sng" w="9525">
+          <a:ln w="9525" cap="flat" cmpd="sng">
             <a:solidFill>
               <a:srgbClr val="000000"/>
             </a:solidFill>
             <a:prstDash val="solid"/>
             <a:round/>
-            <a:headEnd len="sm" w="sm" type="none"/>
-            <a:tailEnd len="sm" w="sm" type="none"/>
+            <a:headEnd type="none" w="sm" len="sm"/>
+            <a:tailEnd type="none" w="sm" len="sm"/>
           </a:ln>
         </p:spPr>
       </p:sp>
       <p:sp>
         <p:nvSpPr>
           <p:cNvPr id="4" name="Google Shape;4;n"/>
-          <p:cNvSpPr txBox="1"/>
+          <p:cNvSpPr txBox="1">
+            <a:spLocks noGrp="1"/>
+          </p:cNvSpPr>
           <p:nvPr>
-            <p:ph idx="1" type="body"/>
+            <p:ph type="body" idx="1"/>
           </p:nvPr>
         </p:nvSpPr>
         <p:spPr>
@@ -366,11 +390,11 @@
           </a:ln>
         </p:spPr>
         <p:txBody>
-          <a:bodyPr anchorCtr="0" anchor="t" bIns="91425" lIns="91425" spcFirstLastPara="1" rIns="91425" wrap="square" tIns="91425">
+          <a:bodyPr spcFirstLastPara="1" wrap="square" lIns="91425" tIns="91425" rIns="91425" bIns="91425" anchor="t" anchorCtr="0">
             <a:noAutofit/>
           </a:bodyPr>
           <a:lstStyle>
-            <a:lvl1pPr indent="-298450" lvl="0" marL="457200">
+            <a:lvl1pPr marL="457200" lvl="0" indent="-298450">
               <a:spcBef>
                 <a:spcPts val="0"/>
               </a:spcBef>
@@ -381,7 +405,7 @@
               <a:buChar char="●"/>
               <a:defRPr sz="1100"/>
             </a:lvl1pPr>
-            <a:lvl2pPr indent="-298450" lvl="1" marL="914400">
+            <a:lvl2pPr marL="914400" lvl="1" indent="-298450">
               <a:spcBef>
                 <a:spcPts val="0"/>
               </a:spcBef>
@@ -392,7 +416,7 @@
               <a:buChar char="○"/>
               <a:defRPr sz="1100"/>
             </a:lvl2pPr>
-            <a:lvl3pPr indent="-298450" lvl="2" marL="1371600">
+            <a:lvl3pPr marL="1371600" lvl="2" indent="-298450">
               <a:spcBef>
                 <a:spcPts val="0"/>
               </a:spcBef>
@@ -403,7 +427,7 @@
               <a:buChar char="■"/>
               <a:defRPr sz="1100"/>
             </a:lvl3pPr>
-            <a:lvl4pPr indent="-298450" lvl="3" marL="1828800">
+            <a:lvl4pPr marL="1828800" lvl="3" indent="-298450">
               <a:spcBef>
                 <a:spcPts val="0"/>
               </a:spcBef>
@@ -414,7 +438,7 @@
               <a:buChar char="●"/>
               <a:defRPr sz="1100"/>
             </a:lvl4pPr>
-            <a:lvl5pPr indent="-298450" lvl="4" marL="2286000">
+            <a:lvl5pPr marL="2286000" lvl="4" indent="-298450">
               <a:spcBef>
                 <a:spcPts val="0"/>
               </a:spcBef>
@@ -425,7 +449,7 @@
               <a:buChar char="○"/>
               <a:defRPr sz="1100"/>
             </a:lvl5pPr>
-            <a:lvl6pPr indent="-298450" lvl="5" marL="2743200">
+            <a:lvl6pPr marL="2743200" lvl="5" indent="-298450">
               <a:spcBef>
                 <a:spcPts val="0"/>
               </a:spcBef>
@@ -436,7 +460,7 @@
               <a:buChar char="■"/>
               <a:defRPr sz="1100"/>
             </a:lvl6pPr>
-            <a:lvl7pPr indent="-298450" lvl="6" marL="3200400">
+            <a:lvl7pPr marL="3200400" lvl="6" indent="-298450">
               <a:spcBef>
                 <a:spcPts val="0"/>
               </a:spcBef>
@@ -447,7 +471,7 @@
               <a:buChar char="●"/>
               <a:defRPr sz="1100"/>
             </a:lvl7pPr>
-            <a:lvl8pPr indent="-298450" lvl="7" marL="3657600">
+            <a:lvl8pPr marL="3657600" lvl="7" indent="-298450">
               <a:spcBef>
                 <a:spcPts val="0"/>
               </a:spcBef>
@@ -458,7 +482,7 @@
               <a:buChar char="○"/>
               <a:defRPr sz="1100"/>
             </a:lvl8pPr>
-            <a:lvl9pPr indent="-298450" lvl="8" marL="4114800">
+            <a:lvl9pPr marL="4114800" lvl="8" indent="-298450">
               <a:spcBef>
                 <a:spcPts val="0"/>
               </a:spcBef>
@@ -470,14 +494,16 @@
               <a:defRPr sz="1100"/>
             </a:lvl9pPr>
           </a:lstStyle>
-          <a:p/>
+          <a:p>
+            <a:endParaRPr/>
+          </a:p>
         </p:txBody>
       </p:sp>
     </p:spTree>
   </p:cSld>
-  <p:clrMap accent1="accent1" accent2="accent2" accent3="accent3" accent4="accent4" accent5="accent5" accent6="accent6" bg1="lt1" bg2="dk2" tx1="dk1" tx2="lt2" folHlink="folHlink" hlink="hlink"/>
+  <p:clrMap bg1="lt1" tx1="dk1" bg2="dk2" tx2="lt2" accent1="accent1" accent2="accent2" accent3="accent3" accent4="accent4" accent5="accent5" accent6="accent6" hlink="hlink" folHlink="folHlink"/>
   <p:notesStyle>
-    <a:defPPr lvl="0" marR="0" rtl="0" algn="l">
+    <a:defPPr marR="0" lvl="0" algn="l" rtl="0">
       <a:lnSpc>
         <a:spcPct val="100000"/>
       </a:lnSpc>
@@ -488,7 +514,7 @@
         <a:spcPts val="0"/>
       </a:spcAft>
     </a:defPPr>
-    <a:lvl1pPr lvl="0" marR="0" rtl="0" algn="l">
+    <a:lvl1pPr marR="0" lvl="0" algn="l" rtl="0">
       <a:lnSpc>
         <a:spcPct val="100000"/>
       </a:lnSpc>
@@ -502,7 +528,7 @@
         <a:srgbClr val="000000"/>
       </a:buClr>
       <a:buFont typeface="Arial"/>
-      <a:defRPr b="0" i="0" sz="1400" u="none" cap="none" strike="noStrike">
+      <a:defRPr sz="1400" b="0" i="0" u="none" strike="noStrike" cap="none">
         <a:solidFill>
           <a:srgbClr val="000000"/>
         </a:solidFill>
@@ -512,7 +538,7 @@
         <a:sym typeface="Arial"/>
       </a:defRPr>
     </a:lvl1pPr>
-    <a:lvl2pPr lvl="1" marR="0" rtl="0" algn="l">
+    <a:lvl2pPr marR="0" lvl="1" algn="l" rtl="0">
       <a:lnSpc>
         <a:spcPct val="100000"/>
       </a:lnSpc>
@@ -526,7 +552,7 @@
         <a:srgbClr val="000000"/>
       </a:buClr>
       <a:buFont typeface="Arial"/>
-      <a:defRPr b="0" i="0" sz="1400" u="none" cap="none" strike="noStrike">
+      <a:defRPr sz="1400" b="0" i="0" u="none" strike="noStrike" cap="none">
         <a:solidFill>
           <a:srgbClr val="000000"/>
         </a:solidFill>
@@ -536,7 +562,7 @@
         <a:sym typeface="Arial"/>
       </a:defRPr>
     </a:lvl2pPr>
-    <a:lvl3pPr lvl="2" marR="0" rtl="0" algn="l">
+    <a:lvl3pPr marR="0" lvl="2" algn="l" rtl="0">
       <a:lnSpc>
         <a:spcPct val="100000"/>
       </a:lnSpc>
@@ -550,7 +576,7 @@
         <a:srgbClr val="000000"/>
       </a:buClr>
       <a:buFont typeface="Arial"/>
-      <a:defRPr b="0" i="0" sz="1400" u="none" cap="none" strike="noStrike">
+      <a:defRPr sz="1400" b="0" i="0" u="none" strike="noStrike" cap="none">
         <a:solidFill>
           <a:srgbClr val="000000"/>
         </a:solidFill>
@@ -560,7 +586,7 @@
         <a:sym typeface="Arial"/>
       </a:defRPr>
     </a:lvl3pPr>
-    <a:lvl4pPr lvl="3" marR="0" rtl="0" algn="l">
+    <a:lvl4pPr marR="0" lvl="3" algn="l" rtl="0">
       <a:lnSpc>
         <a:spcPct val="100000"/>
       </a:lnSpc>
@@ -574,7 +600,7 @@
         <a:srgbClr val="000000"/>
       </a:buClr>
       <a:buFont typeface="Arial"/>
-      <a:defRPr b="0" i="0" sz="1400" u="none" cap="none" strike="noStrike">
+      <a:defRPr sz="1400" b="0" i="0" u="none" strike="noStrike" cap="none">
         <a:solidFill>
           <a:srgbClr val="000000"/>
         </a:solidFill>
@@ -584,7 +610,7 @@
         <a:sym typeface="Arial"/>
       </a:defRPr>
     </a:lvl4pPr>
-    <a:lvl5pPr lvl="4" marR="0" rtl="0" algn="l">
+    <a:lvl5pPr marR="0" lvl="4" algn="l" rtl="0">
       <a:lnSpc>
         <a:spcPct val="100000"/>
       </a:lnSpc>
@@ -598,7 +624,7 @@
         <a:srgbClr val="000000"/>
       </a:buClr>
       <a:buFont typeface="Arial"/>
-      <a:defRPr b="0" i="0" sz="1400" u="none" cap="none" strike="noStrike">
+      <a:defRPr sz="1400" b="0" i="0" u="none" strike="noStrike" cap="none">
         <a:solidFill>
           <a:srgbClr val="000000"/>
         </a:solidFill>
@@ -608,7 +634,7 @@
         <a:sym typeface="Arial"/>
       </a:defRPr>
     </a:lvl5pPr>
-    <a:lvl6pPr lvl="5" marR="0" rtl="0" algn="l">
+    <a:lvl6pPr marR="0" lvl="5" algn="l" rtl="0">
       <a:lnSpc>
         <a:spcPct val="100000"/>
       </a:lnSpc>
@@ -622,7 +648,7 @@
         <a:srgbClr val="000000"/>
       </a:buClr>
       <a:buFont typeface="Arial"/>
-      <a:defRPr b="0" i="0" sz="1400" u="none" cap="none" strike="noStrike">
+      <a:defRPr sz="1400" b="0" i="0" u="none" strike="noStrike" cap="none">
         <a:solidFill>
           <a:srgbClr val="000000"/>
         </a:solidFill>
@@ -632,7 +658,7 @@
         <a:sym typeface="Arial"/>
       </a:defRPr>
     </a:lvl6pPr>
-    <a:lvl7pPr lvl="6" marR="0" rtl="0" algn="l">
+    <a:lvl7pPr marR="0" lvl="6" algn="l" rtl="0">
       <a:lnSpc>
         <a:spcPct val="100000"/>
       </a:lnSpc>
@@ -646,7 +672,7 @@
         <a:srgbClr val="000000"/>
       </a:buClr>
       <a:buFont typeface="Arial"/>
-      <a:defRPr b="0" i="0" sz="1400" u="none" cap="none" strike="noStrike">
+      <a:defRPr sz="1400" b="0" i="0" u="none" strike="noStrike" cap="none">
         <a:solidFill>
           <a:srgbClr val="000000"/>
         </a:solidFill>
@@ -656,7 +682,7 @@
         <a:sym typeface="Arial"/>
       </a:defRPr>
     </a:lvl7pPr>
-    <a:lvl8pPr lvl="7" marR="0" rtl="0" algn="l">
+    <a:lvl8pPr marR="0" lvl="7" algn="l" rtl="0">
       <a:lnSpc>
         <a:spcPct val="100000"/>
       </a:lnSpc>
@@ -670,7 +696,7 @@
         <a:srgbClr val="000000"/>
       </a:buClr>
       <a:buFont typeface="Arial"/>
-      <a:defRPr b="0" i="0" sz="1400" u="none" cap="none" strike="noStrike">
+      <a:defRPr sz="1400" b="0" i="0" u="none" strike="noStrike" cap="none">
         <a:solidFill>
           <a:srgbClr val="000000"/>
         </a:solidFill>
@@ -680,7 +706,7 @@
         <a:sym typeface="Arial"/>
       </a:defRPr>
     </a:lvl8pPr>
-    <a:lvl9pPr lvl="8" marR="0" rtl="0" algn="l">
+    <a:lvl9pPr marR="0" lvl="8" algn="l" rtl="0">
       <a:lnSpc>
         <a:spcPct val="100000"/>
       </a:lnSpc>
@@ -694,7 +720,7 @@
         <a:srgbClr val="000000"/>
       </a:buClr>
       <a:buFont typeface="Arial"/>
-      <a:defRPr b="0" i="0" sz="1400" u="none" cap="none" strike="noStrike">
+      <a:defRPr sz="1400" b="0" i="0" u="none" strike="noStrike" cap="none">
         <a:solidFill>
           <a:srgbClr val="000000"/>
         </a:solidFill>
@@ -709,11 +735,11 @@
 </file>
 
 <file path=ppt/notesSlides/notesSlide1.xml><?xml version="1.0" encoding="utf-8"?>
-<p:notes xmlns:a="http://schemas.openxmlformats.org/drawingml/2006/main" xmlns:r="http://schemas.openxmlformats.org/officeDocument/2006/relationships" xmlns:mc="http://schemas.openxmlformats.org/markup-compatibility/2006" xmlns:mv="urn:schemas-microsoft-com:mac:vml" xmlns:p="http://schemas.openxmlformats.org/presentationml/2006/main" xmlns:c="http://schemas.openxmlformats.org/drawingml/2006/chart" xmlns:dgm="http://schemas.openxmlformats.org/drawingml/2006/diagram" xmlns:o="urn:schemas-microsoft-com:office:office" xmlns:v="urn:schemas-microsoft-com:vml" xmlns:pvml="urn:schemas-microsoft-com:office:powerpoint" xmlns:com="http://schemas.openxmlformats.org/drawingml/2006/compatibility" xmlns:p14="http://schemas.microsoft.com/office/powerpoint/2010/main" xmlns:p15="http://schemas.microsoft.com/office/powerpoint/2012/main" xmlns:ahyp="http://schemas.microsoft.com/office/drawing/2018/hyperlinkcolor" showMasterPhAnim="0" showMasterSp="0">
+<p:notes xmlns:a="http://schemas.openxmlformats.org/drawingml/2006/main" xmlns:r="http://schemas.openxmlformats.org/officeDocument/2006/relationships" xmlns:p="http://schemas.openxmlformats.org/presentationml/2006/main" showMasterSp="0" showMasterPhAnim="0">
   <p:cSld>
     <p:spTree>
       <p:nvGrpSpPr>
-        <p:cNvPr id="130" name="Shape 130"/>
+        <p:cNvPr id="1" name="Shape 130"/>
         <p:cNvGrpSpPr/>
         <p:nvPr/>
       </p:nvGrpSpPr>
@@ -728,9 +754,11 @@
       <p:sp>
         <p:nvSpPr>
           <p:cNvPr id="131" name="Google Shape;131;p:notes"/>
-          <p:cNvSpPr/>
+          <p:cNvSpPr>
+            <a:spLocks noGrp="1" noRot="1" noChangeAspect="1"/>
+          </p:cNvSpPr>
           <p:nvPr>
-            <p:ph idx="2" type="sldImg"/>
+            <p:ph type="sldImg" idx="2"/>
           </p:nvPr>
         </p:nvSpPr>
         <p:spPr>
@@ -739,9 +767,13 @@
             <a:ext cx="6096075" cy="3429000"/>
           </a:xfrm>
           <a:custGeom>
-            <a:rect b="b" l="l" r="r" t="t"/>
+            <a:avLst/>
+            <a:gdLst/>
+            <a:ahLst/>
+            <a:cxnLst/>
+            <a:rect l="l" t="t" r="r" b="b"/>
             <a:pathLst>
-              <a:path extrusionOk="0" h="120000" w="120000">
+              <a:path w="120000" h="120000" extrusionOk="0">
                 <a:moveTo>
                   <a:pt x="0" y="0"/>
                 </a:moveTo>
@@ -763,9 +795,11 @@
       <p:sp>
         <p:nvSpPr>
           <p:cNvPr id="132" name="Google Shape;132;p:notes"/>
-          <p:cNvSpPr txBox="1"/>
+          <p:cNvSpPr txBox="1">
+            <a:spLocks noGrp="1"/>
+          </p:cNvSpPr>
           <p:nvPr>
-            <p:ph idx="1" type="body"/>
+            <p:ph type="body" idx="1"/>
           </p:nvPr>
         </p:nvSpPr>
         <p:spPr>
@@ -778,12 +812,12 @@
           </a:prstGeom>
         </p:spPr>
         <p:txBody>
-          <a:bodyPr anchorCtr="0" anchor="t" bIns="91425" lIns="91425" spcFirstLastPara="1" rIns="91425" wrap="square" tIns="91425">
+          <a:bodyPr spcFirstLastPara="1" wrap="square" lIns="91425" tIns="91425" rIns="91425" bIns="91425" anchor="t" anchorCtr="0">
             <a:noAutofit/>
           </a:bodyPr>
           <a:lstStyle/>
           <a:p>
-            <a:pPr indent="0" lvl="0" marL="0" rtl="0" algn="l">
+            <a:pPr marL="0" lvl="0" indent="0" algn="l" rtl="0">
               <a:spcBef>
                 <a:spcPts val="0"/>
               </a:spcBef>
@@ -792,9 +826,6 @@
               </a:spcAft>
               <a:buNone/>
             </a:pPr>
-            <a:r>
-              <a:t/>
-            </a:r>
             <a:endParaRPr/>
           </a:p>
         </p:txBody>
@@ -808,11 +839,11 @@
 </file>
 
 <file path=ppt/notesSlides/notesSlide2.xml><?xml version="1.0" encoding="utf-8"?>
-<p:notes xmlns:a="http://schemas.openxmlformats.org/drawingml/2006/main" xmlns:r="http://schemas.openxmlformats.org/officeDocument/2006/relationships" xmlns:mc="http://schemas.openxmlformats.org/markup-compatibility/2006" xmlns:mv="urn:schemas-microsoft-com:mac:vml" xmlns:p="http://schemas.openxmlformats.org/presentationml/2006/main" xmlns:c="http://schemas.openxmlformats.org/drawingml/2006/chart" xmlns:dgm="http://schemas.openxmlformats.org/drawingml/2006/diagram" xmlns:o="urn:schemas-microsoft-com:office:office" xmlns:v="urn:schemas-microsoft-com:vml" xmlns:pvml="urn:schemas-microsoft-com:office:powerpoint" xmlns:com="http://schemas.openxmlformats.org/drawingml/2006/compatibility" xmlns:p14="http://schemas.microsoft.com/office/powerpoint/2010/main" xmlns:p15="http://schemas.microsoft.com/office/powerpoint/2012/main" xmlns:ahyp="http://schemas.microsoft.com/office/drawing/2018/hyperlinkcolor" showMasterPhAnim="0" showMasterSp="0">
+<p:notes xmlns:a="http://schemas.openxmlformats.org/drawingml/2006/main" xmlns:r="http://schemas.openxmlformats.org/officeDocument/2006/relationships" xmlns:p="http://schemas.openxmlformats.org/presentationml/2006/main" showMasterSp="0" showMasterPhAnim="0">
   <p:cSld>
     <p:spTree>
       <p:nvGrpSpPr>
-        <p:cNvPr id="136" name="Shape 136"/>
+        <p:cNvPr id="1" name="Shape 136"/>
         <p:cNvGrpSpPr/>
         <p:nvPr/>
       </p:nvGrpSpPr>
@@ -827,9 +858,11 @@
       <p:sp>
         <p:nvSpPr>
           <p:cNvPr id="137" name="Google Shape;137;g3d583cc4334_0_126:notes"/>
-          <p:cNvSpPr/>
+          <p:cNvSpPr>
+            <a:spLocks noGrp="1" noRot="1" noChangeAspect="1"/>
+          </p:cNvSpPr>
           <p:nvPr>
-            <p:ph idx="2" type="sldImg"/>
+            <p:ph type="sldImg" idx="2"/>
           </p:nvPr>
         </p:nvSpPr>
         <p:spPr>
@@ -838,9 +871,13 @@
             <a:ext cx="6096000" cy="3429000"/>
           </a:xfrm>
           <a:custGeom>
-            <a:rect b="b" l="l" r="r" t="t"/>
+            <a:avLst/>
+            <a:gdLst/>
+            <a:ahLst/>
+            <a:cxnLst/>
+            <a:rect l="l" t="t" r="r" b="b"/>
             <a:pathLst>
-              <a:path extrusionOk="0" h="120000" w="120000">
+              <a:path w="120000" h="120000" extrusionOk="0">
                 <a:moveTo>
                   <a:pt x="0" y="0"/>
                 </a:moveTo>
@@ -862,9 +899,11 @@
       <p:sp>
         <p:nvSpPr>
           <p:cNvPr id="138" name="Google Shape;138;g3d583cc4334_0_126:notes"/>
-          <p:cNvSpPr txBox="1"/>
+          <p:cNvSpPr txBox="1">
+            <a:spLocks noGrp="1"/>
+          </p:cNvSpPr>
           <p:nvPr>
-            <p:ph idx="1" type="body"/>
+            <p:ph type="body" idx="1"/>
           </p:nvPr>
         </p:nvSpPr>
         <p:spPr>
@@ -877,12 +916,12 @@
           </a:prstGeom>
         </p:spPr>
         <p:txBody>
-          <a:bodyPr anchorCtr="0" anchor="t" bIns="91425" lIns="91425" spcFirstLastPara="1" rIns="91425" wrap="square" tIns="91425">
+          <a:bodyPr spcFirstLastPara="1" wrap="square" lIns="91425" tIns="91425" rIns="91425" bIns="91425" anchor="t" anchorCtr="0">
             <a:noAutofit/>
           </a:bodyPr>
           <a:lstStyle/>
           <a:p>
-            <a:pPr indent="0" lvl="0" marL="0" rtl="0" algn="l">
+            <a:pPr marL="0" lvl="0" indent="0" algn="l" rtl="0">
               <a:spcBef>
                 <a:spcPts val="0"/>
               </a:spcBef>
@@ -891,9 +930,6 @@
               </a:spcAft>
               <a:buNone/>
             </a:pPr>
-            <a:r>
-              <a:t/>
-            </a:r>
             <a:endParaRPr/>
           </a:p>
         </p:txBody>
@@ -907,11 +943,11 @@
 </file>
 
 <file path=ppt/notesSlides/notesSlide3.xml><?xml version="1.0" encoding="utf-8"?>
-<p:notes xmlns:a="http://schemas.openxmlformats.org/drawingml/2006/main" xmlns:r="http://schemas.openxmlformats.org/officeDocument/2006/relationships" xmlns:mc="http://schemas.openxmlformats.org/markup-compatibility/2006" xmlns:mv="urn:schemas-microsoft-com:mac:vml" xmlns:p="http://schemas.openxmlformats.org/presentationml/2006/main" xmlns:c="http://schemas.openxmlformats.org/drawingml/2006/chart" xmlns:dgm="http://schemas.openxmlformats.org/drawingml/2006/diagram" xmlns:o="urn:schemas-microsoft-com:office:office" xmlns:v="urn:schemas-microsoft-com:vml" xmlns:pvml="urn:schemas-microsoft-com:office:powerpoint" xmlns:com="http://schemas.openxmlformats.org/drawingml/2006/compatibility" xmlns:p14="http://schemas.microsoft.com/office/powerpoint/2010/main" xmlns:p15="http://schemas.microsoft.com/office/powerpoint/2012/main" xmlns:ahyp="http://schemas.microsoft.com/office/drawing/2018/hyperlinkcolor" showMasterPhAnim="0" showMasterSp="0">
+<p:notes xmlns:a="http://schemas.openxmlformats.org/drawingml/2006/main" xmlns:r="http://schemas.openxmlformats.org/officeDocument/2006/relationships" xmlns:p="http://schemas.openxmlformats.org/presentationml/2006/main" showMasterSp="0" showMasterPhAnim="0">
   <p:cSld>
     <p:spTree>
       <p:nvGrpSpPr>
-        <p:cNvPr id="142" name="Shape 142"/>
+        <p:cNvPr id="1" name="Shape 142"/>
         <p:cNvGrpSpPr/>
         <p:nvPr/>
       </p:nvGrpSpPr>
@@ -926,9 +962,11 @@
       <p:sp>
         <p:nvSpPr>
           <p:cNvPr id="143" name="Google Shape;143;g3d583cc4334_0_132:notes"/>
-          <p:cNvSpPr/>
+          <p:cNvSpPr>
+            <a:spLocks noGrp="1" noRot="1" noChangeAspect="1"/>
+          </p:cNvSpPr>
           <p:nvPr>
-            <p:ph idx="2" type="sldImg"/>
+            <p:ph type="sldImg" idx="2"/>
           </p:nvPr>
         </p:nvSpPr>
         <p:spPr>
@@ -937,9 +975,13 @@
             <a:ext cx="6096000" cy="3429000"/>
           </a:xfrm>
           <a:custGeom>
-            <a:rect b="b" l="l" r="r" t="t"/>
+            <a:avLst/>
+            <a:gdLst/>
+            <a:ahLst/>
+            <a:cxnLst/>
+            <a:rect l="l" t="t" r="r" b="b"/>
             <a:pathLst>
-              <a:path extrusionOk="0" h="120000" w="120000">
+              <a:path w="120000" h="120000" extrusionOk="0">
                 <a:moveTo>
                   <a:pt x="0" y="0"/>
                 </a:moveTo>
@@ -961,9 +1003,11 @@
       <p:sp>
         <p:nvSpPr>
           <p:cNvPr id="144" name="Google Shape;144;g3d583cc4334_0_132:notes"/>
-          <p:cNvSpPr txBox="1"/>
+          <p:cNvSpPr txBox="1">
+            <a:spLocks noGrp="1"/>
+          </p:cNvSpPr>
           <p:nvPr>
-            <p:ph idx="1" type="body"/>
+            <p:ph type="body" idx="1"/>
           </p:nvPr>
         </p:nvSpPr>
         <p:spPr>
@@ -976,12 +1020,12 @@
           </a:prstGeom>
         </p:spPr>
         <p:txBody>
-          <a:bodyPr anchorCtr="0" anchor="t" bIns="91425" lIns="91425" spcFirstLastPara="1" rIns="91425" wrap="square" tIns="91425">
+          <a:bodyPr spcFirstLastPara="1" wrap="square" lIns="91425" tIns="91425" rIns="91425" bIns="91425" anchor="t" anchorCtr="0">
             <a:noAutofit/>
           </a:bodyPr>
           <a:lstStyle/>
           <a:p>
-            <a:pPr indent="0" lvl="0" marL="0" rtl="0" algn="l">
+            <a:pPr marL="0" lvl="0" indent="0" algn="l" rtl="0">
               <a:spcBef>
                 <a:spcPts val="0"/>
               </a:spcBef>
@@ -990,9 +1034,6 @@
               </a:spcAft>
               <a:buNone/>
             </a:pPr>
-            <a:r>
-              <a:t/>
-            </a:r>
             <a:endParaRPr/>
           </a:p>
         </p:txBody>
@@ -1006,11 +1047,11 @@
 </file>
 
 <file path=ppt/notesSlides/notesSlide4.xml><?xml version="1.0" encoding="utf-8"?>
-<p:notes xmlns:a="http://schemas.openxmlformats.org/drawingml/2006/main" xmlns:r="http://schemas.openxmlformats.org/officeDocument/2006/relationships" xmlns:mc="http://schemas.openxmlformats.org/markup-compatibility/2006" xmlns:mv="urn:schemas-microsoft-com:mac:vml" xmlns:p="http://schemas.openxmlformats.org/presentationml/2006/main" xmlns:c="http://schemas.openxmlformats.org/drawingml/2006/chart" xmlns:dgm="http://schemas.openxmlformats.org/drawingml/2006/diagram" xmlns:o="urn:schemas-microsoft-com:office:office" xmlns:v="urn:schemas-microsoft-com:vml" xmlns:pvml="urn:schemas-microsoft-com:office:powerpoint" xmlns:com="http://schemas.openxmlformats.org/drawingml/2006/compatibility" xmlns:p14="http://schemas.microsoft.com/office/powerpoint/2010/main" xmlns:p15="http://schemas.microsoft.com/office/powerpoint/2012/main" xmlns:ahyp="http://schemas.microsoft.com/office/drawing/2018/hyperlinkcolor" showMasterPhAnim="0" showMasterSp="0">
+<p:notes xmlns:a="http://schemas.openxmlformats.org/drawingml/2006/main" xmlns:r="http://schemas.openxmlformats.org/officeDocument/2006/relationships" xmlns:p="http://schemas.openxmlformats.org/presentationml/2006/main" showMasterSp="0" showMasterPhAnim="0">
   <p:cSld>
     <p:spTree>
       <p:nvGrpSpPr>
-        <p:cNvPr id="149" name="Shape 149"/>
+        <p:cNvPr id="1" name="Shape 149"/>
         <p:cNvGrpSpPr/>
         <p:nvPr/>
       </p:nvGrpSpPr>
@@ -1025,9 +1066,11 @@
       <p:sp>
         <p:nvSpPr>
           <p:cNvPr id="150" name="Google Shape;150;g3d583cc4334_0_139:notes"/>
-          <p:cNvSpPr/>
+          <p:cNvSpPr>
+            <a:spLocks noGrp="1" noRot="1" noChangeAspect="1"/>
+          </p:cNvSpPr>
           <p:nvPr>
-            <p:ph idx="2" type="sldImg"/>
+            <p:ph type="sldImg" idx="2"/>
           </p:nvPr>
         </p:nvSpPr>
         <p:spPr>
@@ -1036,9 +1079,13 @@
             <a:ext cx="6096000" cy="3429000"/>
           </a:xfrm>
           <a:custGeom>
-            <a:rect b="b" l="l" r="r" t="t"/>
+            <a:avLst/>
+            <a:gdLst/>
+            <a:ahLst/>
+            <a:cxnLst/>
+            <a:rect l="l" t="t" r="r" b="b"/>
             <a:pathLst>
-              <a:path extrusionOk="0" h="120000" w="120000">
+              <a:path w="120000" h="120000" extrusionOk="0">
                 <a:moveTo>
                   <a:pt x="0" y="0"/>
                 </a:moveTo>
@@ -1060,9 +1107,11 @@
       <p:sp>
         <p:nvSpPr>
           <p:cNvPr id="151" name="Google Shape;151;g3d583cc4334_0_139:notes"/>
-          <p:cNvSpPr txBox="1"/>
+          <p:cNvSpPr txBox="1">
+            <a:spLocks noGrp="1"/>
+          </p:cNvSpPr>
           <p:nvPr>
-            <p:ph idx="1" type="body"/>
+            <p:ph type="body" idx="1"/>
           </p:nvPr>
         </p:nvSpPr>
         <p:spPr>
@@ -1075,12 +1124,12 @@
           </a:prstGeom>
         </p:spPr>
         <p:txBody>
-          <a:bodyPr anchorCtr="0" anchor="t" bIns="91425" lIns="91425" spcFirstLastPara="1" rIns="91425" wrap="square" tIns="91425">
+          <a:bodyPr spcFirstLastPara="1" wrap="square" lIns="91425" tIns="91425" rIns="91425" bIns="91425" anchor="t" anchorCtr="0">
             <a:noAutofit/>
           </a:bodyPr>
           <a:lstStyle/>
           <a:p>
-            <a:pPr indent="0" lvl="0" marL="0" rtl="0" algn="l">
+            <a:pPr marL="0" lvl="0" indent="0" algn="l" rtl="0">
               <a:spcBef>
                 <a:spcPts val="0"/>
               </a:spcBef>
@@ -1089,9 +1138,6 @@
               </a:spcAft>
               <a:buNone/>
             </a:pPr>
-            <a:r>
-              <a:t/>
-            </a:r>
             <a:endParaRPr/>
           </a:p>
         </p:txBody>
@@ -1105,11 +1151,11 @@
 </file>
 
 <file path=ppt/notesSlides/notesSlide5.xml><?xml version="1.0" encoding="utf-8"?>
-<p:notes xmlns:a="http://schemas.openxmlformats.org/drawingml/2006/main" xmlns:r="http://schemas.openxmlformats.org/officeDocument/2006/relationships" xmlns:mc="http://schemas.openxmlformats.org/markup-compatibility/2006" xmlns:mv="urn:schemas-microsoft-com:mac:vml" xmlns:p="http://schemas.openxmlformats.org/presentationml/2006/main" xmlns:c="http://schemas.openxmlformats.org/drawingml/2006/chart" xmlns:dgm="http://schemas.openxmlformats.org/drawingml/2006/diagram" xmlns:o="urn:schemas-microsoft-com:office:office" xmlns:v="urn:schemas-microsoft-com:vml" xmlns:pvml="urn:schemas-microsoft-com:office:powerpoint" xmlns:com="http://schemas.openxmlformats.org/drawingml/2006/compatibility" xmlns:p14="http://schemas.microsoft.com/office/powerpoint/2010/main" xmlns:p15="http://schemas.microsoft.com/office/powerpoint/2012/main" xmlns:ahyp="http://schemas.microsoft.com/office/drawing/2018/hyperlinkcolor" showMasterPhAnim="0" showMasterSp="0">
+<p:notes xmlns:a="http://schemas.openxmlformats.org/drawingml/2006/main" xmlns:r="http://schemas.openxmlformats.org/officeDocument/2006/relationships" xmlns:p="http://schemas.openxmlformats.org/presentationml/2006/main" showMasterSp="0" showMasterPhAnim="0">
   <p:cSld>
     <p:spTree>
       <p:nvGrpSpPr>
-        <p:cNvPr id="156" name="Shape 156"/>
+        <p:cNvPr id="1" name="Shape 156"/>
         <p:cNvGrpSpPr/>
         <p:nvPr/>
       </p:nvGrpSpPr>
@@ -1124,9 +1170,11 @@
       <p:sp>
         <p:nvSpPr>
           <p:cNvPr id="157" name="Google Shape;157;g3d583cc4334_0_146:notes"/>
-          <p:cNvSpPr/>
+          <p:cNvSpPr>
+            <a:spLocks noGrp="1" noRot="1" noChangeAspect="1"/>
+          </p:cNvSpPr>
           <p:nvPr>
-            <p:ph idx="2" type="sldImg"/>
+            <p:ph type="sldImg" idx="2"/>
           </p:nvPr>
         </p:nvSpPr>
         <p:spPr>
@@ -1135,9 +1183,13 @@
             <a:ext cx="6096000" cy="3429000"/>
           </a:xfrm>
           <a:custGeom>
-            <a:rect b="b" l="l" r="r" t="t"/>
+            <a:avLst/>
+            <a:gdLst/>
+            <a:ahLst/>
+            <a:cxnLst/>
+            <a:rect l="l" t="t" r="r" b="b"/>
             <a:pathLst>
-              <a:path extrusionOk="0" h="120000" w="120000">
+              <a:path w="120000" h="120000" extrusionOk="0">
                 <a:moveTo>
                   <a:pt x="0" y="0"/>
                 </a:moveTo>
@@ -1159,9 +1211,11 @@
       <p:sp>
         <p:nvSpPr>
           <p:cNvPr id="158" name="Google Shape;158;g3d583cc4334_0_146:notes"/>
-          <p:cNvSpPr txBox="1"/>
+          <p:cNvSpPr txBox="1">
+            <a:spLocks noGrp="1"/>
+          </p:cNvSpPr>
           <p:nvPr>
-            <p:ph idx="1" type="body"/>
+            <p:ph type="body" idx="1"/>
           </p:nvPr>
         </p:nvSpPr>
         <p:spPr>
@@ -1174,12 +1228,12 @@
           </a:prstGeom>
         </p:spPr>
         <p:txBody>
-          <a:bodyPr anchorCtr="0" anchor="t" bIns="91425" lIns="91425" spcFirstLastPara="1" rIns="91425" wrap="square" tIns="91425">
+          <a:bodyPr spcFirstLastPara="1" wrap="square" lIns="91425" tIns="91425" rIns="91425" bIns="91425" anchor="t" anchorCtr="0">
             <a:noAutofit/>
           </a:bodyPr>
           <a:lstStyle/>
           <a:p>
-            <a:pPr indent="0" lvl="0" marL="0" rtl="0" algn="l">
+            <a:pPr marL="0" lvl="0" indent="0" algn="l" rtl="0">
               <a:spcBef>
                 <a:spcPts val="0"/>
               </a:spcBef>
@@ -1188,9 +1242,6 @@
               </a:spcAft>
               <a:buNone/>
             </a:pPr>
-            <a:r>
-              <a:t/>
-            </a:r>
             <a:endParaRPr/>
           </a:p>
         </p:txBody>
@@ -1204,11 +1255,11 @@
 </file>
 
 <file path=ppt/notesSlides/notesSlide6.xml><?xml version="1.0" encoding="utf-8"?>
-<p:notes xmlns:a="http://schemas.openxmlformats.org/drawingml/2006/main" xmlns:r="http://schemas.openxmlformats.org/officeDocument/2006/relationships" xmlns:mc="http://schemas.openxmlformats.org/markup-compatibility/2006" xmlns:mv="urn:schemas-microsoft-com:mac:vml" xmlns:p="http://schemas.openxmlformats.org/presentationml/2006/main" xmlns:c="http://schemas.openxmlformats.org/drawingml/2006/chart" xmlns:dgm="http://schemas.openxmlformats.org/drawingml/2006/diagram" xmlns:o="urn:schemas-microsoft-com:office:office" xmlns:v="urn:schemas-microsoft-com:vml" xmlns:pvml="urn:schemas-microsoft-com:office:powerpoint" xmlns:com="http://schemas.openxmlformats.org/drawingml/2006/compatibility" xmlns:p14="http://schemas.microsoft.com/office/powerpoint/2010/main" xmlns:p15="http://schemas.microsoft.com/office/powerpoint/2012/main" xmlns:ahyp="http://schemas.microsoft.com/office/drawing/2018/hyperlinkcolor" showMasterPhAnim="0" showMasterSp="0">
+<p:notes xmlns:a="http://schemas.openxmlformats.org/drawingml/2006/main" xmlns:r="http://schemas.openxmlformats.org/officeDocument/2006/relationships" xmlns:p="http://schemas.openxmlformats.org/presentationml/2006/main" showMasterSp="0" showMasterPhAnim="0">
   <p:cSld>
     <p:spTree>
       <p:nvGrpSpPr>
-        <p:cNvPr id="163" name="Shape 163"/>
+        <p:cNvPr id="1" name="Shape 163"/>
         <p:cNvGrpSpPr/>
         <p:nvPr/>
       </p:nvGrpSpPr>
@@ -1223,9 +1274,11 @@
       <p:sp>
         <p:nvSpPr>
           <p:cNvPr id="164" name="Google Shape;164;g3d583cc4334_0_151:notes"/>
-          <p:cNvSpPr/>
+          <p:cNvSpPr>
+            <a:spLocks noGrp="1" noRot="1" noChangeAspect="1"/>
+          </p:cNvSpPr>
           <p:nvPr>
-            <p:ph idx="2" type="sldImg"/>
+            <p:ph type="sldImg" idx="2"/>
           </p:nvPr>
         </p:nvSpPr>
         <p:spPr>
@@ -1234,9 +1287,13 @@
             <a:ext cx="6096000" cy="3429000"/>
           </a:xfrm>
           <a:custGeom>
-            <a:rect b="b" l="l" r="r" t="t"/>
+            <a:avLst/>
+            <a:gdLst/>
+            <a:ahLst/>
+            <a:cxnLst/>
+            <a:rect l="l" t="t" r="r" b="b"/>
             <a:pathLst>
-              <a:path extrusionOk="0" h="120000" w="120000">
+              <a:path w="120000" h="120000" extrusionOk="0">
                 <a:moveTo>
                   <a:pt x="0" y="0"/>
                 </a:moveTo>
@@ -1258,9 +1315,11 @@
       <p:sp>
         <p:nvSpPr>
           <p:cNvPr id="165" name="Google Shape;165;g3d583cc4334_0_151:notes"/>
-          <p:cNvSpPr txBox="1"/>
+          <p:cNvSpPr txBox="1">
+            <a:spLocks noGrp="1"/>
+          </p:cNvSpPr>
           <p:nvPr>
-            <p:ph idx="1" type="body"/>
+            <p:ph type="body" idx="1"/>
           </p:nvPr>
         </p:nvSpPr>
         <p:spPr>
@@ -1273,12 +1332,12 @@
           </a:prstGeom>
         </p:spPr>
         <p:txBody>
-          <a:bodyPr anchorCtr="0" anchor="t" bIns="91425" lIns="91425" spcFirstLastPara="1" rIns="91425" wrap="square" tIns="91425">
+          <a:bodyPr spcFirstLastPara="1" wrap="square" lIns="91425" tIns="91425" rIns="91425" bIns="91425" anchor="t" anchorCtr="0">
             <a:noAutofit/>
           </a:bodyPr>
           <a:lstStyle/>
           <a:p>
-            <a:pPr indent="0" lvl="0" marL="0" rtl="0" algn="l">
+            <a:pPr marL="0" lvl="0" indent="0" algn="l" rtl="0">
               <a:spcBef>
                 <a:spcPts val="0"/>
               </a:spcBef>
@@ -1287,9 +1346,6 @@
               </a:spcAft>
               <a:buNone/>
             </a:pPr>
-            <a:r>
-              <a:t/>
-            </a:r>
             <a:endParaRPr/>
           </a:p>
         </p:txBody>
@@ -1303,11 +1359,11 @@
 </file>
 
 <file path=ppt/notesSlides/notesSlide7.xml><?xml version="1.0" encoding="utf-8"?>
-<p:notes xmlns:a="http://schemas.openxmlformats.org/drawingml/2006/main" xmlns:r="http://schemas.openxmlformats.org/officeDocument/2006/relationships" xmlns:mc="http://schemas.openxmlformats.org/markup-compatibility/2006" xmlns:mv="urn:schemas-microsoft-com:mac:vml" xmlns:p="http://schemas.openxmlformats.org/presentationml/2006/main" xmlns:c="http://schemas.openxmlformats.org/drawingml/2006/chart" xmlns:dgm="http://schemas.openxmlformats.org/drawingml/2006/diagram" xmlns:o="urn:schemas-microsoft-com:office:office" xmlns:v="urn:schemas-microsoft-com:vml" xmlns:pvml="urn:schemas-microsoft-com:office:powerpoint" xmlns:com="http://schemas.openxmlformats.org/drawingml/2006/compatibility" xmlns:p14="http://schemas.microsoft.com/office/powerpoint/2010/main" xmlns:p15="http://schemas.microsoft.com/office/powerpoint/2012/main" xmlns:ahyp="http://schemas.microsoft.com/office/drawing/2018/hyperlinkcolor" showMasterPhAnim="0" showMasterSp="0">
+<p:notes xmlns:a="http://schemas.openxmlformats.org/drawingml/2006/main" xmlns:r="http://schemas.openxmlformats.org/officeDocument/2006/relationships" xmlns:p="http://schemas.openxmlformats.org/presentationml/2006/main" showMasterSp="0" showMasterPhAnim="0">
   <p:cSld>
     <p:spTree>
       <p:nvGrpSpPr>
-        <p:cNvPr id="170" name="Shape 170"/>
+        <p:cNvPr id="1" name="Shape 170"/>
         <p:cNvGrpSpPr/>
         <p:nvPr/>
       </p:nvGrpSpPr>
@@ -1322,9 +1378,11 @@
       <p:sp>
         <p:nvSpPr>
           <p:cNvPr id="171" name="Google Shape;171;g3d583cc4334_0_787:notes"/>
-          <p:cNvSpPr/>
+          <p:cNvSpPr>
+            <a:spLocks noGrp="1" noRot="1" noChangeAspect="1"/>
+          </p:cNvSpPr>
           <p:nvPr>
-            <p:ph idx="2" type="sldImg"/>
+            <p:ph type="sldImg" idx="2"/>
           </p:nvPr>
         </p:nvSpPr>
         <p:spPr>
@@ -1333,9 +1391,13 @@
             <a:ext cx="6096000" cy="3429000"/>
           </a:xfrm>
           <a:custGeom>
-            <a:rect b="b" l="l" r="r" t="t"/>
+            <a:avLst/>
+            <a:gdLst/>
+            <a:ahLst/>
+            <a:cxnLst/>
+            <a:rect l="l" t="t" r="r" b="b"/>
             <a:pathLst>
-              <a:path extrusionOk="0" h="120000" w="120000">
+              <a:path w="120000" h="120000" extrusionOk="0">
                 <a:moveTo>
                   <a:pt x="0" y="0"/>
                 </a:moveTo>
@@ -1357,9 +1419,11 @@
       <p:sp>
         <p:nvSpPr>
           <p:cNvPr id="172" name="Google Shape;172;g3d583cc4334_0_787:notes"/>
-          <p:cNvSpPr txBox="1"/>
+          <p:cNvSpPr txBox="1">
+            <a:spLocks noGrp="1"/>
+          </p:cNvSpPr>
           <p:nvPr>
-            <p:ph idx="1" type="body"/>
+            <p:ph type="body" idx="1"/>
           </p:nvPr>
         </p:nvSpPr>
         <p:spPr>
@@ -1372,12 +1436,12 @@
           </a:prstGeom>
         </p:spPr>
         <p:txBody>
-          <a:bodyPr anchorCtr="0" anchor="t" bIns="91425" lIns="91425" spcFirstLastPara="1" rIns="91425" wrap="square" tIns="91425">
+          <a:bodyPr spcFirstLastPara="1" wrap="square" lIns="91425" tIns="91425" rIns="91425" bIns="91425" anchor="t" anchorCtr="0">
             <a:noAutofit/>
           </a:bodyPr>
           <a:lstStyle/>
           <a:p>
-            <a:pPr indent="0" lvl="0" marL="0" rtl="0" algn="l">
+            <a:pPr marL="0" lvl="0" indent="0" algn="l" rtl="0">
               <a:spcBef>
                 <a:spcPts val="0"/>
               </a:spcBef>
@@ -1386,9 +1450,6 @@
               </a:spcAft>
               <a:buNone/>
             </a:pPr>
-            <a:r>
-              <a:t/>
-            </a:r>
             <a:endParaRPr/>
           </a:p>
         </p:txBody>
@@ -1402,11 +1463,11 @@
 </file>
 
 <file path=ppt/slideLayouts/slideLayout1.xml><?xml version="1.0" encoding="utf-8"?>
-<p:sldLayout xmlns:a="http://schemas.openxmlformats.org/drawingml/2006/main" xmlns:r="http://schemas.openxmlformats.org/officeDocument/2006/relationships" xmlns:mc="http://schemas.openxmlformats.org/markup-compatibility/2006" xmlns:mv="urn:schemas-microsoft-com:mac:vml" xmlns:p="http://schemas.openxmlformats.org/presentationml/2006/main" xmlns:c="http://schemas.openxmlformats.org/drawingml/2006/chart" xmlns:dgm="http://schemas.openxmlformats.org/drawingml/2006/diagram" xmlns:o="urn:schemas-microsoft-com:office:office" xmlns:v="urn:schemas-microsoft-com:vml" xmlns:pvml="urn:schemas-microsoft-com:office:powerpoint" xmlns:com="http://schemas.openxmlformats.org/drawingml/2006/compatibility" xmlns:p14="http://schemas.microsoft.com/office/powerpoint/2010/main" xmlns:p15="http://schemas.microsoft.com/office/powerpoint/2012/main" xmlns:ahyp="http://schemas.microsoft.com/office/drawing/2018/hyperlinkcolor" matchingName="Title slide" type="title">
+<p:sldLayout xmlns:a="http://schemas.openxmlformats.org/drawingml/2006/main" xmlns:r="http://schemas.openxmlformats.org/officeDocument/2006/relationships" xmlns:p="http://schemas.openxmlformats.org/presentationml/2006/main" matchingName="Title slide" type="title">
   <p:cSld name="TITLE">
     <p:spTree>
       <p:nvGrpSpPr>
-        <p:cNvPr id="9" name="Shape 9"/>
+        <p:cNvPr id="1" name="Shape 9"/>
         <p:cNvGrpSpPr/>
         <p:nvPr/>
       </p:nvGrpSpPr>
@@ -1431,7 +1492,7 @@
           </a:xfrm>
           <a:prstGeom prst="diagStripe">
             <a:avLst>
-              <a:gd fmla="val 0" name="adj"/>
+              <a:gd name="adj" fmla="val 0"/>
             </a:avLst>
           </a:prstGeom>
           <a:solidFill>
@@ -1444,12 +1505,12 @@
           </a:ln>
         </p:spPr>
         <p:txBody>
-          <a:bodyPr anchorCtr="0" anchor="ctr" bIns="91425" lIns="91425" spcFirstLastPara="1" rIns="91425" wrap="square" tIns="91425">
+          <a:bodyPr spcFirstLastPara="1" wrap="square" lIns="91425" tIns="91425" rIns="91425" bIns="91425" anchor="ctr" anchorCtr="0">
             <a:noAutofit/>
           </a:bodyPr>
           <a:lstStyle/>
           <a:p>
-            <a:pPr indent="0" lvl="0" marL="0" rtl="0" algn="l">
+            <a:pPr marL="0" lvl="0" indent="0" algn="l" rtl="0">
               <a:spcBef>
                 <a:spcPts val="0"/>
               </a:spcBef>
@@ -1458,9 +1519,6 @@
               </a:spcAft>
               <a:buNone/>
             </a:pPr>
-            <a:r>
-              <a:t/>
-            </a:r>
             <a:endParaRPr/>
           </a:p>
         </p:txBody>
@@ -1492,7 +1550,7 @@
             </a:xfrm>
             <a:prstGeom prst="diagStripe">
               <a:avLst>
-                <a:gd fmla="val 50000" name="adj"/>
+                <a:gd name="adj" fmla="val 50000"/>
               </a:avLst>
             </a:prstGeom>
             <a:solidFill>
@@ -1505,12 +1563,12 @@
             </a:ln>
           </p:spPr>
           <p:txBody>
-            <a:bodyPr anchorCtr="0" anchor="ctr" bIns="91425" lIns="91425" spcFirstLastPara="1" rIns="91425" wrap="square" tIns="91425">
+            <a:bodyPr spcFirstLastPara="1" wrap="square" lIns="91425" tIns="91425" rIns="91425" bIns="91425" anchor="ctr" anchorCtr="0">
               <a:noAutofit/>
             </a:bodyPr>
             <a:lstStyle/>
             <a:p>
-              <a:pPr indent="0" lvl="0" marL="0" rtl="0" algn="l">
+              <a:pPr marL="0" lvl="0" indent="0" algn="l" rtl="0">
                 <a:spcBef>
                   <a:spcPts val="0"/>
                 </a:spcBef>
@@ -1519,9 +1577,6 @@
                 </a:spcAft>
                 <a:buNone/>
               </a:pPr>
-              <a:r>
-                <a:t/>
-              </a:r>
               <a:endParaRPr/>
             </a:p>
           </p:txBody>
@@ -1539,7 +1594,7 @@
             </a:xfrm>
             <a:prstGeom prst="diagStripe">
               <a:avLst>
-                <a:gd fmla="val 58774" name="adj"/>
+                <a:gd name="adj" fmla="val 58774"/>
               </a:avLst>
             </a:prstGeom>
             <a:solidFill>
@@ -1552,12 +1607,12 @@
             </a:ln>
           </p:spPr>
           <p:txBody>
-            <a:bodyPr anchorCtr="0" anchor="ctr" bIns="91425" lIns="91425" spcFirstLastPara="1" rIns="91425" wrap="square" tIns="91425">
+            <a:bodyPr spcFirstLastPara="1" wrap="square" lIns="91425" tIns="91425" rIns="91425" bIns="91425" anchor="ctr" anchorCtr="0">
               <a:noAutofit/>
             </a:bodyPr>
             <a:lstStyle/>
             <a:p>
-              <a:pPr indent="0" lvl="0" marL="0" rtl="0" algn="l">
+              <a:pPr marL="0" lvl="0" indent="0" algn="l" rtl="0">
                 <a:spcBef>
                   <a:spcPts val="0"/>
                 </a:spcBef>
@@ -1566,9 +1621,6 @@
                 </a:spcAft>
                 <a:buNone/>
               </a:pPr>
-              <a:r>
-                <a:t/>
-              </a:r>
               <a:endParaRPr/>
             </a:p>
           </p:txBody>
@@ -1586,7 +1638,7 @@
             </a:xfrm>
             <a:prstGeom prst="diagStripe">
               <a:avLst>
-                <a:gd fmla="val 50000" name="adj"/>
+                <a:gd name="adj" fmla="val 50000"/>
               </a:avLst>
             </a:prstGeom>
             <a:solidFill>
@@ -1597,12 +1649,12 @@
             </a:ln>
           </p:spPr>
           <p:txBody>
-            <a:bodyPr anchorCtr="0" anchor="ctr" bIns="91425" lIns="91425" spcFirstLastPara="1" rIns="91425" wrap="square" tIns="91425">
+            <a:bodyPr spcFirstLastPara="1" wrap="square" lIns="91425" tIns="91425" rIns="91425" bIns="91425" anchor="ctr" anchorCtr="0">
               <a:noAutofit/>
             </a:bodyPr>
             <a:lstStyle/>
             <a:p>
-              <a:pPr indent="0" lvl="0" marL="0" rtl="0" algn="l">
+              <a:pPr marL="0" lvl="0" indent="0" algn="l" rtl="0">
                 <a:spcBef>
                   <a:spcPts val="0"/>
                 </a:spcBef>
@@ -1611,9 +1663,6 @@
                 </a:spcAft>
                 <a:buNone/>
               </a:pPr>
-              <a:r>
-                <a:t/>
-              </a:r>
               <a:endParaRPr/>
             </a:p>
           </p:txBody>
@@ -1631,7 +1680,7 @@
             </a:xfrm>
             <a:prstGeom prst="diagStripe">
               <a:avLst>
-                <a:gd fmla="val 50000" name="adj"/>
+                <a:gd name="adj" fmla="val 50000"/>
               </a:avLst>
             </a:prstGeom>
             <a:solidFill>
@@ -1642,12 +1691,12 @@
             </a:ln>
           </p:spPr>
           <p:txBody>
-            <a:bodyPr anchorCtr="0" anchor="ctr" bIns="91425" lIns="91425" spcFirstLastPara="1" rIns="91425" wrap="square" tIns="91425">
+            <a:bodyPr spcFirstLastPara="1" wrap="square" lIns="91425" tIns="91425" rIns="91425" bIns="91425" anchor="ctr" anchorCtr="0">
               <a:noAutofit/>
             </a:bodyPr>
             <a:lstStyle/>
             <a:p>
-              <a:pPr indent="0" lvl="0" marL="0" rtl="0" algn="l">
+              <a:pPr marL="0" lvl="0" indent="0" algn="l" rtl="0">
                 <a:spcBef>
                   <a:spcPts val="0"/>
                 </a:spcBef>
@@ -1656,9 +1705,6 @@
                 </a:spcAft>
                 <a:buNone/>
               </a:pPr>
-              <a:r>
-                <a:t/>
-              </a:r>
               <a:endParaRPr/>
             </a:p>
           </p:txBody>
@@ -1667,7 +1713,9 @@
       <p:sp>
         <p:nvSpPr>
           <p:cNvPr id="16" name="Google Shape;16;p2"/>
-          <p:cNvSpPr txBox="1"/>
+          <p:cNvSpPr txBox="1">
+            <a:spLocks noGrp="1"/>
+          </p:cNvSpPr>
           <p:nvPr>
             <p:ph type="ctrTitle"/>
           </p:nvPr>
@@ -1682,7 +1730,7 @@
           </a:prstGeom>
         </p:spPr>
         <p:txBody>
-          <a:bodyPr anchorCtr="0" anchor="t" bIns="91425" lIns="91425" spcFirstLastPara="1" rIns="91425" wrap="square" tIns="91425">
+          <a:bodyPr spcFirstLastPara="1" wrap="square" lIns="91425" tIns="91425" rIns="91425" bIns="91425" anchor="t" anchorCtr="0">
             <a:normAutofit/>
           </a:bodyPr>
           <a:lstStyle>
@@ -1786,15 +1834,19 @@
               <a:defRPr sz="4000"/>
             </a:lvl9pPr>
           </a:lstStyle>
-          <a:p/>
+          <a:p>
+            <a:endParaRPr/>
+          </a:p>
         </p:txBody>
       </p:sp>
       <p:sp>
         <p:nvSpPr>
           <p:cNvPr id="17" name="Google Shape;17;p2"/>
-          <p:cNvSpPr txBox="1"/>
+          <p:cNvSpPr txBox="1">
+            <a:spLocks noGrp="1"/>
+          </p:cNvSpPr>
           <p:nvPr>
-            <p:ph idx="1" type="subTitle"/>
+            <p:ph type="subTitle" idx="1"/>
           </p:nvPr>
         </p:nvSpPr>
         <p:spPr>
@@ -1807,7 +1859,7 @@
           </a:prstGeom>
         </p:spPr>
         <p:txBody>
-          <a:bodyPr anchorCtr="0" anchor="t" bIns="91425" lIns="91425" spcFirstLastPara="1" rIns="91425" wrap="square" tIns="91425">
+          <a:bodyPr spcFirstLastPara="1" wrap="square" lIns="91425" tIns="91425" rIns="91425" bIns="91425" anchor="t" anchorCtr="0">
             <a:normAutofit/>
           </a:bodyPr>
           <a:lstStyle>
@@ -1938,15 +1990,19 @@
               <a:defRPr sz="1300"/>
             </a:lvl9pPr>
           </a:lstStyle>
-          <a:p/>
+          <a:p>
+            <a:endParaRPr/>
+          </a:p>
         </p:txBody>
       </p:sp>
       <p:sp>
         <p:nvSpPr>
           <p:cNvPr id="18" name="Google Shape;18;p2"/>
-          <p:cNvSpPr txBox="1"/>
+          <p:cNvSpPr txBox="1">
+            <a:spLocks noGrp="1"/>
+          </p:cNvSpPr>
           <p:nvPr>
-            <p:ph idx="12" type="sldNum"/>
+            <p:ph type="sldNum" idx="12"/>
           </p:nvPr>
         </p:nvSpPr>
         <p:spPr>
@@ -1959,7 +2015,7 @@
           </a:prstGeom>
         </p:spPr>
         <p:txBody>
-          <a:bodyPr anchorCtr="0" anchor="ctr" bIns="91425" lIns="91425" spcFirstLastPara="1" rIns="91425" wrap="square" tIns="91425">
+          <a:bodyPr spcFirstLastPara="1" wrap="square" lIns="91425" tIns="91425" rIns="91425" bIns="91425" anchor="ctr" anchorCtr="0">
             <a:normAutofit/>
           </a:bodyPr>
           <a:lstStyle>
@@ -2001,7 +2057,7 @@
             </a:lvl9pPr>
           </a:lstStyle>
           <a:p>
-            <a:pPr indent="0" lvl="0" marL="0" rtl="0" algn="r">
+            <a:pPr marL="0" lvl="0" indent="0" algn="r" rtl="0">
               <a:spcBef>
                 <a:spcPts val="0"/>
               </a:spcBef>
@@ -2027,11 +2083,11 @@
 </file>
 
 <file path=ppt/slideLayouts/slideLayout10.xml><?xml version="1.0" encoding="utf-8"?>
-<p:sldLayout xmlns:a="http://schemas.openxmlformats.org/drawingml/2006/main" xmlns:r="http://schemas.openxmlformats.org/officeDocument/2006/relationships" xmlns:mc="http://schemas.openxmlformats.org/markup-compatibility/2006" xmlns:mv="urn:schemas-microsoft-com:mac:vml" xmlns:p="http://schemas.openxmlformats.org/presentationml/2006/main" xmlns:c="http://schemas.openxmlformats.org/drawingml/2006/chart" xmlns:dgm="http://schemas.openxmlformats.org/drawingml/2006/diagram" xmlns:o="urn:schemas-microsoft-com:office:office" xmlns:v="urn:schemas-microsoft-com:vml" xmlns:pvml="urn:schemas-microsoft-com:office:powerpoint" xmlns:com="http://schemas.openxmlformats.org/drawingml/2006/compatibility" xmlns:p14="http://schemas.microsoft.com/office/powerpoint/2010/main" xmlns:p15="http://schemas.microsoft.com/office/powerpoint/2012/main" xmlns:ahyp="http://schemas.microsoft.com/office/drawing/2018/hyperlinkcolor" matchingName="Big number">
+<p:sldLayout xmlns:a="http://schemas.openxmlformats.org/drawingml/2006/main" xmlns:r="http://schemas.openxmlformats.org/officeDocument/2006/relationships" xmlns:p="http://schemas.openxmlformats.org/presentationml/2006/main" matchingName="Big number">
   <p:cSld name="BIG_NUMBER">
     <p:spTree>
       <p:nvGrpSpPr>
-        <p:cNvPr id="105" name="Shape 105"/>
+        <p:cNvPr id="1" name="Shape 105"/>
         <p:cNvGrpSpPr/>
         <p:nvPr/>
       </p:nvGrpSpPr>
@@ -2070,7 +2126,7 @@
             </a:xfrm>
             <a:prstGeom prst="diagStripe">
               <a:avLst>
-                <a:gd fmla="val 49469" name="adj"/>
+                <a:gd name="adj" fmla="val 49469"/>
               </a:avLst>
             </a:prstGeom>
             <a:solidFill>
@@ -2083,12 +2139,12 @@
             </a:ln>
           </p:spPr>
           <p:txBody>
-            <a:bodyPr anchorCtr="0" anchor="ctr" bIns="91425" lIns="91425" spcFirstLastPara="1" rIns="91425" wrap="square" tIns="91425">
+            <a:bodyPr spcFirstLastPara="1" wrap="square" lIns="91425" tIns="91425" rIns="91425" bIns="91425" anchor="ctr" anchorCtr="0">
               <a:noAutofit/>
             </a:bodyPr>
             <a:lstStyle/>
             <a:p>
-              <a:pPr indent="0" lvl="0" marL="0" rtl="0" algn="l">
+              <a:pPr marL="0" lvl="0" indent="0" algn="l" rtl="0">
                 <a:spcBef>
                   <a:spcPts val="0"/>
                 </a:spcBef>
@@ -2097,9 +2153,6 @@
                 </a:spcAft>
                 <a:buNone/>
               </a:pPr>
-              <a:r>
-                <a:t/>
-              </a:r>
               <a:endParaRPr/>
             </a:p>
           </p:txBody>
@@ -2117,7 +2170,7 @@
             </a:xfrm>
             <a:prstGeom prst="diagStripe">
               <a:avLst>
-                <a:gd fmla="val 0" name="adj"/>
+                <a:gd name="adj" fmla="val 0"/>
               </a:avLst>
             </a:prstGeom>
             <a:solidFill>
@@ -2130,12 +2183,12 @@
             </a:ln>
           </p:spPr>
           <p:txBody>
-            <a:bodyPr anchorCtr="0" anchor="ctr" bIns="91425" lIns="91425" spcFirstLastPara="1" rIns="91425" wrap="square" tIns="91425">
+            <a:bodyPr spcFirstLastPara="1" wrap="square" lIns="91425" tIns="91425" rIns="91425" bIns="91425" anchor="ctr" anchorCtr="0">
               <a:noAutofit/>
             </a:bodyPr>
             <a:lstStyle/>
             <a:p>
-              <a:pPr indent="0" lvl="0" marL="0" rtl="0" algn="l">
+              <a:pPr marL="0" lvl="0" indent="0" algn="l" rtl="0">
                 <a:spcBef>
                   <a:spcPts val="0"/>
                 </a:spcBef>
@@ -2144,9 +2197,6 @@
                 </a:spcAft>
                 <a:buNone/>
               </a:pPr>
-              <a:r>
-                <a:t/>
-              </a:r>
               <a:endParaRPr/>
             </a:p>
           </p:txBody>
@@ -2164,7 +2214,7 @@
             </a:xfrm>
             <a:prstGeom prst="diagStripe">
               <a:avLst>
-                <a:gd fmla="val 50000" name="adj"/>
+                <a:gd name="adj" fmla="val 50000"/>
               </a:avLst>
             </a:prstGeom>
             <a:solidFill>
@@ -2177,12 +2227,12 @@
             </a:ln>
           </p:spPr>
           <p:txBody>
-            <a:bodyPr anchorCtr="0" anchor="ctr" bIns="91425" lIns="91425" spcFirstLastPara="1" rIns="91425" wrap="square" tIns="91425">
+            <a:bodyPr spcFirstLastPara="1" wrap="square" lIns="91425" tIns="91425" rIns="91425" bIns="91425" anchor="ctr" anchorCtr="0">
               <a:noAutofit/>
             </a:bodyPr>
             <a:lstStyle/>
             <a:p>
-              <a:pPr indent="0" lvl="0" marL="0" rtl="0" algn="l">
+              <a:pPr marL="0" lvl="0" indent="0" algn="l" rtl="0">
                 <a:spcBef>
                   <a:spcPts val="0"/>
                 </a:spcBef>
@@ -2191,9 +2241,6 @@
                 </a:spcAft>
                 <a:buNone/>
               </a:pPr>
-              <a:r>
-                <a:t/>
-              </a:r>
               <a:endParaRPr/>
             </a:p>
           </p:txBody>
@@ -2211,7 +2258,7 @@
             </a:xfrm>
             <a:prstGeom prst="diagStripe">
               <a:avLst>
-                <a:gd fmla="val 50000" name="adj"/>
+                <a:gd name="adj" fmla="val 50000"/>
               </a:avLst>
             </a:prstGeom>
             <a:solidFill>
@@ -2224,12 +2271,12 @@
             </a:ln>
           </p:spPr>
           <p:txBody>
-            <a:bodyPr anchorCtr="0" anchor="ctr" bIns="91425" lIns="91425" spcFirstLastPara="1" rIns="91425" wrap="square" tIns="91425">
+            <a:bodyPr spcFirstLastPara="1" wrap="square" lIns="91425" tIns="91425" rIns="91425" bIns="91425" anchor="ctr" anchorCtr="0">
               <a:noAutofit/>
             </a:bodyPr>
             <a:lstStyle/>
             <a:p>
-              <a:pPr indent="0" lvl="0" marL="0" rtl="0" algn="l">
+              <a:pPr marL="0" lvl="0" indent="0" algn="l" rtl="0">
                 <a:spcBef>
                   <a:spcPts val="0"/>
                 </a:spcBef>
@@ -2238,9 +2285,6 @@
                 </a:spcAft>
                 <a:buNone/>
               </a:pPr>
-              <a:r>
-                <a:t/>
-              </a:r>
               <a:endParaRPr/>
             </a:p>
           </p:txBody>
@@ -2258,7 +2302,7 @@
             </a:xfrm>
             <a:prstGeom prst="diagStripe">
               <a:avLst>
-                <a:gd fmla="val 50000" name="adj"/>
+                <a:gd name="adj" fmla="val 50000"/>
               </a:avLst>
             </a:prstGeom>
             <a:solidFill>
@@ -2271,12 +2315,12 @@
             </a:ln>
           </p:spPr>
           <p:txBody>
-            <a:bodyPr anchorCtr="0" anchor="ctr" bIns="91425" lIns="91425" spcFirstLastPara="1" rIns="91425" wrap="square" tIns="91425">
+            <a:bodyPr spcFirstLastPara="1" wrap="square" lIns="91425" tIns="91425" rIns="91425" bIns="91425" anchor="ctr" anchorCtr="0">
               <a:noAutofit/>
             </a:bodyPr>
             <a:lstStyle/>
             <a:p>
-              <a:pPr indent="0" lvl="0" marL="0" rtl="0" algn="l">
+              <a:pPr marL="0" lvl="0" indent="0" algn="l" rtl="0">
                 <a:spcBef>
                   <a:spcPts val="0"/>
                 </a:spcBef>
@@ -2285,9 +2329,6 @@
                 </a:spcAft>
                 <a:buNone/>
               </a:pPr>
-              <a:r>
-                <a:t/>
-              </a:r>
               <a:endParaRPr/>
             </a:p>
           </p:txBody>
@@ -2305,7 +2346,7 @@
             </a:xfrm>
             <a:prstGeom prst="diagStripe">
               <a:avLst>
-                <a:gd fmla="val 50000" name="adj"/>
+                <a:gd name="adj" fmla="val 50000"/>
               </a:avLst>
             </a:prstGeom>
             <a:solidFill>
@@ -2318,12 +2359,12 @@
             </a:ln>
           </p:spPr>
           <p:txBody>
-            <a:bodyPr anchorCtr="0" anchor="ctr" bIns="91425" lIns="91425" spcFirstLastPara="1" rIns="91425" wrap="square" tIns="91425">
+            <a:bodyPr spcFirstLastPara="1" wrap="square" lIns="91425" tIns="91425" rIns="91425" bIns="91425" anchor="ctr" anchorCtr="0">
               <a:noAutofit/>
             </a:bodyPr>
             <a:lstStyle/>
             <a:p>
-              <a:pPr indent="0" lvl="0" marL="0" rtl="0" algn="l">
+              <a:pPr marL="0" lvl="0" indent="0" algn="l" rtl="0">
                 <a:spcBef>
                   <a:spcPts val="0"/>
                 </a:spcBef>
@@ -2332,9 +2373,6 @@
                 </a:spcAft>
                 <a:buNone/>
               </a:pPr>
-              <a:r>
-                <a:t/>
-              </a:r>
               <a:endParaRPr/>
             </a:p>
           </p:txBody>
@@ -2352,7 +2390,7 @@
             </a:xfrm>
             <a:prstGeom prst="diagStripe">
               <a:avLst>
-                <a:gd fmla="val 50000" name="adj"/>
+                <a:gd name="adj" fmla="val 50000"/>
               </a:avLst>
             </a:prstGeom>
             <a:solidFill>
@@ -2365,12 +2403,12 @@
             </a:ln>
           </p:spPr>
           <p:txBody>
-            <a:bodyPr anchorCtr="0" anchor="ctr" bIns="91425" lIns="91425" spcFirstLastPara="1" rIns="91425" wrap="square" tIns="91425">
+            <a:bodyPr spcFirstLastPara="1" wrap="square" lIns="91425" tIns="91425" rIns="91425" bIns="91425" anchor="ctr" anchorCtr="0">
               <a:noAutofit/>
             </a:bodyPr>
             <a:lstStyle/>
             <a:p>
-              <a:pPr indent="0" lvl="0" marL="0" rtl="0" algn="l">
+              <a:pPr marL="0" lvl="0" indent="0" algn="l" rtl="0">
                 <a:spcBef>
                   <a:spcPts val="0"/>
                 </a:spcBef>
@@ -2379,9 +2417,6 @@
                 </a:spcAft>
                 <a:buNone/>
               </a:pPr>
-              <a:r>
-                <a:t/>
-              </a:r>
               <a:endParaRPr/>
             </a:p>
           </p:txBody>
@@ -2399,7 +2434,7 @@
             </a:xfrm>
             <a:prstGeom prst="diagStripe">
               <a:avLst>
-                <a:gd fmla="val 50000" name="adj"/>
+                <a:gd name="adj" fmla="val 50000"/>
               </a:avLst>
             </a:prstGeom>
             <a:solidFill>
@@ -2410,12 +2445,12 @@
             </a:ln>
           </p:spPr>
           <p:txBody>
-            <a:bodyPr anchorCtr="0" anchor="ctr" bIns="91425" lIns="91425" spcFirstLastPara="1" rIns="91425" wrap="square" tIns="91425">
+            <a:bodyPr spcFirstLastPara="1" wrap="square" lIns="91425" tIns="91425" rIns="91425" bIns="91425" anchor="ctr" anchorCtr="0">
               <a:noAutofit/>
             </a:bodyPr>
             <a:lstStyle/>
             <a:p>
-              <a:pPr indent="0" lvl="0" marL="0" rtl="0" algn="l">
+              <a:pPr marL="0" lvl="0" indent="0" algn="l" rtl="0">
                 <a:spcBef>
                   <a:spcPts val="0"/>
                 </a:spcBef>
@@ -2424,9 +2459,6 @@
                 </a:spcAft>
                 <a:buNone/>
               </a:pPr>
-              <a:r>
-                <a:t/>
-              </a:r>
               <a:endParaRPr/>
             </a:p>
           </p:txBody>
@@ -2444,7 +2476,7 @@
             </a:xfrm>
             <a:prstGeom prst="diagStripe">
               <a:avLst>
-                <a:gd fmla="val 50000" name="adj"/>
+                <a:gd name="adj" fmla="val 50000"/>
               </a:avLst>
             </a:prstGeom>
             <a:solidFill>
@@ -2457,12 +2489,12 @@
             </a:ln>
           </p:spPr>
           <p:txBody>
-            <a:bodyPr anchorCtr="0" anchor="ctr" bIns="91425" lIns="91425" spcFirstLastPara="1" rIns="91425" wrap="square" tIns="91425">
+            <a:bodyPr spcFirstLastPara="1" wrap="square" lIns="91425" tIns="91425" rIns="91425" bIns="91425" anchor="ctr" anchorCtr="0">
               <a:noAutofit/>
             </a:bodyPr>
             <a:lstStyle/>
             <a:p>
-              <a:pPr indent="0" lvl="0" marL="0" rtl="0" algn="l">
+              <a:pPr marL="0" lvl="0" indent="0" algn="l" rtl="0">
                 <a:spcBef>
                   <a:spcPts val="0"/>
                 </a:spcBef>
@@ -2471,9 +2503,6 @@
                 </a:spcAft>
                 <a:buNone/>
               </a:pPr>
-              <a:r>
-                <a:t/>
-              </a:r>
               <a:endParaRPr/>
             </a:p>
           </p:txBody>
@@ -2491,7 +2520,7 @@
             </a:xfrm>
             <a:prstGeom prst="diagStripe">
               <a:avLst>
-                <a:gd fmla="val 50000" name="adj"/>
+                <a:gd name="adj" fmla="val 50000"/>
               </a:avLst>
             </a:prstGeom>
             <a:solidFill>
@@ -2504,12 +2533,12 @@
             </a:ln>
           </p:spPr>
           <p:txBody>
-            <a:bodyPr anchorCtr="0" anchor="ctr" bIns="91425" lIns="91425" spcFirstLastPara="1" rIns="91425" wrap="square" tIns="91425">
+            <a:bodyPr spcFirstLastPara="1" wrap="square" lIns="91425" tIns="91425" rIns="91425" bIns="91425" anchor="ctr" anchorCtr="0">
               <a:noAutofit/>
             </a:bodyPr>
             <a:lstStyle/>
             <a:p>
-              <a:pPr indent="0" lvl="0" marL="0" rtl="0" algn="l">
+              <a:pPr marL="0" lvl="0" indent="0" algn="l" rtl="0">
                 <a:spcBef>
                   <a:spcPts val="0"/>
                 </a:spcBef>
@@ -2518,9 +2547,6 @@
                 </a:spcAft>
                 <a:buNone/>
               </a:pPr>
-              <a:r>
-                <a:t/>
-              </a:r>
               <a:endParaRPr/>
             </a:p>
           </p:txBody>
@@ -2538,7 +2564,7 @@
             </a:xfrm>
             <a:prstGeom prst="diagStripe">
               <a:avLst>
-                <a:gd fmla="val 50000" name="adj"/>
+                <a:gd name="adj" fmla="val 50000"/>
               </a:avLst>
             </a:prstGeom>
             <a:solidFill>
@@ -2551,12 +2577,12 @@
             </a:ln>
           </p:spPr>
           <p:txBody>
-            <a:bodyPr anchorCtr="0" anchor="ctr" bIns="91425" lIns="91425" spcFirstLastPara="1" rIns="91425" wrap="square" tIns="91425">
+            <a:bodyPr spcFirstLastPara="1" wrap="square" lIns="91425" tIns="91425" rIns="91425" bIns="91425" anchor="ctr" anchorCtr="0">
               <a:noAutofit/>
             </a:bodyPr>
             <a:lstStyle/>
             <a:p>
-              <a:pPr indent="0" lvl="0" marL="0" rtl="0" algn="l">
+              <a:pPr marL="0" lvl="0" indent="0" algn="l" rtl="0">
                 <a:spcBef>
                   <a:spcPts val="0"/>
                 </a:spcBef>
@@ -2565,9 +2591,6 @@
                 </a:spcAft>
                 <a:buNone/>
               </a:pPr>
-              <a:r>
-                <a:t/>
-              </a:r>
               <a:endParaRPr/>
             </a:p>
           </p:txBody>
@@ -2585,7 +2608,7 @@
             </a:xfrm>
             <a:prstGeom prst="diagStripe">
               <a:avLst>
-                <a:gd fmla="val 50000" name="adj"/>
+                <a:gd name="adj" fmla="val 50000"/>
               </a:avLst>
             </a:prstGeom>
             <a:solidFill>
@@ -2598,12 +2621,12 @@
             </a:ln>
           </p:spPr>
           <p:txBody>
-            <a:bodyPr anchorCtr="0" anchor="ctr" bIns="91425" lIns="91425" spcFirstLastPara="1" rIns="91425" wrap="square" tIns="91425">
+            <a:bodyPr spcFirstLastPara="1" wrap="square" lIns="91425" tIns="91425" rIns="91425" bIns="91425" anchor="ctr" anchorCtr="0">
               <a:noAutofit/>
             </a:bodyPr>
             <a:lstStyle/>
             <a:p>
-              <a:pPr indent="0" lvl="0" marL="0" rtl="0" algn="l">
+              <a:pPr marL="0" lvl="0" indent="0" algn="l" rtl="0">
                 <a:spcBef>
                   <a:spcPts val="0"/>
                 </a:spcBef>
@@ -2612,9 +2635,6 @@
                 </a:spcAft>
                 <a:buNone/>
               </a:pPr>
-              <a:r>
-                <a:t/>
-              </a:r>
               <a:endParaRPr/>
             </a:p>
           </p:txBody>
@@ -2632,7 +2652,7 @@
             </a:xfrm>
             <a:prstGeom prst="diagStripe">
               <a:avLst>
-                <a:gd fmla="val 50000" name="adj"/>
+                <a:gd name="adj" fmla="val 50000"/>
               </a:avLst>
             </a:prstGeom>
             <a:solidFill>
@@ -2645,12 +2665,12 @@
             </a:ln>
           </p:spPr>
           <p:txBody>
-            <a:bodyPr anchorCtr="0" anchor="ctr" bIns="91425" lIns="91425" spcFirstLastPara="1" rIns="91425" wrap="square" tIns="91425">
+            <a:bodyPr spcFirstLastPara="1" wrap="square" lIns="91425" tIns="91425" rIns="91425" bIns="91425" anchor="ctr" anchorCtr="0">
               <a:noAutofit/>
             </a:bodyPr>
             <a:lstStyle/>
             <a:p>
-              <a:pPr indent="0" lvl="0" marL="0" rtl="0" algn="l">
+              <a:pPr marL="0" lvl="0" indent="0" algn="l" rtl="0">
                 <a:spcBef>
                   <a:spcPts val="0"/>
                 </a:spcBef>
@@ -2659,9 +2679,6 @@
                 </a:spcAft>
                 <a:buNone/>
               </a:pPr>
-              <a:r>
-                <a:t/>
-              </a:r>
               <a:endParaRPr/>
             </a:p>
           </p:txBody>
@@ -2679,7 +2696,7 @@
             </a:xfrm>
             <a:prstGeom prst="diagStripe">
               <a:avLst>
-                <a:gd fmla="val 50000" name="adj"/>
+                <a:gd name="adj" fmla="val 50000"/>
               </a:avLst>
             </a:prstGeom>
             <a:solidFill>
@@ -2690,12 +2707,12 @@
             </a:ln>
           </p:spPr>
           <p:txBody>
-            <a:bodyPr anchorCtr="0" anchor="ctr" bIns="91425" lIns="91425" spcFirstLastPara="1" rIns="91425" wrap="square" tIns="91425">
+            <a:bodyPr spcFirstLastPara="1" wrap="square" lIns="91425" tIns="91425" rIns="91425" bIns="91425" anchor="ctr" anchorCtr="0">
               <a:noAutofit/>
             </a:bodyPr>
             <a:lstStyle/>
             <a:p>
-              <a:pPr indent="0" lvl="0" marL="0" rtl="0" algn="l">
+              <a:pPr marL="0" lvl="0" indent="0" algn="l" rtl="0">
                 <a:spcBef>
                   <a:spcPts val="0"/>
                 </a:spcBef>
@@ -2704,9 +2721,6 @@
                 </a:spcAft>
                 <a:buNone/>
               </a:pPr>
-              <a:r>
-                <a:t/>
-              </a:r>
               <a:endParaRPr/>
             </a:p>
           </p:txBody>
@@ -2724,7 +2738,7 @@
             </a:xfrm>
             <a:prstGeom prst="diagStripe">
               <a:avLst>
-                <a:gd fmla="val 50000" name="adj"/>
+                <a:gd name="adj" fmla="val 50000"/>
               </a:avLst>
             </a:prstGeom>
             <a:solidFill>
@@ -2737,12 +2751,12 @@
             </a:ln>
           </p:spPr>
           <p:txBody>
-            <a:bodyPr anchorCtr="0" anchor="ctr" bIns="91425" lIns="91425" spcFirstLastPara="1" rIns="91425" wrap="square" tIns="91425">
+            <a:bodyPr spcFirstLastPara="1" wrap="square" lIns="91425" tIns="91425" rIns="91425" bIns="91425" anchor="ctr" anchorCtr="0">
               <a:noAutofit/>
             </a:bodyPr>
             <a:lstStyle/>
             <a:p>
-              <a:pPr indent="0" lvl="0" marL="0" rtl="0" algn="l">
+              <a:pPr marL="0" lvl="0" indent="0" algn="l" rtl="0">
                 <a:spcBef>
                   <a:spcPts val="0"/>
                 </a:spcBef>
@@ -2751,9 +2765,6 @@
                 </a:spcAft>
                 <a:buNone/>
               </a:pPr>
-              <a:r>
-                <a:t/>
-              </a:r>
               <a:endParaRPr/>
             </a:p>
           </p:txBody>
@@ -2771,7 +2782,7 @@
             </a:xfrm>
             <a:prstGeom prst="diagStripe">
               <a:avLst>
-                <a:gd fmla="val 50000" name="adj"/>
+                <a:gd name="adj" fmla="val 50000"/>
               </a:avLst>
             </a:prstGeom>
             <a:solidFill>
@@ -2784,12 +2795,12 @@
             </a:ln>
           </p:spPr>
           <p:txBody>
-            <a:bodyPr anchorCtr="0" anchor="ctr" bIns="91425" lIns="91425" spcFirstLastPara="1" rIns="91425" wrap="square" tIns="91425">
+            <a:bodyPr spcFirstLastPara="1" wrap="square" lIns="91425" tIns="91425" rIns="91425" bIns="91425" anchor="ctr" anchorCtr="0">
               <a:noAutofit/>
             </a:bodyPr>
             <a:lstStyle/>
             <a:p>
-              <a:pPr indent="0" lvl="0" marL="0" rtl="0" algn="l">
+              <a:pPr marL="0" lvl="0" indent="0" algn="l" rtl="0">
                 <a:spcBef>
                   <a:spcPts val="0"/>
                 </a:spcBef>
@@ -2798,9 +2809,6 @@
                 </a:spcAft>
                 <a:buNone/>
               </a:pPr>
-              <a:r>
-                <a:t/>
-              </a:r>
               <a:endParaRPr/>
             </a:p>
           </p:txBody>
@@ -2818,7 +2826,7 @@
             </a:xfrm>
             <a:prstGeom prst="diagStripe">
               <a:avLst>
-                <a:gd fmla="val 50000" name="adj"/>
+                <a:gd name="adj" fmla="val 50000"/>
               </a:avLst>
             </a:prstGeom>
             <a:solidFill>
@@ -2831,12 +2839,12 @@
             </a:ln>
           </p:spPr>
           <p:txBody>
-            <a:bodyPr anchorCtr="0" anchor="ctr" bIns="91425" lIns="91425" spcFirstLastPara="1" rIns="91425" wrap="square" tIns="91425">
+            <a:bodyPr spcFirstLastPara="1" wrap="square" lIns="91425" tIns="91425" rIns="91425" bIns="91425" anchor="ctr" anchorCtr="0">
               <a:noAutofit/>
             </a:bodyPr>
             <a:lstStyle/>
             <a:p>
-              <a:pPr indent="0" lvl="0" marL="0" rtl="0" algn="l">
+              <a:pPr marL="0" lvl="0" indent="0" algn="l" rtl="0">
                 <a:spcBef>
                   <a:spcPts val="0"/>
                 </a:spcBef>
@@ -2845,9 +2853,6 @@
                 </a:spcAft>
                 <a:buNone/>
               </a:pPr>
-              <a:r>
-                <a:t/>
-              </a:r>
               <a:endParaRPr/>
             </a:p>
           </p:txBody>
@@ -2865,7 +2870,7 @@
             </a:xfrm>
             <a:prstGeom prst="diagStripe">
               <a:avLst>
-                <a:gd fmla="val 50000" name="adj"/>
+                <a:gd name="adj" fmla="val 50000"/>
               </a:avLst>
             </a:prstGeom>
             <a:solidFill>
@@ -2878,12 +2883,12 @@
             </a:ln>
           </p:spPr>
           <p:txBody>
-            <a:bodyPr anchorCtr="0" anchor="ctr" bIns="91425" lIns="91425" spcFirstLastPara="1" rIns="91425" wrap="square" tIns="91425">
+            <a:bodyPr spcFirstLastPara="1" wrap="square" lIns="91425" tIns="91425" rIns="91425" bIns="91425" anchor="ctr" anchorCtr="0">
               <a:noAutofit/>
             </a:bodyPr>
             <a:lstStyle/>
             <a:p>
-              <a:pPr indent="0" lvl="0" marL="0" rtl="0" algn="l">
+              <a:pPr marL="0" lvl="0" indent="0" algn="l" rtl="0">
                 <a:spcBef>
                   <a:spcPts val="0"/>
                 </a:spcBef>
@@ -2892,9 +2897,6 @@
                 </a:spcAft>
                 <a:buNone/>
               </a:pPr>
-              <a:r>
-                <a:t/>
-              </a:r>
               <a:endParaRPr/>
             </a:p>
           </p:txBody>
@@ -2903,9 +2905,11 @@
       <p:sp>
         <p:nvSpPr>
           <p:cNvPr id="125" name="Google Shape;125;p11"/>
-          <p:cNvSpPr txBox="1"/>
+          <p:cNvSpPr txBox="1">
+            <a:spLocks noGrp="1"/>
+          </p:cNvSpPr>
           <p:nvPr>
-            <p:ph hasCustomPrompt="1" type="title"/>
+            <p:ph type="title" hasCustomPrompt="1"/>
           </p:nvPr>
         </p:nvSpPr>
         <p:spPr>
@@ -2918,7 +2922,7 @@
           </a:prstGeom>
         </p:spPr>
         <p:txBody>
-          <a:bodyPr anchorCtr="0" anchor="t" bIns="91425" lIns="91425" spcFirstLastPara="1" rIns="91425" wrap="square" tIns="91425">
+          <a:bodyPr spcFirstLastPara="1" wrap="square" lIns="91425" tIns="91425" rIns="91425" bIns="91425" anchor="t" anchorCtr="0">
             <a:normAutofit/>
           </a:bodyPr>
           <a:lstStyle>
@@ -3032,9 +3036,11 @@
       <p:sp>
         <p:nvSpPr>
           <p:cNvPr id="126" name="Google Shape;126;p11"/>
-          <p:cNvSpPr txBox="1"/>
+          <p:cNvSpPr txBox="1">
+            <a:spLocks noGrp="1"/>
+          </p:cNvSpPr>
           <p:nvPr>
-            <p:ph idx="1" type="body"/>
+            <p:ph type="body" idx="1"/>
           </p:nvPr>
         </p:nvSpPr>
         <p:spPr>
@@ -3047,11 +3053,11 @@
           </a:prstGeom>
         </p:spPr>
         <p:txBody>
-          <a:bodyPr anchorCtr="0" anchor="t" bIns="91425" lIns="91425" spcFirstLastPara="1" rIns="91425" wrap="square" tIns="91425">
+          <a:bodyPr spcFirstLastPara="1" wrap="square" lIns="91425" tIns="91425" rIns="91425" bIns="91425" anchor="t" anchorCtr="0">
             <a:normAutofit/>
           </a:bodyPr>
           <a:lstStyle>
-            <a:lvl1pPr indent="-311150" lvl="0" marL="457200">
+            <a:lvl1pPr marL="457200" lvl="0" indent="-311150">
               <a:spcBef>
                 <a:spcPts val="0"/>
               </a:spcBef>
@@ -3062,7 +3068,7 @@
               <a:buChar char="●"/>
               <a:defRPr/>
             </a:lvl1pPr>
-            <a:lvl2pPr indent="-298450" lvl="1" marL="914400">
+            <a:lvl2pPr marL="914400" lvl="1" indent="-298450">
               <a:spcBef>
                 <a:spcPts val="0"/>
               </a:spcBef>
@@ -3073,7 +3079,7 @@
               <a:buChar char="○"/>
               <a:defRPr/>
             </a:lvl2pPr>
-            <a:lvl3pPr indent="-298450" lvl="2" marL="1371600">
+            <a:lvl3pPr marL="1371600" lvl="2" indent="-298450">
               <a:spcBef>
                 <a:spcPts val="0"/>
               </a:spcBef>
@@ -3084,7 +3090,7 @@
               <a:buChar char="■"/>
               <a:defRPr/>
             </a:lvl3pPr>
-            <a:lvl4pPr indent="-298450" lvl="3" marL="1828800">
+            <a:lvl4pPr marL="1828800" lvl="3" indent="-298450">
               <a:spcBef>
                 <a:spcPts val="0"/>
               </a:spcBef>
@@ -3095,7 +3101,7 @@
               <a:buChar char="●"/>
               <a:defRPr/>
             </a:lvl4pPr>
-            <a:lvl5pPr indent="-298450" lvl="4" marL="2286000">
+            <a:lvl5pPr marL="2286000" lvl="4" indent="-298450">
               <a:spcBef>
                 <a:spcPts val="0"/>
               </a:spcBef>
@@ -3106,7 +3112,7 @@
               <a:buChar char="○"/>
               <a:defRPr/>
             </a:lvl5pPr>
-            <a:lvl6pPr indent="-298450" lvl="5" marL="2743200">
+            <a:lvl6pPr marL="2743200" lvl="5" indent="-298450">
               <a:spcBef>
                 <a:spcPts val="0"/>
               </a:spcBef>
@@ -3117,7 +3123,7 @@
               <a:buChar char="■"/>
               <a:defRPr/>
             </a:lvl6pPr>
-            <a:lvl7pPr indent="-298450" lvl="6" marL="3200400">
+            <a:lvl7pPr marL="3200400" lvl="6" indent="-298450">
               <a:spcBef>
                 <a:spcPts val="0"/>
               </a:spcBef>
@@ -3128,7 +3134,7 @@
               <a:buChar char="●"/>
               <a:defRPr/>
             </a:lvl7pPr>
-            <a:lvl8pPr indent="-298450" lvl="7" marL="3657600">
+            <a:lvl8pPr marL="3657600" lvl="7" indent="-298450">
               <a:spcBef>
                 <a:spcPts val="0"/>
               </a:spcBef>
@@ -3139,7 +3145,7 @@
               <a:buChar char="○"/>
               <a:defRPr/>
             </a:lvl8pPr>
-            <a:lvl9pPr indent="-298450" lvl="8" marL="4114800">
+            <a:lvl9pPr marL="4114800" lvl="8" indent="-298450">
               <a:spcBef>
                 <a:spcPts val="0"/>
               </a:spcBef>
@@ -3151,15 +3157,19 @@
               <a:defRPr/>
             </a:lvl9pPr>
           </a:lstStyle>
-          <a:p/>
+          <a:p>
+            <a:endParaRPr/>
+          </a:p>
         </p:txBody>
       </p:sp>
       <p:sp>
         <p:nvSpPr>
           <p:cNvPr id="127" name="Google Shape;127;p11"/>
-          <p:cNvSpPr txBox="1"/>
+          <p:cNvSpPr txBox="1">
+            <a:spLocks noGrp="1"/>
+          </p:cNvSpPr>
           <p:nvPr>
-            <p:ph idx="12" type="sldNum"/>
+            <p:ph type="sldNum" idx="12"/>
           </p:nvPr>
         </p:nvSpPr>
         <p:spPr>
@@ -3172,7 +3182,7 @@
           </a:prstGeom>
         </p:spPr>
         <p:txBody>
-          <a:bodyPr anchorCtr="0" anchor="ctr" bIns="91425" lIns="91425" spcFirstLastPara="1" rIns="91425" wrap="square" tIns="91425">
+          <a:bodyPr spcFirstLastPara="1" wrap="square" lIns="91425" tIns="91425" rIns="91425" bIns="91425" anchor="ctr" anchorCtr="0">
             <a:normAutofit/>
           </a:bodyPr>
           <a:lstStyle>
@@ -3214,7 +3224,7 @@
             </a:lvl9pPr>
           </a:lstStyle>
           <a:p>
-            <a:pPr indent="0" lvl="0" marL="0" rtl="0" algn="r">
+            <a:pPr marL="0" lvl="0" indent="0" algn="r" rtl="0">
               <a:spcBef>
                 <a:spcPts val="0"/>
               </a:spcBef>
@@ -3240,11 +3250,11 @@
 </file>
 
 <file path=ppt/slideLayouts/slideLayout11.xml><?xml version="1.0" encoding="utf-8"?>
-<p:sldLayout xmlns:a="http://schemas.openxmlformats.org/drawingml/2006/main" xmlns:r="http://schemas.openxmlformats.org/officeDocument/2006/relationships" xmlns:mc="http://schemas.openxmlformats.org/markup-compatibility/2006" xmlns:mv="urn:schemas-microsoft-com:mac:vml" xmlns:p="http://schemas.openxmlformats.org/presentationml/2006/main" xmlns:c="http://schemas.openxmlformats.org/drawingml/2006/chart" xmlns:dgm="http://schemas.openxmlformats.org/drawingml/2006/diagram" xmlns:o="urn:schemas-microsoft-com:office:office" xmlns:v="urn:schemas-microsoft-com:vml" xmlns:pvml="urn:schemas-microsoft-com:office:powerpoint" xmlns:com="http://schemas.openxmlformats.org/drawingml/2006/compatibility" xmlns:p14="http://schemas.microsoft.com/office/powerpoint/2010/main" xmlns:p15="http://schemas.microsoft.com/office/powerpoint/2012/main" xmlns:ahyp="http://schemas.microsoft.com/office/drawing/2018/hyperlinkcolor" matchingName="Blank" type="blank">
+<p:sldLayout xmlns:a="http://schemas.openxmlformats.org/drawingml/2006/main" xmlns:r="http://schemas.openxmlformats.org/officeDocument/2006/relationships" xmlns:p="http://schemas.openxmlformats.org/presentationml/2006/main" matchingName="Blank" type="blank">
   <p:cSld name="BLANK">
     <p:spTree>
       <p:nvGrpSpPr>
-        <p:cNvPr id="128" name="Shape 128"/>
+        <p:cNvPr id="1" name="Shape 128"/>
         <p:cNvGrpSpPr/>
         <p:nvPr/>
       </p:nvGrpSpPr>
@@ -3259,9 +3269,11 @@
       <p:sp>
         <p:nvSpPr>
           <p:cNvPr id="129" name="Google Shape;129;p12"/>
-          <p:cNvSpPr txBox="1"/>
+          <p:cNvSpPr txBox="1">
+            <a:spLocks noGrp="1"/>
+          </p:cNvSpPr>
           <p:nvPr>
-            <p:ph idx="12" type="sldNum"/>
+            <p:ph type="sldNum" idx="12"/>
           </p:nvPr>
         </p:nvSpPr>
         <p:spPr>
@@ -3274,7 +3286,7 @@
           </a:prstGeom>
         </p:spPr>
         <p:txBody>
-          <a:bodyPr anchorCtr="0" anchor="ctr" bIns="91425" lIns="91425" spcFirstLastPara="1" rIns="91425" wrap="square" tIns="91425">
+          <a:bodyPr spcFirstLastPara="1" wrap="square" lIns="91425" tIns="91425" rIns="91425" bIns="91425" anchor="ctr" anchorCtr="0">
             <a:normAutofit/>
           </a:bodyPr>
           <a:lstStyle>
@@ -3316,7 +3328,7 @@
             </a:lvl9pPr>
           </a:lstStyle>
           <a:p>
-            <a:pPr indent="0" lvl="0" marL="0" rtl="0" algn="r">
+            <a:pPr marL="0" lvl="0" indent="0" algn="r" rtl="0">
               <a:spcBef>
                 <a:spcPts val="0"/>
               </a:spcBef>
@@ -3342,11 +3354,11 @@
 </file>
 
 <file path=ppt/slideLayouts/slideLayout2.xml><?xml version="1.0" encoding="utf-8"?>
-<p:sldLayout xmlns:a="http://schemas.openxmlformats.org/drawingml/2006/main" xmlns:r="http://schemas.openxmlformats.org/officeDocument/2006/relationships" xmlns:mc="http://schemas.openxmlformats.org/markup-compatibility/2006" xmlns:mv="urn:schemas-microsoft-com:mac:vml" xmlns:p="http://schemas.openxmlformats.org/presentationml/2006/main" xmlns:c="http://schemas.openxmlformats.org/drawingml/2006/chart" xmlns:dgm="http://schemas.openxmlformats.org/drawingml/2006/diagram" xmlns:o="urn:schemas-microsoft-com:office:office" xmlns:v="urn:schemas-microsoft-com:vml" xmlns:pvml="urn:schemas-microsoft-com:office:powerpoint" xmlns:com="http://schemas.openxmlformats.org/drawingml/2006/compatibility" xmlns:p14="http://schemas.microsoft.com/office/powerpoint/2010/main" xmlns:p15="http://schemas.microsoft.com/office/powerpoint/2012/main" xmlns:ahyp="http://schemas.microsoft.com/office/drawing/2018/hyperlinkcolor" matchingName="Section header" type="secHead">
+<p:sldLayout xmlns:a="http://schemas.openxmlformats.org/drawingml/2006/main" xmlns:r="http://schemas.openxmlformats.org/officeDocument/2006/relationships" xmlns:p="http://schemas.openxmlformats.org/presentationml/2006/main" matchingName="Section header" type="secHead">
   <p:cSld name="SECTION_HEADER">
     <p:spTree>
       <p:nvGrpSpPr>
-        <p:cNvPr id="19" name="Shape 19"/>
+        <p:cNvPr id="1" name="Shape 19"/>
         <p:cNvGrpSpPr/>
         <p:nvPr/>
       </p:nvGrpSpPr>
@@ -3385,7 +3397,7 @@
             </a:xfrm>
             <a:prstGeom prst="diagStripe">
               <a:avLst>
-                <a:gd fmla="val 49469" name="adj"/>
+                <a:gd name="adj" fmla="val 49469"/>
               </a:avLst>
             </a:prstGeom>
             <a:solidFill>
@@ -3398,12 +3410,12 @@
             </a:ln>
           </p:spPr>
           <p:txBody>
-            <a:bodyPr anchorCtr="0" anchor="ctr" bIns="91425" lIns="91425" spcFirstLastPara="1" rIns="91425" wrap="square" tIns="91425">
+            <a:bodyPr spcFirstLastPara="1" wrap="square" lIns="91425" tIns="91425" rIns="91425" bIns="91425" anchor="ctr" anchorCtr="0">
               <a:noAutofit/>
             </a:bodyPr>
             <a:lstStyle/>
             <a:p>
-              <a:pPr indent="0" lvl="0" marL="0" rtl="0" algn="l">
+              <a:pPr marL="0" lvl="0" indent="0" algn="l" rtl="0">
                 <a:spcBef>
                   <a:spcPts val="0"/>
                 </a:spcBef>
@@ -3412,9 +3424,6 @@
                 </a:spcAft>
                 <a:buNone/>
               </a:pPr>
-              <a:r>
-                <a:t/>
-              </a:r>
               <a:endParaRPr/>
             </a:p>
           </p:txBody>
@@ -3432,7 +3441,7 @@
             </a:xfrm>
             <a:prstGeom prst="diagStripe">
               <a:avLst>
-                <a:gd fmla="val 0" name="adj"/>
+                <a:gd name="adj" fmla="val 0"/>
               </a:avLst>
             </a:prstGeom>
             <a:solidFill>
@@ -3445,12 +3454,12 @@
             </a:ln>
           </p:spPr>
           <p:txBody>
-            <a:bodyPr anchorCtr="0" anchor="ctr" bIns="91425" lIns="91425" spcFirstLastPara="1" rIns="91425" wrap="square" tIns="91425">
+            <a:bodyPr spcFirstLastPara="1" wrap="square" lIns="91425" tIns="91425" rIns="91425" bIns="91425" anchor="ctr" anchorCtr="0">
               <a:noAutofit/>
             </a:bodyPr>
             <a:lstStyle/>
             <a:p>
-              <a:pPr indent="0" lvl="0" marL="0" rtl="0" algn="l">
+              <a:pPr marL="0" lvl="0" indent="0" algn="l" rtl="0">
                 <a:spcBef>
                   <a:spcPts val="0"/>
                 </a:spcBef>
@@ -3459,9 +3468,6 @@
                 </a:spcAft>
                 <a:buNone/>
               </a:pPr>
-              <a:r>
-                <a:t/>
-              </a:r>
               <a:endParaRPr/>
             </a:p>
           </p:txBody>
@@ -3479,7 +3485,7 @@
             </a:xfrm>
             <a:prstGeom prst="diagStripe">
               <a:avLst>
-                <a:gd fmla="val 50000" name="adj"/>
+                <a:gd name="adj" fmla="val 50000"/>
               </a:avLst>
             </a:prstGeom>
             <a:solidFill>
@@ -3492,12 +3498,12 @@
             </a:ln>
           </p:spPr>
           <p:txBody>
-            <a:bodyPr anchorCtr="0" anchor="ctr" bIns="91425" lIns="91425" spcFirstLastPara="1" rIns="91425" wrap="square" tIns="91425">
+            <a:bodyPr spcFirstLastPara="1" wrap="square" lIns="91425" tIns="91425" rIns="91425" bIns="91425" anchor="ctr" anchorCtr="0">
               <a:noAutofit/>
             </a:bodyPr>
             <a:lstStyle/>
             <a:p>
-              <a:pPr indent="0" lvl="0" marL="0" rtl="0" algn="l">
+              <a:pPr marL="0" lvl="0" indent="0" algn="l" rtl="0">
                 <a:spcBef>
                   <a:spcPts val="0"/>
                 </a:spcBef>
@@ -3506,9 +3512,6 @@
                 </a:spcAft>
                 <a:buNone/>
               </a:pPr>
-              <a:r>
-                <a:t/>
-              </a:r>
               <a:endParaRPr/>
             </a:p>
           </p:txBody>
@@ -3526,7 +3529,7 @@
             </a:xfrm>
             <a:prstGeom prst="diagStripe">
               <a:avLst>
-                <a:gd fmla="val 50000" name="adj"/>
+                <a:gd name="adj" fmla="val 50000"/>
               </a:avLst>
             </a:prstGeom>
             <a:solidFill>
@@ -3539,12 +3542,12 @@
             </a:ln>
           </p:spPr>
           <p:txBody>
-            <a:bodyPr anchorCtr="0" anchor="ctr" bIns="91425" lIns="91425" spcFirstLastPara="1" rIns="91425" wrap="square" tIns="91425">
+            <a:bodyPr spcFirstLastPara="1" wrap="square" lIns="91425" tIns="91425" rIns="91425" bIns="91425" anchor="ctr" anchorCtr="0">
               <a:noAutofit/>
             </a:bodyPr>
             <a:lstStyle/>
             <a:p>
-              <a:pPr indent="0" lvl="0" marL="0" rtl="0" algn="l">
+              <a:pPr marL="0" lvl="0" indent="0" algn="l" rtl="0">
                 <a:spcBef>
                   <a:spcPts val="0"/>
                 </a:spcBef>
@@ -3553,9 +3556,6 @@
                 </a:spcAft>
                 <a:buNone/>
               </a:pPr>
-              <a:r>
-                <a:t/>
-              </a:r>
               <a:endParaRPr/>
             </a:p>
           </p:txBody>
@@ -3573,7 +3573,7 @@
             </a:xfrm>
             <a:prstGeom prst="diagStripe">
               <a:avLst>
-                <a:gd fmla="val 50000" name="adj"/>
+                <a:gd name="adj" fmla="val 50000"/>
               </a:avLst>
             </a:prstGeom>
             <a:solidFill>
@@ -3586,12 +3586,12 @@
             </a:ln>
           </p:spPr>
           <p:txBody>
-            <a:bodyPr anchorCtr="0" anchor="ctr" bIns="91425" lIns="91425" spcFirstLastPara="1" rIns="91425" wrap="square" tIns="91425">
+            <a:bodyPr spcFirstLastPara="1" wrap="square" lIns="91425" tIns="91425" rIns="91425" bIns="91425" anchor="ctr" anchorCtr="0">
               <a:noAutofit/>
             </a:bodyPr>
             <a:lstStyle/>
             <a:p>
-              <a:pPr indent="0" lvl="0" marL="0" rtl="0" algn="l">
+              <a:pPr marL="0" lvl="0" indent="0" algn="l" rtl="0">
                 <a:spcBef>
                   <a:spcPts val="0"/>
                 </a:spcBef>
@@ -3600,9 +3600,6 @@
                 </a:spcAft>
                 <a:buNone/>
               </a:pPr>
-              <a:r>
-                <a:t/>
-              </a:r>
               <a:endParaRPr/>
             </a:p>
           </p:txBody>
@@ -3620,7 +3617,7 @@
             </a:xfrm>
             <a:prstGeom prst="diagStripe">
               <a:avLst>
-                <a:gd fmla="val 50000" name="adj"/>
+                <a:gd name="adj" fmla="val 50000"/>
               </a:avLst>
             </a:prstGeom>
             <a:solidFill>
@@ -3633,12 +3630,12 @@
             </a:ln>
           </p:spPr>
           <p:txBody>
-            <a:bodyPr anchorCtr="0" anchor="ctr" bIns="91425" lIns="91425" spcFirstLastPara="1" rIns="91425" wrap="square" tIns="91425">
+            <a:bodyPr spcFirstLastPara="1" wrap="square" lIns="91425" tIns="91425" rIns="91425" bIns="91425" anchor="ctr" anchorCtr="0">
               <a:noAutofit/>
             </a:bodyPr>
             <a:lstStyle/>
             <a:p>
-              <a:pPr indent="0" lvl="0" marL="0" rtl="0" algn="l">
+              <a:pPr marL="0" lvl="0" indent="0" algn="l" rtl="0">
                 <a:spcBef>
                   <a:spcPts val="0"/>
                 </a:spcBef>
@@ -3647,9 +3644,6 @@
                 </a:spcAft>
                 <a:buNone/>
               </a:pPr>
-              <a:r>
-                <a:t/>
-              </a:r>
               <a:endParaRPr/>
             </a:p>
           </p:txBody>
@@ -3667,7 +3661,7 @@
             </a:xfrm>
             <a:prstGeom prst="diagStripe">
               <a:avLst>
-                <a:gd fmla="val 50000" name="adj"/>
+                <a:gd name="adj" fmla="val 50000"/>
               </a:avLst>
             </a:prstGeom>
             <a:solidFill>
@@ -3680,12 +3674,12 @@
             </a:ln>
           </p:spPr>
           <p:txBody>
-            <a:bodyPr anchorCtr="0" anchor="ctr" bIns="91425" lIns="91425" spcFirstLastPara="1" rIns="91425" wrap="square" tIns="91425">
+            <a:bodyPr spcFirstLastPara="1" wrap="square" lIns="91425" tIns="91425" rIns="91425" bIns="91425" anchor="ctr" anchorCtr="0">
               <a:noAutofit/>
             </a:bodyPr>
             <a:lstStyle/>
             <a:p>
-              <a:pPr indent="0" lvl="0" marL="0" rtl="0" algn="l">
+              <a:pPr marL="0" lvl="0" indent="0" algn="l" rtl="0">
                 <a:spcBef>
                   <a:spcPts val="0"/>
                 </a:spcBef>
@@ -3694,9 +3688,6 @@
                 </a:spcAft>
                 <a:buNone/>
               </a:pPr>
-              <a:r>
-                <a:t/>
-              </a:r>
               <a:endParaRPr/>
             </a:p>
           </p:txBody>
@@ -3714,7 +3705,7 @@
             </a:xfrm>
             <a:prstGeom prst="diagStripe">
               <a:avLst>
-                <a:gd fmla="val 50000" name="adj"/>
+                <a:gd name="adj" fmla="val 50000"/>
               </a:avLst>
             </a:prstGeom>
             <a:solidFill>
@@ -3725,12 +3716,12 @@
             </a:ln>
           </p:spPr>
           <p:txBody>
-            <a:bodyPr anchorCtr="0" anchor="ctr" bIns="91425" lIns="91425" spcFirstLastPara="1" rIns="91425" wrap="square" tIns="91425">
+            <a:bodyPr spcFirstLastPara="1" wrap="square" lIns="91425" tIns="91425" rIns="91425" bIns="91425" anchor="ctr" anchorCtr="0">
               <a:noAutofit/>
             </a:bodyPr>
             <a:lstStyle/>
             <a:p>
-              <a:pPr indent="0" lvl="0" marL="0" rtl="0" algn="l">
+              <a:pPr marL="0" lvl="0" indent="0" algn="l" rtl="0">
                 <a:spcBef>
                   <a:spcPts val="0"/>
                 </a:spcBef>
@@ -3739,9 +3730,6 @@
                 </a:spcAft>
                 <a:buNone/>
               </a:pPr>
-              <a:r>
-                <a:t/>
-              </a:r>
               <a:endParaRPr/>
             </a:p>
           </p:txBody>
@@ -3759,7 +3747,7 @@
             </a:xfrm>
             <a:prstGeom prst="diagStripe">
               <a:avLst>
-                <a:gd fmla="val 50000" name="adj"/>
+                <a:gd name="adj" fmla="val 50000"/>
               </a:avLst>
             </a:prstGeom>
             <a:solidFill>
@@ -3772,12 +3760,12 @@
             </a:ln>
           </p:spPr>
           <p:txBody>
-            <a:bodyPr anchorCtr="0" anchor="ctr" bIns="91425" lIns="91425" spcFirstLastPara="1" rIns="91425" wrap="square" tIns="91425">
+            <a:bodyPr spcFirstLastPara="1" wrap="square" lIns="91425" tIns="91425" rIns="91425" bIns="91425" anchor="ctr" anchorCtr="0">
               <a:noAutofit/>
             </a:bodyPr>
             <a:lstStyle/>
             <a:p>
-              <a:pPr indent="0" lvl="0" marL="0" rtl="0" algn="l">
+              <a:pPr marL="0" lvl="0" indent="0" algn="l" rtl="0">
                 <a:spcBef>
                   <a:spcPts val="0"/>
                 </a:spcBef>
@@ -3786,9 +3774,6 @@
                 </a:spcAft>
                 <a:buNone/>
               </a:pPr>
-              <a:r>
-                <a:t/>
-              </a:r>
               <a:endParaRPr/>
             </a:p>
           </p:txBody>
@@ -3806,7 +3791,7 @@
             </a:xfrm>
             <a:prstGeom prst="diagStripe">
               <a:avLst>
-                <a:gd fmla="val 50000" name="adj"/>
+                <a:gd name="adj" fmla="val 50000"/>
               </a:avLst>
             </a:prstGeom>
             <a:solidFill>
@@ -3819,12 +3804,12 @@
             </a:ln>
           </p:spPr>
           <p:txBody>
-            <a:bodyPr anchorCtr="0" anchor="ctr" bIns="91425" lIns="91425" spcFirstLastPara="1" rIns="91425" wrap="square" tIns="91425">
+            <a:bodyPr spcFirstLastPara="1" wrap="square" lIns="91425" tIns="91425" rIns="91425" bIns="91425" anchor="ctr" anchorCtr="0">
               <a:noAutofit/>
             </a:bodyPr>
             <a:lstStyle/>
             <a:p>
-              <a:pPr indent="0" lvl="0" marL="0" rtl="0" algn="l">
+              <a:pPr marL="0" lvl="0" indent="0" algn="l" rtl="0">
                 <a:spcBef>
                   <a:spcPts val="0"/>
                 </a:spcBef>
@@ -3833,9 +3818,6 @@
                 </a:spcAft>
                 <a:buNone/>
               </a:pPr>
-              <a:r>
-                <a:t/>
-              </a:r>
               <a:endParaRPr/>
             </a:p>
           </p:txBody>
@@ -3853,7 +3835,7 @@
             </a:xfrm>
             <a:prstGeom prst="diagStripe">
               <a:avLst>
-                <a:gd fmla="val 50000" name="adj"/>
+                <a:gd name="adj" fmla="val 50000"/>
               </a:avLst>
             </a:prstGeom>
             <a:solidFill>
@@ -3866,12 +3848,12 @@
             </a:ln>
           </p:spPr>
           <p:txBody>
-            <a:bodyPr anchorCtr="0" anchor="ctr" bIns="91425" lIns="91425" spcFirstLastPara="1" rIns="91425" wrap="square" tIns="91425">
+            <a:bodyPr spcFirstLastPara="1" wrap="square" lIns="91425" tIns="91425" rIns="91425" bIns="91425" anchor="ctr" anchorCtr="0">
               <a:noAutofit/>
             </a:bodyPr>
             <a:lstStyle/>
             <a:p>
-              <a:pPr indent="0" lvl="0" marL="0" rtl="0" algn="l">
+              <a:pPr marL="0" lvl="0" indent="0" algn="l" rtl="0">
                 <a:spcBef>
                   <a:spcPts val="0"/>
                 </a:spcBef>
@@ -3880,9 +3862,6 @@
                 </a:spcAft>
                 <a:buNone/>
               </a:pPr>
-              <a:r>
-                <a:t/>
-              </a:r>
               <a:endParaRPr/>
             </a:p>
           </p:txBody>
@@ -3900,7 +3879,7 @@
             </a:xfrm>
             <a:prstGeom prst="diagStripe">
               <a:avLst>
-                <a:gd fmla="val 50000" name="adj"/>
+                <a:gd name="adj" fmla="val 50000"/>
               </a:avLst>
             </a:prstGeom>
             <a:solidFill>
@@ -3913,12 +3892,12 @@
             </a:ln>
           </p:spPr>
           <p:txBody>
-            <a:bodyPr anchorCtr="0" anchor="ctr" bIns="91425" lIns="91425" spcFirstLastPara="1" rIns="91425" wrap="square" tIns="91425">
+            <a:bodyPr spcFirstLastPara="1" wrap="square" lIns="91425" tIns="91425" rIns="91425" bIns="91425" anchor="ctr" anchorCtr="0">
               <a:noAutofit/>
             </a:bodyPr>
             <a:lstStyle/>
             <a:p>
-              <a:pPr indent="0" lvl="0" marL="0" rtl="0" algn="l">
+              <a:pPr marL="0" lvl="0" indent="0" algn="l" rtl="0">
                 <a:spcBef>
                   <a:spcPts val="0"/>
                 </a:spcBef>
@@ -3927,9 +3906,6 @@
                 </a:spcAft>
                 <a:buNone/>
               </a:pPr>
-              <a:r>
-                <a:t/>
-              </a:r>
               <a:endParaRPr/>
             </a:p>
           </p:txBody>
@@ -3947,7 +3923,7 @@
             </a:xfrm>
             <a:prstGeom prst="diagStripe">
               <a:avLst>
-                <a:gd fmla="val 50000" name="adj"/>
+                <a:gd name="adj" fmla="val 50000"/>
               </a:avLst>
             </a:prstGeom>
             <a:solidFill>
@@ -3960,12 +3936,12 @@
             </a:ln>
           </p:spPr>
           <p:txBody>
-            <a:bodyPr anchorCtr="0" anchor="ctr" bIns="91425" lIns="91425" spcFirstLastPara="1" rIns="91425" wrap="square" tIns="91425">
+            <a:bodyPr spcFirstLastPara="1" wrap="square" lIns="91425" tIns="91425" rIns="91425" bIns="91425" anchor="ctr" anchorCtr="0">
               <a:noAutofit/>
             </a:bodyPr>
             <a:lstStyle/>
             <a:p>
-              <a:pPr indent="0" lvl="0" marL="0" rtl="0" algn="l">
+              <a:pPr marL="0" lvl="0" indent="0" algn="l" rtl="0">
                 <a:spcBef>
                   <a:spcPts val="0"/>
                 </a:spcBef>
@@ -3974,9 +3950,6 @@
                 </a:spcAft>
                 <a:buNone/>
               </a:pPr>
-              <a:r>
-                <a:t/>
-              </a:r>
               <a:endParaRPr/>
             </a:p>
           </p:txBody>
@@ -3994,7 +3967,7 @@
             </a:xfrm>
             <a:prstGeom prst="diagStripe">
               <a:avLst>
-                <a:gd fmla="val 50000" name="adj"/>
+                <a:gd name="adj" fmla="val 50000"/>
               </a:avLst>
             </a:prstGeom>
             <a:solidFill>
@@ -4005,12 +3978,12 @@
             </a:ln>
           </p:spPr>
           <p:txBody>
-            <a:bodyPr anchorCtr="0" anchor="ctr" bIns="91425" lIns="91425" spcFirstLastPara="1" rIns="91425" wrap="square" tIns="91425">
+            <a:bodyPr spcFirstLastPara="1" wrap="square" lIns="91425" tIns="91425" rIns="91425" bIns="91425" anchor="ctr" anchorCtr="0">
               <a:noAutofit/>
             </a:bodyPr>
             <a:lstStyle/>
             <a:p>
-              <a:pPr indent="0" lvl="0" marL="0" rtl="0" algn="l">
+              <a:pPr marL="0" lvl="0" indent="0" algn="l" rtl="0">
                 <a:spcBef>
                   <a:spcPts val="0"/>
                 </a:spcBef>
@@ -4019,9 +3992,6 @@
                 </a:spcAft>
                 <a:buNone/>
               </a:pPr>
-              <a:r>
-                <a:t/>
-              </a:r>
               <a:endParaRPr/>
             </a:p>
           </p:txBody>
@@ -4039,7 +4009,7 @@
             </a:xfrm>
             <a:prstGeom prst="diagStripe">
               <a:avLst>
-                <a:gd fmla="val 50000" name="adj"/>
+                <a:gd name="adj" fmla="val 50000"/>
               </a:avLst>
             </a:prstGeom>
             <a:solidFill>
@@ -4052,12 +4022,12 @@
             </a:ln>
           </p:spPr>
           <p:txBody>
-            <a:bodyPr anchorCtr="0" anchor="ctr" bIns="91425" lIns="91425" spcFirstLastPara="1" rIns="91425" wrap="square" tIns="91425">
+            <a:bodyPr spcFirstLastPara="1" wrap="square" lIns="91425" tIns="91425" rIns="91425" bIns="91425" anchor="ctr" anchorCtr="0">
               <a:noAutofit/>
             </a:bodyPr>
             <a:lstStyle/>
             <a:p>
-              <a:pPr indent="0" lvl="0" marL="0" rtl="0" algn="l">
+              <a:pPr marL="0" lvl="0" indent="0" algn="l" rtl="0">
                 <a:spcBef>
                   <a:spcPts val="0"/>
                 </a:spcBef>
@@ -4066,9 +4036,6 @@
                 </a:spcAft>
                 <a:buNone/>
               </a:pPr>
-              <a:r>
-                <a:t/>
-              </a:r>
               <a:endParaRPr/>
             </a:p>
           </p:txBody>
@@ -4086,7 +4053,7 @@
             </a:xfrm>
             <a:prstGeom prst="diagStripe">
               <a:avLst>
-                <a:gd fmla="val 50000" name="adj"/>
+                <a:gd name="adj" fmla="val 50000"/>
               </a:avLst>
             </a:prstGeom>
             <a:solidFill>
@@ -4099,12 +4066,12 @@
             </a:ln>
           </p:spPr>
           <p:txBody>
-            <a:bodyPr anchorCtr="0" anchor="ctr" bIns="91425" lIns="91425" spcFirstLastPara="1" rIns="91425" wrap="square" tIns="91425">
+            <a:bodyPr spcFirstLastPara="1" wrap="square" lIns="91425" tIns="91425" rIns="91425" bIns="91425" anchor="ctr" anchorCtr="0">
               <a:noAutofit/>
             </a:bodyPr>
             <a:lstStyle/>
             <a:p>
-              <a:pPr indent="0" lvl="0" marL="0" rtl="0" algn="l">
+              <a:pPr marL="0" lvl="0" indent="0" algn="l" rtl="0">
                 <a:spcBef>
                   <a:spcPts val="0"/>
                 </a:spcBef>
@@ -4113,9 +4080,6 @@
                 </a:spcAft>
                 <a:buNone/>
               </a:pPr>
-              <a:r>
-                <a:t/>
-              </a:r>
               <a:endParaRPr/>
             </a:p>
           </p:txBody>
@@ -4133,7 +4097,7 @@
             </a:xfrm>
             <a:prstGeom prst="diagStripe">
               <a:avLst>
-                <a:gd fmla="val 50000" name="adj"/>
+                <a:gd name="adj" fmla="val 50000"/>
               </a:avLst>
             </a:prstGeom>
             <a:solidFill>
@@ -4146,12 +4110,12 @@
             </a:ln>
           </p:spPr>
           <p:txBody>
-            <a:bodyPr anchorCtr="0" anchor="ctr" bIns="91425" lIns="91425" spcFirstLastPara="1" rIns="91425" wrap="square" tIns="91425">
+            <a:bodyPr spcFirstLastPara="1" wrap="square" lIns="91425" tIns="91425" rIns="91425" bIns="91425" anchor="ctr" anchorCtr="0">
               <a:noAutofit/>
             </a:bodyPr>
             <a:lstStyle/>
             <a:p>
-              <a:pPr indent="0" lvl="0" marL="0" rtl="0" algn="l">
+              <a:pPr marL="0" lvl="0" indent="0" algn="l" rtl="0">
                 <a:spcBef>
                   <a:spcPts val="0"/>
                 </a:spcBef>
@@ -4160,9 +4124,6 @@
                 </a:spcAft>
                 <a:buNone/>
               </a:pPr>
-              <a:r>
-                <a:t/>
-              </a:r>
               <a:endParaRPr/>
             </a:p>
           </p:txBody>
@@ -4180,7 +4141,7 @@
             </a:xfrm>
             <a:prstGeom prst="diagStripe">
               <a:avLst>
-                <a:gd fmla="val 50000" name="adj"/>
+                <a:gd name="adj" fmla="val 50000"/>
               </a:avLst>
             </a:prstGeom>
             <a:solidFill>
@@ -4193,12 +4154,12 @@
             </a:ln>
           </p:spPr>
           <p:txBody>
-            <a:bodyPr anchorCtr="0" anchor="ctr" bIns="91425" lIns="91425" spcFirstLastPara="1" rIns="91425" wrap="square" tIns="91425">
+            <a:bodyPr spcFirstLastPara="1" wrap="square" lIns="91425" tIns="91425" rIns="91425" bIns="91425" anchor="ctr" anchorCtr="0">
               <a:noAutofit/>
             </a:bodyPr>
             <a:lstStyle/>
             <a:p>
-              <a:pPr indent="0" lvl="0" marL="0" rtl="0" algn="l">
+              <a:pPr marL="0" lvl="0" indent="0" algn="l" rtl="0">
                 <a:spcBef>
                   <a:spcPts val="0"/>
                 </a:spcBef>
@@ -4207,9 +4168,6 @@
                 </a:spcAft>
                 <a:buNone/>
               </a:pPr>
-              <a:r>
-                <a:t/>
-              </a:r>
               <a:endParaRPr/>
             </a:p>
           </p:txBody>
@@ -4218,7 +4176,9 @@
       <p:sp>
         <p:nvSpPr>
           <p:cNvPr id="39" name="Google Shape;39;p3"/>
-          <p:cNvSpPr txBox="1"/>
+          <p:cNvSpPr txBox="1">
+            <a:spLocks noGrp="1"/>
+          </p:cNvSpPr>
           <p:nvPr>
             <p:ph type="title"/>
           </p:nvPr>
@@ -4233,7 +4193,7 @@
           </a:prstGeom>
         </p:spPr>
         <p:txBody>
-          <a:bodyPr anchorCtr="0" anchor="ctr" bIns="91425" lIns="91425" spcFirstLastPara="1" rIns="91425" wrap="square" tIns="91425">
+          <a:bodyPr spcFirstLastPara="1" wrap="square" lIns="91425" tIns="91425" rIns="91425" bIns="91425" anchor="ctr" anchorCtr="0">
             <a:normAutofit/>
           </a:bodyPr>
           <a:lstStyle>
@@ -4337,15 +4297,19 @@
               <a:defRPr/>
             </a:lvl9pPr>
           </a:lstStyle>
-          <a:p/>
+          <a:p>
+            <a:endParaRPr/>
+          </a:p>
         </p:txBody>
       </p:sp>
       <p:sp>
         <p:nvSpPr>
           <p:cNvPr id="40" name="Google Shape;40;p3"/>
-          <p:cNvSpPr txBox="1"/>
+          <p:cNvSpPr txBox="1">
+            <a:spLocks noGrp="1"/>
+          </p:cNvSpPr>
           <p:nvPr>
-            <p:ph idx="12" type="sldNum"/>
+            <p:ph type="sldNum" idx="12"/>
           </p:nvPr>
         </p:nvSpPr>
         <p:spPr>
@@ -4358,7 +4322,7 @@
           </a:prstGeom>
         </p:spPr>
         <p:txBody>
-          <a:bodyPr anchorCtr="0" anchor="ctr" bIns="91425" lIns="91425" spcFirstLastPara="1" rIns="91425" wrap="square" tIns="91425">
+          <a:bodyPr spcFirstLastPara="1" wrap="square" lIns="91425" tIns="91425" rIns="91425" bIns="91425" anchor="ctr" anchorCtr="0">
             <a:normAutofit/>
           </a:bodyPr>
           <a:lstStyle>
@@ -4400,7 +4364,7 @@
             </a:lvl9pPr>
           </a:lstStyle>
           <a:p>
-            <a:pPr indent="0" lvl="0" marL="0" rtl="0" algn="r">
+            <a:pPr marL="0" lvl="0" indent="0" algn="r" rtl="0">
               <a:spcBef>
                 <a:spcPts val="0"/>
               </a:spcBef>
@@ -4426,11 +4390,11 @@
 </file>
 
 <file path=ppt/slideLayouts/slideLayout3.xml><?xml version="1.0" encoding="utf-8"?>
-<p:sldLayout xmlns:a="http://schemas.openxmlformats.org/drawingml/2006/main" xmlns:r="http://schemas.openxmlformats.org/officeDocument/2006/relationships" xmlns:mc="http://schemas.openxmlformats.org/markup-compatibility/2006" xmlns:mv="urn:schemas-microsoft-com:mac:vml" xmlns:p="http://schemas.openxmlformats.org/presentationml/2006/main" xmlns:c="http://schemas.openxmlformats.org/drawingml/2006/chart" xmlns:dgm="http://schemas.openxmlformats.org/drawingml/2006/diagram" xmlns:o="urn:schemas-microsoft-com:office:office" xmlns:v="urn:schemas-microsoft-com:vml" xmlns:pvml="urn:schemas-microsoft-com:office:powerpoint" xmlns:com="http://schemas.openxmlformats.org/drawingml/2006/compatibility" xmlns:p14="http://schemas.microsoft.com/office/powerpoint/2010/main" xmlns:p15="http://schemas.microsoft.com/office/powerpoint/2012/main" xmlns:ahyp="http://schemas.microsoft.com/office/drawing/2018/hyperlinkcolor" matchingName="Title and body" type="tx">
+<p:sldLayout xmlns:a="http://schemas.openxmlformats.org/drawingml/2006/main" xmlns:r="http://schemas.openxmlformats.org/officeDocument/2006/relationships" xmlns:p="http://schemas.openxmlformats.org/presentationml/2006/main" matchingName="Title and body" type="tx">
   <p:cSld name="TITLE_AND_BODY">
     <p:spTree>
       <p:nvGrpSpPr>
-        <p:cNvPr id="41" name="Shape 41"/>
+        <p:cNvPr id="1" name="Shape 41"/>
         <p:cNvGrpSpPr/>
         <p:nvPr/>
       </p:nvGrpSpPr>
@@ -4469,7 +4433,7 @@
             </a:xfrm>
             <a:prstGeom prst="diagStripe">
               <a:avLst>
-                <a:gd fmla="val 50000" name="adj"/>
+                <a:gd name="adj" fmla="val 50000"/>
               </a:avLst>
             </a:prstGeom>
             <a:solidFill>
@@ -4480,12 +4444,12 @@
             </a:ln>
           </p:spPr>
           <p:txBody>
-            <a:bodyPr anchorCtr="0" anchor="ctr" bIns="91425" lIns="91425" spcFirstLastPara="1" rIns="91425" wrap="square" tIns="91425">
+            <a:bodyPr spcFirstLastPara="1" wrap="square" lIns="91425" tIns="91425" rIns="91425" bIns="91425" anchor="ctr" anchorCtr="0">
               <a:noAutofit/>
             </a:bodyPr>
             <a:lstStyle/>
             <a:p>
-              <a:pPr indent="0" lvl="0" marL="0" rtl="0" algn="l">
+              <a:pPr marL="0" lvl="0" indent="0" algn="l" rtl="0">
                 <a:spcBef>
                   <a:spcPts val="0"/>
                 </a:spcBef>
@@ -4494,9 +4458,6 @@
                 </a:spcAft>
                 <a:buNone/>
               </a:pPr>
-              <a:r>
-                <a:t/>
-              </a:r>
               <a:endParaRPr/>
             </a:p>
           </p:txBody>
@@ -4514,7 +4475,7 @@
             </a:xfrm>
             <a:prstGeom prst="diagStripe">
               <a:avLst>
-                <a:gd fmla="val 50000" name="adj"/>
+                <a:gd name="adj" fmla="val 50000"/>
               </a:avLst>
             </a:prstGeom>
             <a:solidFill>
@@ -4525,12 +4486,12 @@
             </a:ln>
           </p:spPr>
           <p:txBody>
-            <a:bodyPr anchorCtr="0" anchor="ctr" bIns="91425" lIns="91425" spcFirstLastPara="1" rIns="91425" wrap="square" tIns="91425">
+            <a:bodyPr spcFirstLastPara="1" wrap="square" lIns="91425" tIns="91425" rIns="91425" bIns="91425" anchor="ctr" anchorCtr="0">
               <a:noAutofit/>
             </a:bodyPr>
             <a:lstStyle/>
             <a:p>
-              <a:pPr indent="0" lvl="0" marL="0" rtl="0" algn="l">
+              <a:pPr marL="0" lvl="0" indent="0" algn="l" rtl="0">
                 <a:spcBef>
                   <a:spcPts val="0"/>
                 </a:spcBef>
@@ -4539,9 +4500,6 @@
                 </a:spcAft>
                 <a:buNone/>
               </a:pPr>
-              <a:r>
-                <a:t/>
-              </a:r>
               <a:endParaRPr/>
             </a:p>
           </p:txBody>
@@ -4550,7 +4508,9 @@
       <p:sp>
         <p:nvSpPr>
           <p:cNvPr id="45" name="Google Shape;45;p4"/>
-          <p:cNvSpPr txBox="1"/>
+          <p:cNvSpPr txBox="1">
+            <a:spLocks noGrp="1"/>
+          </p:cNvSpPr>
           <p:nvPr>
             <p:ph type="title"/>
           </p:nvPr>
@@ -4565,7 +4525,7 @@
           </a:prstGeom>
         </p:spPr>
         <p:txBody>
-          <a:bodyPr anchorCtr="0" anchor="t" bIns="91425" lIns="91425" spcFirstLastPara="1" rIns="91425" wrap="square" tIns="91425">
+          <a:bodyPr spcFirstLastPara="1" wrap="square" lIns="91425" tIns="91425" rIns="91425" bIns="91425" anchor="t" anchorCtr="0">
             <a:normAutofit/>
           </a:bodyPr>
           <a:lstStyle>
@@ -4669,15 +4629,19 @@
               <a:defRPr sz="2400"/>
             </a:lvl9pPr>
           </a:lstStyle>
-          <a:p/>
+          <a:p>
+            <a:endParaRPr/>
+          </a:p>
         </p:txBody>
       </p:sp>
       <p:sp>
         <p:nvSpPr>
           <p:cNvPr id="46" name="Google Shape;46;p4"/>
-          <p:cNvSpPr txBox="1"/>
+          <p:cNvSpPr txBox="1">
+            <a:spLocks noGrp="1"/>
+          </p:cNvSpPr>
           <p:nvPr>
-            <p:ph idx="1" type="body"/>
+            <p:ph type="body" idx="1"/>
           </p:nvPr>
         </p:nvSpPr>
         <p:spPr>
@@ -4690,11 +4654,11 @@
           </a:prstGeom>
         </p:spPr>
         <p:txBody>
-          <a:bodyPr anchorCtr="0" anchor="t" bIns="91425" lIns="91425" spcFirstLastPara="1" rIns="91425" wrap="square" tIns="91425">
+          <a:bodyPr spcFirstLastPara="1" wrap="square" lIns="91425" tIns="91425" rIns="91425" bIns="91425" anchor="t" anchorCtr="0">
             <a:normAutofit/>
           </a:bodyPr>
           <a:lstStyle>
-            <a:lvl1pPr indent="-311150" lvl="0" marL="457200">
+            <a:lvl1pPr marL="457200" lvl="0" indent="-311150">
               <a:spcBef>
                 <a:spcPts val="0"/>
               </a:spcBef>
@@ -4705,7 +4669,7 @@
               <a:buChar char="●"/>
               <a:defRPr/>
             </a:lvl1pPr>
-            <a:lvl2pPr indent="-298450" lvl="1" marL="914400">
+            <a:lvl2pPr marL="914400" lvl="1" indent="-298450">
               <a:spcBef>
                 <a:spcPts val="0"/>
               </a:spcBef>
@@ -4716,7 +4680,7 @@
               <a:buChar char="○"/>
               <a:defRPr/>
             </a:lvl2pPr>
-            <a:lvl3pPr indent="-298450" lvl="2" marL="1371600">
+            <a:lvl3pPr marL="1371600" lvl="2" indent="-298450">
               <a:spcBef>
                 <a:spcPts val="0"/>
               </a:spcBef>
@@ -4727,7 +4691,7 @@
               <a:buChar char="■"/>
               <a:defRPr/>
             </a:lvl3pPr>
-            <a:lvl4pPr indent="-298450" lvl="3" marL="1828800">
+            <a:lvl4pPr marL="1828800" lvl="3" indent="-298450">
               <a:spcBef>
                 <a:spcPts val="0"/>
               </a:spcBef>
@@ -4738,7 +4702,7 @@
               <a:buChar char="●"/>
               <a:defRPr/>
             </a:lvl4pPr>
-            <a:lvl5pPr indent="-298450" lvl="4" marL="2286000">
+            <a:lvl5pPr marL="2286000" lvl="4" indent="-298450">
               <a:spcBef>
                 <a:spcPts val="0"/>
               </a:spcBef>
@@ -4749,7 +4713,7 @@
               <a:buChar char="○"/>
               <a:defRPr/>
             </a:lvl5pPr>
-            <a:lvl6pPr indent="-298450" lvl="5" marL="2743200">
+            <a:lvl6pPr marL="2743200" lvl="5" indent="-298450">
               <a:spcBef>
                 <a:spcPts val="0"/>
               </a:spcBef>
@@ -4760,7 +4724,7 @@
               <a:buChar char="■"/>
               <a:defRPr/>
             </a:lvl6pPr>
-            <a:lvl7pPr indent="-298450" lvl="6" marL="3200400">
+            <a:lvl7pPr marL="3200400" lvl="6" indent="-298450">
               <a:spcBef>
                 <a:spcPts val="0"/>
               </a:spcBef>
@@ -4771,7 +4735,7 @@
               <a:buChar char="●"/>
               <a:defRPr/>
             </a:lvl7pPr>
-            <a:lvl8pPr indent="-298450" lvl="7" marL="3657600">
+            <a:lvl8pPr marL="3657600" lvl="7" indent="-298450">
               <a:spcBef>
                 <a:spcPts val="0"/>
               </a:spcBef>
@@ -4782,7 +4746,7 @@
               <a:buChar char="○"/>
               <a:defRPr/>
             </a:lvl8pPr>
-            <a:lvl9pPr indent="-298450" lvl="8" marL="4114800">
+            <a:lvl9pPr marL="4114800" lvl="8" indent="-298450">
               <a:spcBef>
                 <a:spcPts val="0"/>
               </a:spcBef>
@@ -4794,15 +4758,19 @@
               <a:defRPr/>
             </a:lvl9pPr>
           </a:lstStyle>
-          <a:p/>
+          <a:p>
+            <a:endParaRPr/>
+          </a:p>
         </p:txBody>
       </p:sp>
       <p:sp>
         <p:nvSpPr>
           <p:cNvPr id="47" name="Google Shape;47;p4"/>
-          <p:cNvSpPr txBox="1"/>
+          <p:cNvSpPr txBox="1">
+            <a:spLocks noGrp="1"/>
+          </p:cNvSpPr>
           <p:nvPr>
-            <p:ph idx="12" type="sldNum"/>
+            <p:ph type="sldNum" idx="12"/>
           </p:nvPr>
         </p:nvSpPr>
         <p:spPr>
@@ -4815,7 +4783,7 @@
           </a:prstGeom>
         </p:spPr>
         <p:txBody>
-          <a:bodyPr anchorCtr="0" anchor="ctr" bIns="91425" lIns="91425" spcFirstLastPara="1" rIns="91425" wrap="square" tIns="91425">
+          <a:bodyPr spcFirstLastPara="1" wrap="square" lIns="91425" tIns="91425" rIns="91425" bIns="91425" anchor="ctr" anchorCtr="0">
             <a:normAutofit/>
           </a:bodyPr>
           <a:lstStyle>
@@ -4857,7 +4825,7 @@
             </a:lvl9pPr>
           </a:lstStyle>
           <a:p>
-            <a:pPr indent="0" lvl="0" marL="0" rtl="0" algn="r">
+            <a:pPr marL="0" lvl="0" indent="0" algn="r" rtl="0">
               <a:spcBef>
                 <a:spcPts val="0"/>
               </a:spcBef>
@@ -4883,11 +4851,11 @@
 </file>
 
 <file path=ppt/slideLayouts/slideLayout4.xml><?xml version="1.0" encoding="utf-8"?>
-<p:sldLayout xmlns:a="http://schemas.openxmlformats.org/drawingml/2006/main" xmlns:r="http://schemas.openxmlformats.org/officeDocument/2006/relationships" xmlns:mc="http://schemas.openxmlformats.org/markup-compatibility/2006" xmlns:mv="urn:schemas-microsoft-com:mac:vml" xmlns:p="http://schemas.openxmlformats.org/presentationml/2006/main" xmlns:c="http://schemas.openxmlformats.org/drawingml/2006/chart" xmlns:dgm="http://schemas.openxmlformats.org/drawingml/2006/diagram" xmlns:o="urn:schemas-microsoft-com:office:office" xmlns:v="urn:schemas-microsoft-com:vml" xmlns:pvml="urn:schemas-microsoft-com:office:powerpoint" xmlns:com="http://schemas.openxmlformats.org/drawingml/2006/compatibility" xmlns:p14="http://schemas.microsoft.com/office/powerpoint/2010/main" xmlns:p15="http://schemas.microsoft.com/office/powerpoint/2012/main" xmlns:ahyp="http://schemas.microsoft.com/office/drawing/2018/hyperlinkcolor" matchingName="Title and two columns" type="twoColTx">
+<p:sldLayout xmlns:a="http://schemas.openxmlformats.org/drawingml/2006/main" xmlns:r="http://schemas.openxmlformats.org/officeDocument/2006/relationships" xmlns:p="http://schemas.openxmlformats.org/presentationml/2006/main" matchingName="Title and two columns" type="twoColTx">
   <p:cSld name="TITLE_AND_TWO_COLUMNS">
     <p:spTree>
       <p:nvGrpSpPr>
-        <p:cNvPr id="48" name="Shape 48"/>
+        <p:cNvPr id="1" name="Shape 48"/>
         <p:cNvGrpSpPr/>
         <p:nvPr/>
       </p:nvGrpSpPr>
@@ -4926,7 +4894,7 @@
             </a:xfrm>
             <a:prstGeom prst="diagStripe">
               <a:avLst>
-                <a:gd fmla="val 50000" name="adj"/>
+                <a:gd name="adj" fmla="val 50000"/>
               </a:avLst>
             </a:prstGeom>
             <a:solidFill>
@@ -4937,12 +4905,12 @@
             </a:ln>
           </p:spPr>
           <p:txBody>
-            <a:bodyPr anchorCtr="0" anchor="ctr" bIns="91425" lIns="91425" spcFirstLastPara="1" rIns="91425" wrap="square" tIns="91425">
+            <a:bodyPr spcFirstLastPara="1" wrap="square" lIns="91425" tIns="91425" rIns="91425" bIns="91425" anchor="ctr" anchorCtr="0">
               <a:noAutofit/>
             </a:bodyPr>
             <a:lstStyle/>
             <a:p>
-              <a:pPr indent="0" lvl="0" marL="0" rtl="0" algn="l">
+              <a:pPr marL="0" lvl="0" indent="0" algn="l" rtl="0">
                 <a:spcBef>
                   <a:spcPts val="0"/>
                 </a:spcBef>
@@ -4951,9 +4919,6 @@
                 </a:spcAft>
                 <a:buNone/>
               </a:pPr>
-              <a:r>
-                <a:t/>
-              </a:r>
               <a:endParaRPr/>
             </a:p>
           </p:txBody>
@@ -4971,7 +4936,7 @@
             </a:xfrm>
             <a:prstGeom prst="diagStripe">
               <a:avLst>
-                <a:gd fmla="val 50000" name="adj"/>
+                <a:gd name="adj" fmla="val 50000"/>
               </a:avLst>
             </a:prstGeom>
             <a:solidFill>
@@ -4982,12 +4947,12 @@
             </a:ln>
           </p:spPr>
           <p:txBody>
-            <a:bodyPr anchorCtr="0" anchor="ctr" bIns="91425" lIns="91425" spcFirstLastPara="1" rIns="91425" wrap="square" tIns="91425">
+            <a:bodyPr spcFirstLastPara="1" wrap="square" lIns="91425" tIns="91425" rIns="91425" bIns="91425" anchor="ctr" anchorCtr="0">
               <a:noAutofit/>
             </a:bodyPr>
             <a:lstStyle/>
             <a:p>
-              <a:pPr indent="0" lvl="0" marL="0" rtl="0" algn="l">
+              <a:pPr marL="0" lvl="0" indent="0" algn="l" rtl="0">
                 <a:spcBef>
                   <a:spcPts val="0"/>
                 </a:spcBef>
@@ -4996,9 +4961,6 @@
                 </a:spcAft>
                 <a:buNone/>
               </a:pPr>
-              <a:r>
-                <a:t/>
-              </a:r>
               <a:endParaRPr/>
             </a:p>
           </p:txBody>
@@ -5007,7 +4969,9 @@
       <p:sp>
         <p:nvSpPr>
           <p:cNvPr id="52" name="Google Shape;52;p5"/>
-          <p:cNvSpPr txBox="1"/>
+          <p:cNvSpPr txBox="1">
+            <a:spLocks noGrp="1"/>
+          </p:cNvSpPr>
           <p:nvPr>
             <p:ph type="title"/>
           </p:nvPr>
@@ -5022,7 +4986,7 @@
           </a:prstGeom>
         </p:spPr>
         <p:txBody>
-          <a:bodyPr anchorCtr="0" anchor="t" bIns="91425" lIns="91425" spcFirstLastPara="1" rIns="91425" wrap="square" tIns="91425">
+          <a:bodyPr spcFirstLastPara="1" wrap="square" lIns="91425" tIns="91425" rIns="91425" bIns="91425" anchor="t" anchorCtr="0">
             <a:normAutofit/>
           </a:bodyPr>
           <a:lstStyle>
@@ -5126,15 +5090,19 @@
               <a:defRPr sz="2400"/>
             </a:lvl9pPr>
           </a:lstStyle>
-          <a:p/>
+          <a:p>
+            <a:endParaRPr/>
+          </a:p>
         </p:txBody>
       </p:sp>
       <p:sp>
         <p:nvSpPr>
           <p:cNvPr id="53" name="Google Shape;53;p5"/>
-          <p:cNvSpPr txBox="1"/>
+          <p:cNvSpPr txBox="1">
+            <a:spLocks noGrp="1"/>
+          </p:cNvSpPr>
           <p:nvPr>
-            <p:ph idx="1" type="body"/>
+            <p:ph type="body" idx="1"/>
           </p:nvPr>
         </p:nvSpPr>
         <p:spPr>
@@ -5147,11 +5115,11 @@
           </a:prstGeom>
         </p:spPr>
         <p:txBody>
-          <a:bodyPr anchorCtr="0" anchor="t" bIns="91425" lIns="91425" spcFirstLastPara="1" rIns="91425" wrap="square" tIns="91425">
+          <a:bodyPr spcFirstLastPara="1" wrap="square" lIns="91425" tIns="91425" rIns="91425" bIns="91425" anchor="t" anchorCtr="0">
             <a:normAutofit/>
           </a:bodyPr>
           <a:lstStyle>
-            <a:lvl1pPr indent="-311150" lvl="0" marL="457200">
+            <a:lvl1pPr marL="457200" lvl="0" indent="-311150">
               <a:spcBef>
                 <a:spcPts val="0"/>
               </a:spcBef>
@@ -5162,7 +5130,7 @@
               <a:buChar char="●"/>
               <a:defRPr/>
             </a:lvl1pPr>
-            <a:lvl2pPr indent="-298450" lvl="1" marL="914400">
+            <a:lvl2pPr marL="914400" lvl="1" indent="-298450">
               <a:spcBef>
                 <a:spcPts val="0"/>
               </a:spcBef>
@@ -5173,7 +5141,7 @@
               <a:buChar char="○"/>
               <a:defRPr/>
             </a:lvl2pPr>
-            <a:lvl3pPr indent="-298450" lvl="2" marL="1371600">
+            <a:lvl3pPr marL="1371600" lvl="2" indent="-298450">
               <a:spcBef>
                 <a:spcPts val="0"/>
               </a:spcBef>
@@ -5184,7 +5152,7 @@
               <a:buChar char="■"/>
               <a:defRPr/>
             </a:lvl3pPr>
-            <a:lvl4pPr indent="-298450" lvl="3" marL="1828800">
+            <a:lvl4pPr marL="1828800" lvl="3" indent="-298450">
               <a:spcBef>
                 <a:spcPts val="0"/>
               </a:spcBef>
@@ -5195,7 +5163,7 @@
               <a:buChar char="●"/>
               <a:defRPr/>
             </a:lvl4pPr>
-            <a:lvl5pPr indent="-298450" lvl="4" marL="2286000">
+            <a:lvl5pPr marL="2286000" lvl="4" indent="-298450">
               <a:spcBef>
                 <a:spcPts val="0"/>
               </a:spcBef>
@@ -5206,7 +5174,7 @@
               <a:buChar char="○"/>
               <a:defRPr/>
             </a:lvl5pPr>
-            <a:lvl6pPr indent="-298450" lvl="5" marL="2743200">
+            <a:lvl6pPr marL="2743200" lvl="5" indent="-298450">
               <a:spcBef>
                 <a:spcPts val="0"/>
               </a:spcBef>
@@ -5217,7 +5185,7 @@
               <a:buChar char="■"/>
               <a:defRPr/>
             </a:lvl6pPr>
-            <a:lvl7pPr indent="-298450" lvl="6" marL="3200400">
+            <a:lvl7pPr marL="3200400" lvl="6" indent="-298450">
               <a:spcBef>
                 <a:spcPts val="0"/>
               </a:spcBef>
@@ -5228,7 +5196,7 @@
               <a:buChar char="●"/>
               <a:defRPr/>
             </a:lvl7pPr>
-            <a:lvl8pPr indent="-298450" lvl="7" marL="3657600">
+            <a:lvl8pPr marL="3657600" lvl="7" indent="-298450">
               <a:spcBef>
                 <a:spcPts val="0"/>
               </a:spcBef>
@@ -5239,7 +5207,7 @@
               <a:buChar char="○"/>
               <a:defRPr/>
             </a:lvl8pPr>
-            <a:lvl9pPr indent="-298450" lvl="8" marL="4114800">
+            <a:lvl9pPr marL="4114800" lvl="8" indent="-298450">
               <a:spcBef>
                 <a:spcPts val="0"/>
               </a:spcBef>
@@ -5251,15 +5219,19 @@
               <a:defRPr/>
             </a:lvl9pPr>
           </a:lstStyle>
-          <a:p/>
+          <a:p>
+            <a:endParaRPr/>
+          </a:p>
         </p:txBody>
       </p:sp>
       <p:sp>
         <p:nvSpPr>
           <p:cNvPr id="54" name="Google Shape;54;p5"/>
-          <p:cNvSpPr txBox="1"/>
+          <p:cNvSpPr txBox="1">
+            <a:spLocks noGrp="1"/>
+          </p:cNvSpPr>
           <p:nvPr>
-            <p:ph idx="2" type="body"/>
+            <p:ph type="body" idx="2"/>
           </p:nvPr>
         </p:nvSpPr>
         <p:spPr>
@@ -5272,11 +5244,11 @@
           </a:prstGeom>
         </p:spPr>
         <p:txBody>
-          <a:bodyPr anchorCtr="0" anchor="t" bIns="91425" lIns="91425" spcFirstLastPara="1" rIns="91425" wrap="square" tIns="91425">
+          <a:bodyPr spcFirstLastPara="1" wrap="square" lIns="91425" tIns="91425" rIns="91425" bIns="91425" anchor="t" anchorCtr="0">
             <a:normAutofit/>
           </a:bodyPr>
           <a:lstStyle>
-            <a:lvl1pPr indent="-311150" lvl="0" marL="457200">
+            <a:lvl1pPr marL="457200" lvl="0" indent="-311150">
               <a:spcBef>
                 <a:spcPts val="0"/>
               </a:spcBef>
@@ -5287,7 +5259,7 @@
               <a:buChar char="●"/>
               <a:defRPr/>
             </a:lvl1pPr>
-            <a:lvl2pPr indent="-298450" lvl="1" marL="914400">
+            <a:lvl2pPr marL="914400" lvl="1" indent="-298450">
               <a:spcBef>
                 <a:spcPts val="0"/>
               </a:spcBef>
@@ -5298,7 +5270,7 @@
               <a:buChar char="○"/>
               <a:defRPr/>
             </a:lvl2pPr>
-            <a:lvl3pPr indent="-298450" lvl="2" marL="1371600">
+            <a:lvl3pPr marL="1371600" lvl="2" indent="-298450">
               <a:spcBef>
                 <a:spcPts val="0"/>
               </a:spcBef>
@@ -5309,7 +5281,7 @@
               <a:buChar char="■"/>
               <a:defRPr/>
             </a:lvl3pPr>
-            <a:lvl4pPr indent="-298450" lvl="3" marL="1828800">
+            <a:lvl4pPr marL="1828800" lvl="3" indent="-298450">
               <a:spcBef>
                 <a:spcPts val="0"/>
               </a:spcBef>
@@ -5320,7 +5292,7 @@
               <a:buChar char="●"/>
               <a:defRPr/>
             </a:lvl4pPr>
-            <a:lvl5pPr indent="-298450" lvl="4" marL="2286000">
+            <a:lvl5pPr marL="2286000" lvl="4" indent="-298450">
               <a:spcBef>
                 <a:spcPts val="0"/>
               </a:spcBef>
@@ -5331,7 +5303,7 @@
               <a:buChar char="○"/>
               <a:defRPr/>
             </a:lvl5pPr>
-            <a:lvl6pPr indent="-298450" lvl="5" marL="2743200">
+            <a:lvl6pPr marL="2743200" lvl="5" indent="-298450">
               <a:spcBef>
                 <a:spcPts val="0"/>
               </a:spcBef>
@@ -5342,7 +5314,7 @@
               <a:buChar char="■"/>
               <a:defRPr/>
             </a:lvl6pPr>
-            <a:lvl7pPr indent="-298450" lvl="6" marL="3200400">
+            <a:lvl7pPr marL="3200400" lvl="6" indent="-298450">
               <a:spcBef>
                 <a:spcPts val="0"/>
               </a:spcBef>
@@ -5353,7 +5325,7 @@
               <a:buChar char="●"/>
               <a:defRPr/>
             </a:lvl7pPr>
-            <a:lvl8pPr indent="-298450" lvl="7" marL="3657600">
+            <a:lvl8pPr marL="3657600" lvl="7" indent="-298450">
               <a:spcBef>
                 <a:spcPts val="0"/>
               </a:spcBef>
@@ -5364,7 +5336,7 @@
               <a:buChar char="○"/>
               <a:defRPr/>
             </a:lvl8pPr>
-            <a:lvl9pPr indent="-298450" lvl="8" marL="4114800">
+            <a:lvl9pPr marL="4114800" lvl="8" indent="-298450">
               <a:spcBef>
                 <a:spcPts val="0"/>
               </a:spcBef>
@@ -5376,15 +5348,19 @@
               <a:defRPr/>
             </a:lvl9pPr>
           </a:lstStyle>
-          <a:p/>
+          <a:p>
+            <a:endParaRPr/>
+          </a:p>
         </p:txBody>
       </p:sp>
       <p:sp>
         <p:nvSpPr>
           <p:cNvPr id="55" name="Google Shape;55;p5"/>
-          <p:cNvSpPr txBox="1"/>
+          <p:cNvSpPr txBox="1">
+            <a:spLocks noGrp="1"/>
+          </p:cNvSpPr>
           <p:nvPr>
-            <p:ph idx="12" type="sldNum"/>
+            <p:ph type="sldNum" idx="12"/>
           </p:nvPr>
         </p:nvSpPr>
         <p:spPr>
@@ -5397,7 +5373,7 @@
           </a:prstGeom>
         </p:spPr>
         <p:txBody>
-          <a:bodyPr anchorCtr="0" anchor="ctr" bIns="91425" lIns="91425" spcFirstLastPara="1" rIns="91425" wrap="square" tIns="91425">
+          <a:bodyPr spcFirstLastPara="1" wrap="square" lIns="91425" tIns="91425" rIns="91425" bIns="91425" anchor="ctr" anchorCtr="0">
             <a:normAutofit/>
           </a:bodyPr>
           <a:lstStyle>
@@ -5439,7 +5415,7 @@
             </a:lvl9pPr>
           </a:lstStyle>
           <a:p>
-            <a:pPr indent="0" lvl="0" marL="0" rtl="0" algn="r">
+            <a:pPr marL="0" lvl="0" indent="0" algn="r" rtl="0">
               <a:spcBef>
                 <a:spcPts val="0"/>
               </a:spcBef>
@@ -5465,11 +5441,11 @@
 </file>
 
 <file path=ppt/slideLayouts/slideLayout5.xml><?xml version="1.0" encoding="utf-8"?>
-<p:sldLayout xmlns:a="http://schemas.openxmlformats.org/drawingml/2006/main" xmlns:r="http://schemas.openxmlformats.org/officeDocument/2006/relationships" xmlns:mc="http://schemas.openxmlformats.org/markup-compatibility/2006" xmlns:mv="urn:schemas-microsoft-com:mac:vml" xmlns:p="http://schemas.openxmlformats.org/presentationml/2006/main" xmlns:c="http://schemas.openxmlformats.org/drawingml/2006/chart" xmlns:dgm="http://schemas.openxmlformats.org/drawingml/2006/diagram" xmlns:o="urn:schemas-microsoft-com:office:office" xmlns:v="urn:schemas-microsoft-com:vml" xmlns:pvml="urn:schemas-microsoft-com:office:powerpoint" xmlns:com="http://schemas.openxmlformats.org/drawingml/2006/compatibility" xmlns:p14="http://schemas.microsoft.com/office/powerpoint/2010/main" xmlns:p15="http://schemas.microsoft.com/office/powerpoint/2012/main" xmlns:ahyp="http://schemas.microsoft.com/office/drawing/2018/hyperlinkcolor" matchingName="Title only" type="titleOnly">
+<p:sldLayout xmlns:a="http://schemas.openxmlformats.org/drawingml/2006/main" xmlns:r="http://schemas.openxmlformats.org/officeDocument/2006/relationships" xmlns:p="http://schemas.openxmlformats.org/presentationml/2006/main" matchingName="Title only" type="titleOnly">
   <p:cSld name="TITLE_ONLY">
     <p:spTree>
       <p:nvGrpSpPr>
-        <p:cNvPr id="56" name="Shape 56"/>
+        <p:cNvPr id="1" name="Shape 56"/>
         <p:cNvGrpSpPr/>
         <p:nvPr/>
       </p:nvGrpSpPr>
@@ -5508,7 +5484,7 @@
             </a:xfrm>
             <a:prstGeom prst="diagStripe">
               <a:avLst>
-                <a:gd fmla="val 50000" name="adj"/>
+                <a:gd name="adj" fmla="val 50000"/>
               </a:avLst>
             </a:prstGeom>
             <a:solidFill>
@@ -5519,12 +5495,12 @@
             </a:ln>
           </p:spPr>
           <p:txBody>
-            <a:bodyPr anchorCtr="0" anchor="ctr" bIns="91425" lIns="91425" spcFirstLastPara="1" rIns="91425" wrap="square" tIns="91425">
+            <a:bodyPr spcFirstLastPara="1" wrap="square" lIns="91425" tIns="91425" rIns="91425" bIns="91425" anchor="ctr" anchorCtr="0">
               <a:noAutofit/>
             </a:bodyPr>
             <a:lstStyle/>
             <a:p>
-              <a:pPr indent="0" lvl="0" marL="0" rtl="0" algn="l">
+              <a:pPr marL="0" lvl="0" indent="0" algn="l" rtl="0">
                 <a:spcBef>
                   <a:spcPts val="0"/>
                 </a:spcBef>
@@ -5533,9 +5509,6 @@
                 </a:spcAft>
                 <a:buNone/>
               </a:pPr>
-              <a:r>
-                <a:t/>
-              </a:r>
               <a:endParaRPr/>
             </a:p>
           </p:txBody>
@@ -5553,7 +5526,7 @@
             </a:xfrm>
             <a:prstGeom prst="diagStripe">
               <a:avLst>
-                <a:gd fmla="val 50000" name="adj"/>
+                <a:gd name="adj" fmla="val 50000"/>
               </a:avLst>
             </a:prstGeom>
             <a:solidFill>
@@ -5564,12 +5537,12 @@
             </a:ln>
           </p:spPr>
           <p:txBody>
-            <a:bodyPr anchorCtr="0" anchor="ctr" bIns="91425" lIns="91425" spcFirstLastPara="1" rIns="91425" wrap="square" tIns="91425">
+            <a:bodyPr spcFirstLastPara="1" wrap="square" lIns="91425" tIns="91425" rIns="91425" bIns="91425" anchor="ctr" anchorCtr="0">
               <a:noAutofit/>
             </a:bodyPr>
             <a:lstStyle/>
             <a:p>
-              <a:pPr indent="0" lvl="0" marL="0" rtl="0" algn="l">
+              <a:pPr marL="0" lvl="0" indent="0" algn="l" rtl="0">
                 <a:spcBef>
                   <a:spcPts val="0"/>
                 </a:spcBef>
@@ -5578,9 +5551,6 @@
                 </a:spcAft>
                 <a:buNone/>
               </a:pPr>
-              <a:r>
-                <a:t/>
-              </a:r>
               <a:endParaRPr/>
             </a:p>
           </p:txBody>
@@ -5589,7 +5559,9 @@
       <p:sp>
         <p:nvSpPr>
           <p:cNvPr id="60" name="Google Shape;60;p6"/>
-          <p:cNvSpPr txBox="1"/>
+          <p:cNvSpPr txBox="1">
+            <a:spLocks noGrp="1"/>
+          </p:cNvSpPr>
           <p:nvPr>
             <p:ph type="title"/>
           </p:nvPr>
@@ -5604,7 +5576,7 @@
           </a:prstGeom>
         </p:spPr>
         <p:txBody>
-          <a:bodyPr anchorCtr="0" anchor="t" bIns="91425" lIns="91425" spcFirstLastPara="1" rIns="91425" wrap="square" tIns="91425">
+          <a:bodyPr spcFirstLastPara="1" wrap="square" lIns="91425" tIns="91425" rIns="91425" bIns="91425" anchor="t" anchorCtr="0">
             <a:normAutofit/>
           </a:bodyPr>
           <a:lstStyle>
@@ -5708,15 +5680,19 @@
               <a:defRPr sz="2400"/>
             </a:lvl9pPr>
           </a:lstStyle>
-          <a:p/>
+          <a:p>
+            <a:endParaRPr/>
+          </a:p>
         </p:txBody>
       </p:sp>
       <p:sp>
         <p:nvSpPr>
           <p:cNvPr id="61" name="Google Shape;61;p6"/>
-          <p:cNvSpPr txBox="1"/>
+          <p:cNvSpPr txBox="1">
+            <a:spLocks noGrp="1"/>
+          </p:cNvSpPr>
           <p:nvPr>
-            <p:ph idx="12" type="sldNum"/>
+            <p:ph type="sldNum" idx="12"/>
           </p:nvPr>
         </p:nvSpPr>
         <p:spPr>
@@ -5729,7 +5705,7 @@
           </a:prstGeom>
         </p:spPr>
         <p:txBody>
-          <a:bodyPr anchorCtr="0" anchor="ctr" bIns="91425" lIns="91425" spcFirstLastPara="1" rIns="91425" wrap="square" tIns="91425">
+          <a:bodyPr spcFirstLastPara="1" wrap="square" lIns="91425" tIns="91425" rIns="91425" bIns="91425" anchor="ctr" anchorCtr="0">
             <a:normAutofit/>
           </a:bodyPr>
           <a:lstStyle>
@@ -5771,7 +5747,7 @@
             </a:lvl9pPr>
           </a:lstStyle>
           <a:p>
-            <a:pPr indent="0" lvl="0" marL="0" rtl="0" algn="r">
+            <a:pPr marL="0" lvl="0" indent="0" algn="r" rtl="0">
               <a:spcBef>
                 <a:spcPts val="0"/>
               </a:spcBef>
@@ -5797,11 +5773,11 @@
 </file>
 
 <file path=ppt/slideLayouts/slideLayout6.xml><?xml version="1.0" encoding="utf-8"?>
-<p:sldLayout xmlns:a="http://schemas.openxmlformats.org/drawingml/2006/main" xmlns:r="http://schemas.openxmlformats.org/officeDocument/2006/relationships" xmlns:mc="http://schemas.openxmlformats.org/markup-compatibility/2006" xmlns:mv="urn:schemas-microsoft-com:mac:vml" xmlns:p="http://schemas.openxmlformats.org/presentationml/2006/main" xmlns:c="http://schemas.openxmlformats.org/drawingml/2006/chart" xmlns:dgm="http://schemas.openxmlformats.org/drawingml/2006/diagram" xmlns:o="urn:schemas-microsoft-com:office:office" xmlns:v="urn:schemas-microsoft-com:vml" xmlns:pvml="urn:schemas-microsoft-com:office:powerpoint" xmlns:com="http://schemas.openxmlformats.org/drawingml/2006/compatibility" xmlns:p14="http://schemas.microsoft.com/office/powerpoint/2010/main" xmlns:p15="http://schemas.microsoft.com/office/powerpoint/2012/main" xmlns:ahyp="http://schemas.microsoft.com/office/drawing/2018/hyperlinkcolor" matchingName="One column text">
+<p:sldLayout xmlns:a="http://schemas.openxmlformats.org/drawingml/2006/main" xmlns:r="http://schemas.openxmlformats.org/officeDocument/2006/relationships" xmlns:p="http://schemas.openxmlformats.org/presentationml/2006/main" matchingName="One column text">
   <p:cSld name="ONE_COLUMN_TEXT">
     <p:spTree>
       <p:nvGrpSpPr>
-        <p:cNvPr id="62" name="Shape 62"/>
+        <p:cNvPr id="1" name="Shape 62"/>
         <p:cNvGrpSpPr/>
         <p:nvPr/>
       </p:nvGrpSpPr>
@@ -5840,7 +5816,7 @@
             </a:xfrm>
             <a:prstGeom prst="diagStripe">
               <a:avLst>
-                <a:gd fmla="val 50000" name="adj"/>
+                <a:gd name="adj" fmla="val 50000"/>
               </a:avLst>
             </a:prstGeom>
             <a:solidFill>
@@ -5851,12 +5827,12 @@
             </a:ln>
           </p:spPr>
           <p:txBody>
-            <a:bodyPr anchorCtr="0" anchor="ctr" bIns="91425" lIns="91425" spcFirstLastPara="1" rIns="91425" wrap="square" tIns="91425">
+            <a:bodyPr spcFirstLastPara="1" wrap="square" lIns="91425" tIns="91425" rIns="91425" bIns="91425" anchor="ctr" anchorCtr="0">
               <a:noAutofit/>
             </a:bodyPr>
             <a:lstStyle/>
             <a:p>
-              <a:pPr indent="0" lvl="0" marL="0" rtl="0" algn="l">
+              <a:pPr marL="0" lvl="0" indent="0" algn="l" rtl="0">
                 <a:spcBef>
                   <a:spcPts val="0"/>
                 </a:spcBef>
@@ -5865,9 +5841,6 @@
                 </a:spcAft>
                 <a:buNone/>
               </a:pPr>
-              <a:r>
-                <a:t/>
-              </a:r>
               <a:endParaRPr/>
             </a:p>
           </p:txBody>
@@ -5885,7 +5858,7 @@
             </a:xfrm>
             <a:prstGeom prst="diagStripe">
               <a:avLst>
-                <a:gd fmla="val 50000" name="adj"/>
+                <a:gd name="adj" fmla="val 50000"/>
               </a:avLst>
             </a:prstGeom>
             <a:solidFill>
@@ -5896,12 +5869,12 @@
             </a:ln>
           </p:spPr>
           <p:txBody>
-            <a:bodyPr anchorCtr="0" anchor="ctr" bIns="91425" lIns="91425" spcFirstLastPara="1" rIns="91425" wrap="square" tIns="91425">
+            <a:bodyPr spcFirstLastPara="1" wrap="square" lIns="91425" tIns="91425" rIns="91425" bIns="91425" anchor="ctr" anchorCtr="0">
               <a:noAutofit/>
             </a:bodyPr>
             <a:lstStyle/>
             <a:p>
-              <a:pPr indent="0" lvl="0" marL="0" rtl="0" algn="l">
+              <a:pPr marL="0" lvl="0" indent="0" algn="l" rtl="0">
                 <a:spcBef>
                   <a:spcPts val="0"/>
                 </a:spcBef>
@@ -5910,9 +5883,6 @@
                 </a:spcAft>
                 <a:buNone/>
               </a:pPr>
-              <a:r>
-                <a:t/>
-              </a:r>
               <a:endParaRPr/>
             </a:p>
           </p:txBody>
@@ -5921,7 +5891,9 @@
       <p:sp>
         <p:nvSpPr>
           <p:cNvPr id="66" name="Google Shape;66;p7"/>
-          <p:cNvSpPr txBox="1"/>
+          <p:cNvSpPr txBox="1">
+            <a:spLocks noGrp="1"/>
+          </p:cNvSpPr>
           <p:nvPr>
             <p:ph type="title"/>
           </p:nvPr>
@@ -5936,7 +5908,7 @@
           </a:prstGeom>
         </p:spPr>
         <p:txBody>
-          <a:bodyPr anchorCtr="0" anchor="t" bIns="91425" lIns="91425" spcFirstLastPara="1" rIns="91425" wrap="square" tIns="91425">
+          <a:bodyPr spcFirstLastPara="1" wrap="square" lIns="91425" tIns="91425" rIns="91425" bIns="91425" anchor="t" anchorCtr="0">
             <a:normAutofit/>
           </a:bodyPr>
           <a:lstStyle>
@@ -6040,15 +6012,19 @@
               <a:defRPr sz="2400"/>
             </a:lvl9pPr>
           </a:lstStyle>
-          <a:p/>
+          <a:p>
+            <a:endParaRPr/>
+          </a:p>
         </p:txBody>
       </p:sp>
       <p:sp>
         <p:nvSpPr>
           <p:cNvPr id="67" name="Google Shape;67;p7"/>
-          <p:cNvSpPr txBox="1"/>
+          <p:cNvSpPr txBox="1">
+            <a:spLocks noGrp="1"/>
+          </p:cNvSpPr>
           <p:nvPr>
-            <p:ph idx="1" type="body"/>
+            <p:ph type="body" idx="1"/>
           </p:nvPr>
         </p:nvSpPr>
         <p:spPr>
@@ -6061,11 +6037,11 @@
           </a:prstGeom>
         </p:spPr>
         <p:txBody>
-          <a:bodyPr anchorCtr="0" anchor="t" bIns="91425" lIns="91425" spcFirstLastPara="1" rIns="91425" wrap="square" tIns="91425">
+          <a:bodyPr spcFirstLastPara="1" wrap="square" lIns="91425" tIns="91425" rIns="91425" bIns="91425" anchor="t" anchorCtr="0">
             <a:normAutofit/>
           </a:bodyPr>
           <a:lstStyle>
-            <a:lvl1pPr indent="-311150" lvl="0" marL="457200">
+            <a:lvl1pPr marL="457200" lvl="0" indent="-311150">
               <a:spcBef>
                 <a:spcPts val="0"/>
               </a:spcBef>
@@ -6076,7 +6052,7 @@
               <a:buChar char="●"/>
               <a:defRPr/>
             </a:lvl1pPr>
-            <a:lvl2pPr indent="-298450" lvl="1" marL="914400">
+            <a:lvl2pPr marL="914400" lvl="1" indent="-298450">
               <a:spcBef>
                 <a:spcPts val="0"/>
               </a:spcBef>
@@ -6087,7 +6063,7 @@
               <a:buChar char="○"/>
               <a:defRPr/>
             </a:lvl2pPr>
-            <a:lvl3pPr indent="-298450" lvl="2" marL="1371600">
+            <a:lvl3pPr marL="1371600" lvl="2" indent="-298450">
               <a:spcBef>
                 <a:spcPts val="0"/>
               </a:spcBef>
@@ -6098,7 +6074,7 @@
               <a:buChar char="■"/>
               <a:defRPr/>
             </a:lvl3pPr>
-            <a:lvl4pPr indent="-298450" lvl="3" marL="1828800">
+            <a:lvl4pPr marL="1828800" lvl="3" indent="-298450">
               <a:spcBef>
                 <a:spcPts val="0"/>
               </a:spcBef>
@@ -6109,7 +6085,7 @@
               <a:buChar char="●"/>
               <a:defRPr/>
             </a:lvl4pPr>
-            <a:lvl5pPr indent="-298450" lvl="4" marL="2286000">
+            <a:lvl5pPr marL="2286000" lvl="4" indent="-298450">
               <a:spcBef>
                 <a:spcPts val="0"/>
               </a:spcBef>
@@ -6120,7 +6096,7 @@
               <a:buChar char="○"/>
               <a:defRPr/>
             </a:lvl5pPr>
-            <a:lvl6pPr indent="-298450" lvl="5" marL="2743200">
+            <a:lvl6pPr marL="2743200" lvl="5" indent="-298450">
               <a:spcBef>
                 <a:spcPts val="0"/>
               </a:spcBef>
@@ -6131,7 +6107,7 @@
               <a:buChar char="■"/>
               <a:defRPr/>
             </a:lvl6pPr>
-            <a:lvl7pPr indent="-298450" lvl="6" marL="3200400">
+            <a:lvl7pPr marL="3200400" lvl="6" indent="-298450">
               <a:spcBef>
                 <a:spcPts val="0"/>
               </a:spcBef>
@@ -6142,7 +6118,7 @@
               <a:buChar char="●"/>
               <a:defRPr/>
             </a:lvl7pPr>
-            <a:lvl8pPr indent="-298450" lvl="7" marL="3657600">
+            <a:lvl8pPr marL="3657600" lvl="7" indent="-298450">
               <a:spcBef>
                 <a:spcPts val="0"/>
               </a:spcBef>
@@ -6153,7 +6129,7 @@
               <a:buChar char="○"/>
               <a:defRPr/>
             </a:lvl8pPr>
-            <a:lvl9pPr indent="-298450" lvl="8" marL="4114800">
+            <a:lvl9pPr marL="4114800" lvl="8" indent="-298450">
               <a:spcBef>
                 <a:spcPts val="0"/>
               </a:spcBef>
@@ -6165,15 +6141,19 @@
               <a:defRPr/>
             </a:lvl9pPr>
           </a:lstStyle>
-          <a:p/>
+          <a:p>
+            <a:endParaRPr/>
+          </a:p>
         </p:txBody>
       </p:sp>
       <p:sp>
         <p:nvSpPr>
           <p:cNvPr id="68" name="Google Shape;68;p7"/>
-          <p:cNvSpPr txBox="1"/>
+          <p:cNvSpPr txBox="1">
+            <a:spLocks noGrp="1"/>
+          </p:cNvSpPr>
           <p:nvPr>
-            <p:ph idx="12" type="sldNum"/>
+            <p:ph type="sldNum" idx="12"/>
           </p:nvPr>
         </p:nvSpPr>
         <p:spPr>
@@ -6186,7 +6166,7 @@
           </a:prstGeom>
         </p:spPr>
         <p:txBody>
-          <a:bodyPr anchorCtr="0" anchor="ctr" bIns="91425" lIns="91425" spcFirstLastPara="1" rIns="91425" wrap="square" tIns="91425">
+          <a:bodyPr spcFirstLastPara="1" wrap="square" lIns="91425" tIns="91425" rIns="91425" bIns="91425" anchor="ctr" anchorCtr="0">
             <a:normAutofit/>
           </a:bodyPr>
           <a:lstStyle>
@@ -6228,7 +6208,7 @@
             </a:lvl9pPr>
           </a:lstStyle>
           <a:p>
-            <a:pPr indent="0" lvl="0" marL="0" rtl="0" algn="r">
+            <a:pPr marL="0" lvl="0" indent="0" algn="r" rtl="0">
               <a:spcBef>
                 <a:spcPts val="0"/>
               </a:spcBef>
@@ -6254,11 +6234,11 @@
 </file>
 
 <file path=ppt/slideLayouts/slideLayout7.xml><?xml version="1.0" encoding="utf-8"?>
-<p:sldLayout xmlns:a="http://schemas.openxmlformats.org/drawingml/2006/main" xmlns:r="http://schemas.openxmlformats.org/officeDocument/2006/relationships" xmlns:mc="http://schemas.openxmlformats.org/markup-compatibility/2006" xmlns:mv="urn:schemas-microsoft-com:mac:vml" xmlns:p="http://schemas.openxmlformats.org/presentationml/2006/main" xmlns:c="http://schemas.openxmlformats.org/drawingml/2006/chart" xmlns:dgm="http://schemas.openxmlformats.org/drawingml/2006/diagram" xmlns:o="urn:schemas-microsoft-com:office:office" xmlns:v="urn:schemas-microsoft-com:vml" xmlns:pvml="urn:schemas-microsoft-com:office:powerpoint" xmlns:com="http://schemas.openxmlformats.org/drawingml/2006/compatibility" xmlns:p14="http://schemas.microsoft.com/office/powerpoint/2010/main" xmlns:p15="http://schemas.microsoft.com/office/powerpoint/2012/main" xmlns:ahyp="http://schemas.microsoft.com/office/drawing/2018/hyperlinkcolor" matchingName="Main point">
+<p:sldLayout xmlns:a="http://schemas.openxmlformats.org/drawingml/2006/main" xmlns:r="http://schemas.openxmlformats.org/officeDocument/2006/relationships" xmlns:p="http://schemas.openxmlformats.org/presentationml/2006/main" matchingName="Main point">
   <p:cSld name="MAIN_POINT">
     <p:spTree>
       <p:nvGrpSpPr>
-        <p:cNvPr id="69" name="Shape 69"/>
+        <p:cNvPr id="1" name="Shape 69"/>
         <p:cNvGrpSpPr/>
         <p:nvPr/>
       </p:nvGrpSpPr>
@@ -6297,7 +6277,7 @@
             </a:xfrm>
             <a:prstGeom prst="diagStripe">
               <a:avLst>
-                <a:gd fmla="val 49469" name="adj"/>
+                <a:gd name="adj" fmla="val 49469"/>
               </a:avLst>
             </a:prstGeom>
             <a:solidFill>
@@ -6310,12 +6290,12 @@
             </a:ln>
           </p:spPr>
           <p:txBody>
-            <a:bodyPr anchorCtr="0" anchor="ctr" bIns="91425" lIns="91425" spcFirstLastPara="1" rIns="91425" wrap="square" tIns="91425">
+            <a:bodyPr spcFirstLastPara="1" wrap="square" lIns="91425" tIns="91425" rIns="91425" bIns="91425" anchor="ctr" anchorCtr="0">
               <a:noAutofit/>
             </a:bodyPr>
             <a:lstStyle/>
             <a:p>
-              <a:pPr indent="0" lvl="0" marL="0" rtl="0" algn="l">
+              <a:pPr marL="0" lvl="0" indent="0" algn="l" rtl="0">
                 <a:spcBef>
                   <a:spcPts val="0"/>
                 </a:spcBef>
@@ -6324,9 +6304,6 @@
                 </a:spcAft>
                 <a:buNone/>
               </a:pPr>
-              <a:r>
-                <a:t/>
-              </a:r>
               <a:endParaRPr/>
             </a:p>
           </p:txBody>
@@ -6344,7 +6321,7 @@
             </a:xfrm>
             <a:prstGeom prst="diagStripe">
               <a:avLst>
-                <a:gd fmla="val 0" name="adj"/>
+                <a:gd name="adj" fmla="val 0"/>
               </a:avLst>
             </a:prstGeom>
             <a:solidFill>
@@ -6357,12 +6334,12 @@
             </a:ln>
           </p:spPr>
           <p:txBody>
-            <a:bodyPr anchorCtr="0" anchor="ctr" bIns="91425" lIns="91425" spcFirstLastPara="1" rIns="91425" wrap="square" tIns="91425">
+            <a:bodyPr spcFirstLastPara="1" wrap="square" lIns="91425" tIns="91425" rIns="91425" bIns="91425" anchor="ctr" anchorCtr="0">
               <a:noAutofit/>
             </a:bodyPr>
             <a:lstStyle/>
             <a:p>
-              <a:pPr indent="0" lvl="0" marL="0" rtl="0" algn="l">
+              <a:pPr marL="0" lvl="0" indent="0" algn="l" rtl="0">
                 <a:spcBef>
                   <a:spcPts val="0"/>
                 </a:spcBef>
@@ -6371,9 +6348,6 @@
                 </a:spcAft>
                 <a:buNone/>
               </a:pPr>
-              <a:r>
-                <a:t/>
-              </a:r>
               <a:endParaRPr/>
             </a:p>
           </p:txBody>
@@ -6391,7 +6365,7 @@
             </a:xfrm>
             <a:prstGeom prst="diagStripe">
               <a:avLst>
-                <a:gd fmla="val 50000" name="adj"/>
+                <a:gd name="adj" fmla="val 50000"/>
               </a:avLst>
             </a:prstGeom>
             <a:solidFill>
@@ -6404,12 +6378,12 @@
             </a:ln>
           </p:spPr>
           <p:txBody>
-            <a:bodyPr anchorCtr="0" anchor="ctr" bIns="91425" lIns="91425" spcFirstLastPara="1" rIns="91425" wrap="square" tIns="91425">
+            <a:bodyPr spcFirstLastPara="1" wrap="square" lIns="91425" tIns="91425" rIns="91425" bIns="91425" anchor="ctr" anchorCtr="0">
               <a:noAutofit/>
             </a:bodyPr>
             <a:lstStyle/>
             <a:p>
-              <a:pPr indent="0" lvl="0" marL="0" rtl="0" algn="l">
+              <a:pPr marL="0" lvl="0" indent="0" algn="l" rtl="0">
                 <a:spcBef>
                   <a:spcPts val="0"/>
                 </a:spcBef>
@@ -6418,9 +6392,6 @@
                 </a:spcAft>
                 <a:buNone/>
               </a:pPr>
-              <a:r>
-                <a:t/>
-              </a:r>
               <a:endParaRPr/>
             </a:p>
           </p:txBody>
@@ -6438,7 +6409,7 @@
             </a:xfrm>
             <a:prstGeom prst="diagStripe">
               <a:avLst>
-                <a:gd fmla="val 50000" name="adj"/>
+                <a:gd name="adj" fmla="val 50000"/>
               </a:avLst>
             </a:prstGeom>
             <a:solidFill>
@@ -6451,12 +6422,12 @@
             </a:ln>
           </p:spPr>
           <p:txBody>
-            <a:bodyPr anchorCtr="0" anchor="ctr" bIns="91425" lIns="91425" spcFirstLastPara="1" rIns="91425" wrap="square" tIns="91425">
+            <a:bodyPr spcFirstLastPara="1" wrap="square" lIns="91425" tIns="91425" rIns="91425" bIns="91425" anchor="ctr" anchorCtr="0">
               <a:noAutofit/>
             </a:bodyPr>
             <a:lstStyle/>
             <a:p>
-              <a:pPr indent="0" lvl="0" marL="0" rtl="0" algn="l">
+              <a:pPr marL="0" lvl="0" indent="0" algn="l" rtl="0">
                 <a:spcBef>
                   <a:spcPts val="0"/>
                 </a:spcBef>
@@ -6465,9 +6436,6 @@
                 </a:spcAft>
                 <a:buNone/>
               </a:pPr>
-              <a:r>
-                <a:t/>
-              </a:r>
               <a:endParaRPr/>
             </a:p>
           </p:txBody>
@@ -6485,7 +6453,7 @@
             </a:xfrm>
             <a:prstGeom prst="diagStripe">
               <a:avLst>
-                <a:gd fmla="val 50000" name="adj"/>
+                <a:gd name="adj" fmla="val 50000"/>
               </a:avLst>
             </a:prstGeom>
             <a:solidFill>
@@ -6498,12 +6466,12 @@
             </a:ln>
           </p:spPr>
           <p:txBody>
-            <a:bodyPr anchorCtr="0" anchor="ctr" bIns="91425" lIns="91425" spcFirstLastPara="1" rIns="91425" wrap="square" tIns="91425">
+            <a:bodyPr spcFirstLastPara="1" wrap="square" lIns="91425" tIns="91425" rIns="91425" bIns="91425" anchor="ctr" anchorCtr="0">
               <a:noAutofit/>
             </a:bodyPr>
             <a:lstStyle/>
             <a:p>
-              <a:pPr indent="0" lvl="0" marL="0" rtl="0" algn="l">
+              <a:pPr marL="0" lvl="0" indent="0" algn="l" rtl="0">
                 <a:spcBef>
                   <a:spcPts val="0"/>
                 </a:spcBef>
@@ -6512,9 +6480,6 @@
                 </a:spcAft>
                 <a:buNone/>
               </a:pPr>
-              <a:r>
-                <a:t/>
-              </a:r>
               <a:endParaRPr/>
             </a:p>
           </p:txBody>
@@ -6532,7 +6497,7 @@
             </a:xfrm>
             <a:prstGeom prst="diagStripe">
               <a:avLst>
-                <a:gd fmla="val 50000" name="adj"/>
+                <a:gd name="adj" fmla="val 50000"/>
               </a:avLst>
             </a:prstGeom>
             <a:solidFill>
@@ -6545,12 +6510,12 @@
             </a:ln>
           </p:spPr>
           <p:txBody>
-            <a:bodyPr anchorCtr="0" anchor="ctr" bIns="91425" lIns="91425" spcFirstLastPara="1" rIns="91425" wrap="square" tIns="91425">
+            <a:bodyPr spcFirstLastPara="1" wrap="square" lIns="91425" tIns="91425" rIns="91425" bIns="91425" anchor="ctr" anchorCtr="0">
               <a:noAutofit/>
             </a:bodyPr>
             <a:lstStyle/>
             <a:p>
-              <a:pPr indent="0" lvl="0" marL="0" rtl="0" algn="l">
+              <a:pPr marL="0" lvl="0" indent="0" algn="l" rtl="0">
                 <a:spcBef>
                   <a:spcPts val="0"/>
                 </a:spcBef>
@@ -6559,9 +6524,6 @@
                 </a:spcAft>
                 <a:buNone/>
               </a:pPr>
-              <a:r>
-                <a:t/>
-              </a:r>
               <a:endParaRPr/>
             </a:p>
           </p:txBody>
@@ -6579,7 +6541,7 @@
             </a:xfrm>
             <a:prstGeom prst="diagStripe">
               <a:avLst>
-                <a:gd fmla="val 50000" name="adj"/>
+                <a:gd name="adj" fmla="val 50000"/>
               </a:avLst>
             </a:prstGeom>
             <a:solidFill>
@@ -6592,12 +6554,12 @@
             </a:ln>
           </p:spPr>
           <p:txBody>
-            <a:bodyPr anchorCtr="0" anchor="ctr" bIns="91425" lIns="91425" spcFirstLastPara="1" rIns="91425" wrap="square" tIns="91425">
+            <a:bodyPr spcFirstLastPara="1" wrap="square" lIns="91425" tIns="91425" rIns="91425" bIns="91425" anchor="ctr" anchorCtr="0">
               <a:noAutofit/>
             </a:bodyPr>
             <a:lstStyle/>
             <a:p>
-              <a:pPr indent="0" lvl="0" marL="0" rtl="0" algn="l">
+              <a:pPr marL="0" lvl="0" indent="0" algn="l" rtl="0">
                 <a:spcBef>
                   <a:spcPts val="0"/>
                 </a:spcBef>
@@ -6606,9 +6568,6 @@
                 </a:spcAft>
                 <a:buNone/>
               </a:pPr>
-              <a:r>
-                <a:t/>
-              </a:r>
               <a:endParaRPr/>
             </a:p>
           </p:txBody>
@@ -6626,7 +6585,7 @@
             </a:xfrm>
             <a:prstGeom prst="diagStripe">
               <a:avLst>
-                <a:gd fmla="val 50000" name="adj"/>
+                <a:gd name="adj" fmla="val 50000"/>
               </a:avLst>
             </a:prstGeom>
             <a:solidFill>
@@ -6637,12 +6596,12 @@
             </a:ln>
           </p:spPr>
           <p:txBody>
-            <a:bodyPr anchorCtr="0" anchor="ctr" bIns="91425" lIns="91425" spcFirstLastPara="1" rIns="91425" wrap="square" tIns="91425">
+            <a:bodyPr spcFirstLastPara="1" wrap="square" lIns="91425" tIns="91425" rIns="91425" bIns="91425" anchor="ctr" anchorCtr="0">
               <a:noAutofit/>
             </a:bodyPr>
             <a:lstStyle/>
             <a:p>
-              <a:pPr indent="0" lvl="0" marL="0" rtl="0" algn="l">
+              <a:pPr marL="0" lvl="0" indent="0" algn="l" rtl="0">
                 <a:spcBef>
                   <a:spcPts val="0"/>
                 </a:spcBef>
@@ -6651,9 +6610,6 @@
                 </a:spcAft>
                 <a:buNone/>
               </a:pPr>
-              <a:r>
-                <a:t/>
-              </a:r>
               <a:endParaRPr/>
             </a:p>
           </p:txBody>
@@ -6671,7 +6627,7 @@
             </a:xfrm>
             <a:prstGeom prst="diagStripe">
               <a:avLst>
-                <a:gd fmla="val 50000" name="adj"/>
+                <a:gd name="adj" fmla="val 50000"/>
               </a:avLst>
             </a:prstGeom>
             <a:solidFill>
@@ -6684,12 +6640,12 @@
             </a:ln>
           </p:spPr>
           <p:txBody>
-            <a:bodyPr anchorCtr="0" anchor="ctr" bIns="91425" lIns="91425" spcFirstLastPara="1" rIns="91425" wrap="square" tIns="91425">
+            <a:bodyPr spcFirstLastPara="1" wrap="square" lIns="91425" tIns="91425" rIns="91425" bIns="91425" anchor="ctr" anchorCtr="0">
               <a:noAutofit/>
             </a:bodyPr>
             <a:lstStyle/>
             <a:p>
-              <a:pPr indent="0" lvl="0" marL="0" rtl="0" algn="l">
+              <a:pPr marL="0" lvl="0" indent="0" algn="l" rtl="0">
                 <a:spcBef>
                   <a:spcPts val="0"/>
                 </a:spcBef>
@@ -6698,9 +6654,6 @@
                 </a:spcAft>
                 <a:buNone/>
               </a:pPr>
-              <a:r>
-                <a:t/>
-              </a:r>
               <a:endParaRPr/>
             </a:p>
           </p:txBody>
@@ -6718,7 +6671,7 @@
             </a:xfrm>
             <a:prstGeom prst="diagStripe">
               <a:avLst>
-                <a:gd fmla="val 50000" name="adj"/>
+                <a:gd name="adj" fmla="val 50000"/>
               </a:avLst>
             </a:prstGeom>
             <a:solidFill>
@@ -6731,12 +6684,12 @@
             </a:ln>
           </p:spPr>
           <p:txBody>
-            <a:bodyPr anchorCtr="0" anchor="ctr" bIns="91425" lIns="91425" spcFirstLastPara="1" rIns="91425" wrap="square" tIns="91425">
+            <a:bodyPr spcFirstLastPara="1" wrap="square" lIns="91425" tIns="91425" rIns="91425" bIns="91425" anchor="ctr" anchorCtr="0">
               <a:noAutofit/>
             </a:bodyPr>
             <a:lstStyle/>
             <a:p>
-              <a:pPr indent="0" lvl="0" marL="0" rtl="0" algn="l">
+              <a:pPr marL="0" lvl="0" indent="0" algn="l" rtl="0">
                 <a:spcBef>
                   <a:spcPts val="0"/>
                 </a:spcBef>
@@ -6745,9 +6698,6 @@
                 </a:spcAft>
                 <a:buNone/>
               </a:pPr>
-              <a:r>
-                <a:t/>
-              </a:r>
               <a:endParaRPr/>
             </a:p>
           </p:txBody>
@@ -6765,7 +6715,7 @@
             </a:xfrm>
             <a:prstGeom prst="diagStripe">
               <a:avLst>
-                <a:gd fmla="val 50000" name="adj"/>
+                <a:gd name="adj" fmla="val 50000"/>
               </a:avLst>
             </a:prstGeom>
             <a:solidFill>
@@ -6778,12 +6728,12 @@
             </a:ln>
           </p:spPr>
           <p:txBody>
-            <a:bodyPr anchorCtr="0" anchor="ctr" bIns="91425" lIns="91425" spcFirstLastPara="1" rIns="91425" wrap="square" tIns="91425">
+            <a:bodyPr spcFirstLastPara="1" wrap="square" lIns="91425" tIns="91425" rIns="91425" bIns="91425" anchor="ctr" anchorCtr="0">
               <a:noAutofit/>
             </a:bodyPr>
             <a:lstStyle/>
             <a:p>
-              <a:pPr indent="0" lvl="0" marL="0" rtl="0" algn="l">
+              <a:pPr marL="0" lvl="0" indent="0" algn="l" rtl="0">
                 <a:spcBef>
                   <a:spcPts val="0"/>
                 </a:spcBef>
@@ -6792,9 +6742,6 @@
                 </a:spcAft>
                 <a:buNone/>
               </a:pPr>
-              <a:r>
-                <a:t/>
-              </a:r>
               <a:endParaRPr/>
             </a:p>
           </p:txBody>
@@ -6812,7 +6759,7 @@
             </a:xfrm>
             <a:prstGeom prst="diagStripe">
               <a:avLst>
-                <a:gd fmla="val 50000" name="adj"/>
+                <a:gd name="adj" fmla="val 50000"/>
               </a:avLst>
             </a:prstGeom>
             <a:solidFill>
@@ -6825,12 +6772,12 @@
             </a:ln>
           </p:spPr>
           <p:txBody>
-            <a:bodyPr anchorCtr="0" anchor="ctr" bIns="91425" lIns="91425" spcFirstLastPara="1" rIns="91425" wrap="square" tIns="91425">
+            <a:bodyPr spcFirstLastPara="1" wrap="square" lIns="91425" tIns="91425" rIns="91425" bIns="91425" anchor="ctr" anchorCtr="0">
               <a:noAutofit/>
             </a:bodyPr>
             <a:lstStyle/>
             <a:p>
-              <a:pPr indent="0" lvl="0" marL="0" rtl="0" algn="l">
+              <a:pPr marL="0" lvl="0" indent="0" algn="l" rtl="0">
                 <a:spcBef>
                   <a:spcPts val="0"/>
                 </a:spcBef>
@@ -6839,9 +6786,6 @@
                 </a:spcAft>
                 <a:buNone/>
               </a:pPr>
-              <a:r>
-                <a:t/>
-              </a:r>
               <a:endParaRPr/>
             </a:p>
           </p:txBody>
@@ -6859,7 +6803,7 @@
             </a:xfrm>
             <a:prstGeom prst="diagStripe">
               <a:avLst>
-                <a:gd fmla="val 50000" name="adj"/>
+                <a:gd name="adj" fmla="val 50000"/>
               </a:avLst>
             </a:prstGeom>
             <a:solidFill>
@@ -6872,12 +6816,12 @@
             </a:ln>
           </p:spPr>
           <p:txBody>
-            <a:bodyPr anchorCtr="0" anchor="ctr" bIns="91425" lIns="91425" spcFirstLastPara="1" rIns="91425" wrap="square" tIns="91425">
+            <a:bodyPr spcFirstLastPara="1" wrap="square" lIns="91425" tIns="91425" rIns="91425" bIns="91425" anchor="ctr" anchorCtr="0">
               <a:noAutofit/>
             </a:bodyPr>
             <a:lstStyle/>
             <a:p>
-              <a:pPr indent="0" lvl="0" marL="0" rtl="0" algn="l">
+              <a:pPr marL="0" lvl="0" indent="0" algn="l" rtl="0">
                 <a:spcBef>
                   <a:spcPts val="0"/>
                 </a:spcBef>
@@ -6886,9 +6830,6 @@
                 </a:spcAft>
                 <a:buNone/>
               </a:pPr>
-              <a:r>
-                <a:t/>
-              </a:r>
               <a:endParaRPr/>
             </a:p>
           </p:txBody>
@@ -6906,7 +6847,7 @@
             </a:xfrm>
             <a:prstGeom prst="diagStripe">
               <a:avLst>
-                <a:gd fmla="val 50000" name="adj"/>
+                <a:gd name="adj" fmla="val 50000"/>
               </a:avLst>
             </a:prstGeom>
             <a:solidFill>
@@ -6917,12 +6858,12 @@
             </a:ln>
           </p:spPr>
           <p:txBody>
-            <a:bodyPr anchorCtr="0" anchor="ctr" bIns="91425" lIns="91425" spcFirstLastPara="1" rIns="91425" wrap="square" tIns="91425">
+            <a:bodyPr spcFirstLastPara="1" wrap="square" lIns="91425" tIns="91425" rIns="91425" bIns="91425" anchor="ctr" anchorCtr="0">
               <a:noAutofit/>
             </a:bodyPr>
             <a:lstStyle/>
             <a:p>
-              <a:pPr indent="0" lvl="0" marL="0" rtl="0" algn="l">
+              <a:pPr marL="0" lvl="0" indent="0" algn="l" rtl="0">
                 <a:spcBef>
                   <a:spcPts val="0"/>
                 </a:spcBef>
@@ -6931,9 +6872,6 @@
                 </a:spcAft>
                 <a:buNone/>
               </a:pPr>
-              <a:r>
-                <a:t/>
-              </a:r>
               <a:endParaRPr/>
             </a:p>
           </p:txBody>
@@ -6951,7 +6889,7 @@
             </a:xfrm>
             <a:prstGeom prst="diagStripe">
               <a:avLst>
-                <a:gd fmla="val 50000" name="adj"/>
+                <a:gd name="adj" fmla="val 50000"/>
               </a:avLst>
             </a:prstGeom>
             <a:solidFill>
@@ -6964,12 +6902,12 @@
             </a:ln>
           </p:spPr>
           <p:txBody>
-            <a:bodyPr anchorCtr="0" anchor="ctr" bIns="91425" lIns="91425" spcFirstLastPara="1" rIns="91425" wrap="square" tIns="91425">
+            <a:bodyPr spcFirstLastPara="1" wrap="square" lIns="91425" tIns="91425" rIns="91425" bIns="91425" anchor="ctr" anchorCtr="0">
               <a:noAutofit/>
             </a:bodyPr>
             <a:lstStyle/>
             <a:p>
-              <a:pPr indent="0" lvl="0" marL="0" rtl="0" algn="l">
+              <a:pPr marL="0" lvl="0" indent="0" algn="l" rtl="0">
                 <a:spcBef>
                   <a:spcPts val="0"/>
                 </a:spcBef>
@@ -6978,9 +6916,6 @@
                 </a:spcAft>
                 <a:buNone/>
               </a:pPr>
-              <a:r>
-                <a:t/>
-              </a:r>
               <a:endParaRPr/>
             </a:p>
           </p:txBody>
@@ -6998,7 +6933,7 @@
             </a:xfrm>
             <a:prstGeom prst="diagStripe">
               <a:avLst>
-                <a:gd fmla="val 50000" name="adj"/>
+                <a:gd name="adj" fmla="val 50000"/>
               </a:avLst>
             </a:prstGeom>
             <a:solidFill>
@@ -7011,12 +6946,12 @@
             </a:ln>
           </p:spPr>
           <p:txBody>
-            <a:bodyPr anchorCtr="0" anchor="ctr" bIns="91425" lIns="91425" spcFirstLastPara="1" rIns="91425" wrap="square" tIns="91425">
+            <a:bodyPr spcFirstLastPara="1" wrap="square" lIns="91425" tIns="91425" rIns="91425" bIns="91425" anchor="ctr" anchorCtr="0">
               <a:noAutofit/>
             </a:bodyPr>
             <a:lstStyle/>
             <a:p>
-              <a:pPr indent="0" lvl="0" marL="0" rtl="0" algn="l">
+              <a:pPr marL="0" lvl="0" indent="0" algn="l" rtl="0">
                 <a:spcBef>
                   <a:spcPts val="0"/>
                 </a:spcBef>
@@ -7025,9 +6960,6 @@
                 </a:spcAft>
                 <a:buNone/>
               </a:pPr>
-              <a:r>
-                <a:t/>
-              </a:r>
               <a:endParaRPr/>
             </a:p>
           </p:txBody>
@@ -7045,7 +6977,7 @@
             </a:xfrm>
             <a:prstGeom prst="diagStripe">
               <a:avLst>
-                <a:gd fmla="val 50000" name="adj"/>
+                <a:gd name="adj" fmla="val 50000"/>
               </a:avLst>
             </a:prstGeom>
             <a:solidFill>
@@ -7058,12 +6990,12 @@
             </a:ln>
           </p:spPr>
           <p:txBody>
-            <a:bodyPr anchorCtr="0" anchor="ctr" bIns="91425" lIns="91425" spcFirstLastPara="1" rIns="91425" wrap="square" tIns="91425">
+            <a:bodyPr spcFirstLastPara="1" wrap="square" lIns="91425" tIns="91425" rIns="91425" bIns="91425" anchor="ctr" anchorCtr="0">
               <a:noAutofit/>
             </a:bodyPr>
             <a:lstStyle/>
             <a:p>
-              <a:pPr indent="0" lvl="0" marL="0" rtl="0" algn="l">
+              <a:pPr marL="0" lvl="0" indent="0" algn="l" rtl="0">
                 <a:spcBef>
                   <a:spcPts val="0"/>
                 </a:spcBef>
@@ -7072,9 +7004,6 @@
                 </a:spcAft>
                 <a:buNone/>
               </a:pPr>
-              <a:r>
-                <a:t/>
-              </a:r>
               <a:endParaRPr/>
             </a:p>
           </p:txBody>
@@ -7092,7 +7021,7 @@
             </a:xfrm>
             <a:prstGeom prst="diagStripe">
               <a:avLst>
-                <a:gd fmla="val 50000" name="adj"/>
+                <a:gd name="adj" fmla="val 50000"/>
               </a:avLst>
             </a:prstGeom>
             <a:solidFill>
@@ -7105,12 +7034,12 @@
             </a:ln>
           </p:spPr>
           <p:txBody>
-            <a:bodyPr anchorCtr="0" anchor="ctr" bIns="91425" lIns="91425" spcFirstLastPara="1" rIns="91425" wrap="square" tIns="91425">
+            <a:bodyPr spcFirstLastPara="1" wrap="square" lIns="91425" tIns="91425" rIns="91425" bIns="91425" anchor="ctr" anchorCtr="0">
               <a:noAutofit/>
             </a:bodyPr>
             <a:lstStyle/>
             <a:p>
-              <a:pPr indent="0" lvl="0" marL="0" rtl="0" algn="l">
+              <a:pPr marL="0" lvl="0" indent="0" algn="l" rtl="0">
                 <a:spcBef>
                   <a:spcPts val="0"/>
                 </a:spcBef>
@@ -7119,9 +7048,6 @@
                 </a:spcAft>
                 <a:buNone/>
               </a:pPr>
-              <a:r>
-                <a:t/>
-              </a:r>
               <a:endParaRPr/>
             </a:p>
           </p:txBody>
@@ -7130,7 +7056,9 @@
       <p:sp>
         <p:nvSpPr>
           <p:cNvPr id="89" name="Google Shape;89;p8"/>
-          <p:cNvSpPr txBox="1"/>
+          <p:cNvSpPr txBox="1">
+            <a:spLocks noGrp="1"/>
+          </p:cNvSpPr>
           <p:nvPr>
             <p:ph type="title"/>
           </p:nvPr>
@@ -7145,7 +7073,7 @@
           </a:prstGeom>
         </p:spPr>
         <p:txBody>
-          <a:bodyPr anchorCtr="0" anchor="ctr" bIns="91425" lIns="91425" spcFirstLastPara="1" rIns="91425" wrap="square" tIns="91425">
+          <a:bodyPr spcFirstLastPara="1" wrap="square" lIns="91425" tIns="91425" rIns="91425" bIns="91425" anchor="ctr" anchorCtr="0">
             <a:normAutofit/>
           </a:bodyPr>
           <a:lstStyle>
@@ -7249,15 +7177,19 @@
               <a:defRPr/>
             </a:lvl9pPr>
           </a:lstStyle>
-          <a:p/>
+          <a:p>
+            <a:endParaRPr/>
+          </a:p>
         </p:txBody>
       </p:sp>
       <p:sp>
         <p:nvSpPr>
           <p:cNvPr id="90" name="Google Shape;90;p8"/>
-          <p:cNvSpPr txBox="1"/>
+          <p:cNvSpPr txBox="1">
+            <a:spLocks noGrp="1"/>
+          </p:cNvSpPr>
           <p:nvPr>
-            <p:ph idx="12" type="sldNum"/>
+            <p:ph type="sldNum" idx="12"/>
           </p:nvPr>
         </p:nvSpPr>
         <p:spPr>
@@ -7270,7 +7202,7 @@
           </a:prstGeom>
         </p:spPr>
         <p:txBody>
-          <a:bodyPr anchorCtr="0" anchor="ctr" bIns="91425" lIns="91425" spcFirstLastPara="1" rIns="91425" wrap="square" tIns="91425">
+          <a:bodyPr spcFirstLastPara="1" wrap="square" lIns="91425" tIns="91425" rIns="91425" bIns="91425" anchor="ctr" anchorCtr="0">
             <a:normAutofit/>
           </a:bodyPr>
           <a:lstStyle>
@@ -7312,7 +7244,7 @@
             </a:lvl9pPr>
           </a:lstStyle>
           <a:p>
-            <a:pPr indent="0" lvl="0" marL="0" rtl="0" algn="r">
+            <a:pPr marL="0" lvl="0" indent="0" algn="r" rtl="0">
               <a:spcBef>
                 <a:spcPts val="0"/>
               </a:spcBef>
@@ -7338,11 +7270,11 @@
 </file>
 
 <file path=ppt/slideLayouts/slideLayout8.xml><?xml version="1.0" encoding="utf-8"?>
-<p:sldLayout xmlns:a="http://schemas.openxmlformats.org/drawingml/2006/main" xmlns:r="http://schemas.openxmlformats.org/officeDocument/2006/relationships" xmlns:mc="http://schemas.openxmlformats.org/markup-compatibility/2006" xmlns:mv="urn:schemas-microsoft-com:mac:vml" xmlns:p="http://schemas.openxmlformats.org/presentationml/2006/main" xmlns:c="http://schemas.openxmlformats.org/drawingml/2006/chart" xmlns:dgm="http://schemas.openxmlformats.org/drawingml/2006/diagram" xmlns:o="urn:schemas-microsoft-com:office:office" xmlns:v="urn:schemas-microsoft-com:vml" xmlns:pvml="urn:schemas-microsoft-com:office:powerpoint" xmlns:com="http://schemas.openxmlformats.org/drawingml/2006/compatibility" xmlns:p14="http://schemas.microsoft.com/office/powerpoint/2010/main" xmlns:p15="http://schemas.microsoft.com/office/powerpoint/2012/main" xmlns:ahyp="http://schemas.microsoft.com/office/drawing/2018/hyperlinkcolor" matchingName="Section title and description">
+<p:sldLayout xmlns:a="http://schemas.openxmlformats.org/drawingml/2006/main" xmlns:r="http://schemas.openxmlformats.org/officeDocument/2006/relationships" xmlns:p="http://schemas.openxmlformats.org/presentationml/2006/main" matchingName="Section title and description">
   <p:cSld name="SECTION_TITLE_AND_DESCRIPTION">
     <p:spTree>
       <p:nvGrpSpPr>
-        <p:cNvPr id="91" name="Shape 91"/>
+        <p:cNvPr id="1" name="Shape 91"/>
         <p:cNvGrpSpPr/>
         <p:nvPr/>
       </p:nvGrpSpPr>
@@ -7381,7 +7313,7 @@
             </a:xfrm>
             <a:prstGeom prst="diagStripe">
               <a:avLst>
-                <a:gd fmla="val 50000" name="adj"/>
+                <a:gd name="adj" fmla="val 50000"/>
               </a:avLst>
             </a:prstGeom>
             <a:solidFill>
@@ -7392,12 +7324,12 @@
             </a:ln>
           </p:spPr>
           <p:txBody>
-            <a:bodyPr anchorCtr="0" anchor="ctr" bIns="91425" lIns="91425" spcFirstLastPara="1" rIns="91425" wrap="square" tIns="91425">
+            <a:bodyPr spcFirstLastPara="1" wrap="square" lIns="91425" tIns="91425" rIns="91425" bIns="91425" anchor="ctr" anchorCtr="0">
               <a:noAutofit/>
             </a:bodyPr>
             <a:lstStyle/>
             <a:p>
-              <a:pPr indent="0" lvl="0" marL="0" rtl="0" algn="l">
+              <a:pPr marL="0" lvl="0" indent="0" algn="l" rtl="0">
                 <a:spcBef>
                   <a:spcPts val="0"/>
                 </a:spcBef>
@@ -7406,9 +7338,6 @@
                 </a:spcAft>
                 <a:buNone/>
               </a:pPr>
-              <a:r>
-                <a:t/>
-              </a:r>
               <a:endParaRPr/>
             </a:p>
           </p:txBody>
@@ -7426,7 +7355,7 @@
             </a:xfrm>
             <a:prstGeom prst="diagStripe">
               <a:avLst>
-                <a:gd fmla="val 50000" name="adj"/>
+                <a:gd name="adj" fmla="val 50000"/>
               </a:avLst>
             </a:prstGeom>
             <a:solidFill>
@@ -7437,12 +7366,12 @@
             </a:ln>
           </p:spPr>
           <p:txBody>
-            <a:bodyPr anchorCtr="0" anchor="ctr" bIns="91425" lIns="91425" spcFirstLastPara="1" rIns="91425" wrap="square" tIns="91425">
+            <a:bodyPr spcFirstLastPara="1" wrap="square" lIns="91425" tIns="91425" rIns="91425" bIns="91425" anchor="ctr" anchorCtr="0">
               <a:noAutofit/>
             </a:bodyPr>
             <a:lstStyle/>
             <a:p>
-              <a:pPr indent="0" lvl="0" marL="0" rtl="0" algn="l">
+              <a:pPr marL="0" lvl="0" indent="0" algn="l" rtl="0">
                 <a:spcBef>
                   <a:spcPts val="0"/>
                 </a:spcBef>
@@ -7451,9 +7380,6 @@
                 </a:spcAft>
                 <a:buNone/>
               </a:pPr>
-              <a:r>
-                <a:t/>
-              </a:r>
               <a:endParaRPr/>
             </a:p>
           </p:txBody>
@@ -7462,7 +7388,9 @@
       <p:sp>
         <p:nvSpPr>
           <p:cNvPr id="95" name="Google Shape;95;p9"/>
-          <p:cNvSpPr txBox="1"/>
+          <p:cNvSpPr txBox="1">
+            <a:spLocks noGrp="1"/>
+          </p:cNvSpPr>
           <p:nvPr>
             <p:ph type="title"/>
           </p:nvPr>
@@ -7477,7 +7405,7 @@
           </a:prstGeom>
         </p:spPr>
         <p:txBody>
-          <a:bodyPr anchorCtr="0" anchor="t" bIns="91425" lIns="91425" spcFirstLastPara="1" rIns="91425" wrap="square" tIns="91425">
+          <a:bodyPr spcFirstLastPara="1" wrap="square" lIns="91425" tIns="91425" rIns="91425" bIns="91425" anchor="t" anchorCtr="0">
             <a:normAutofit/>
           </a:bodyPr>
           <a:lstStyle>
@@ -7581,15 +7509,19 @@
               <a:defRPr sz="2400"/>
             </a:lvl9pPr>
           </a:lstStyle>
-          <a:p/>
+          <a:p>
+            <a:endParaRPr/>
+          </a:p>
         </p:txBody>
       </p:sp>
       <p:sp>
         <p:nvSpPr>
           <p:cNvPr id="96" name="Google Shape;96;p9"/>
-          <p:cNvSpPr txBox="1"/>
+          <p:cNvSpPr txBox="1">
+            <a:spLocks noGrp="1"/>
+          </p:cNvSpPr>
           <p:nvPr>
-            <p:ph idx="1" type="subTitle"/>
+            <p:ph type="subTitle" idx="1"/>
           </p:nvPr>
         </p:nvSpPr>
         <p:spPr>
@@ -7602,7 +7534,7 @@
           </a:prstGeom>
         </p:spPr>
         <p:txBody>
-          <a:bodyPr anchorCtr="0" anchor="t" bIns="91425" lIns="91425" spcFirstLastPara="1" rIns="91425" wrap="square" tIns="91425">
+          <a:bodyPr spcFirstLastPara="1" wrap="square" lIns="91425" tIns="91425" rIns="91425" bIns="91425" anchor="t" anchorCtr="0">
             <a:normAutofit/>
           </a:bodyPr>
           <a:lstStyle>
@@ -7733,15 +7665,19 @@
               <a:defRPr sz="1300"/>
             </a:lvl9pPr>
           </a:lstStyle>
-          <a:p/>
+          <a:p>
+            <a:endParaRPr/>
+          </a:p>
         </p:txBody>
       </p:sp>
       <p:sp>
         <p:nvSpPr>
           <p:cNvPr id="97" name="Google Shape;97;p9"/>
-          <p:cNvSpPr txBox="1"/>
+          <p:cNvSpPr txBox="1">
+            <a:spLocks noGrp="1"/>
+          </p:cNvSpPr>
           <p:nvPr>
-            <p:ph idx="2" type="body"/>
+            <p:ph type="body" idx="2"/>
           </p:nvPr>
         </p:nvSpPr>
         <p:spPr>
@@ -7754,11 +7690,11 @@
           </a:prstGeom>
         </p:spPr>
         <p:txBody>
-          <a:bodyPr anchorCtr="0" anchor="t" bIns="91425" lIns="91425" spcFirstLastPara="1" rIns="91425" wrap="square" tIns="91425">
+          <a:bodyPr spcFirstLastPara="1" wrap="square" lIns="91425" tIns="91425" rIns="91425" bIns="91425" anchor="t" anchorCtr="0">
             <a:normAutofit/>
           </a:bodyPr>
           <a:lstStyle>
-            <a:lvl1pPr indent="-311150" lvl="0" marL="457200">
+            <a:lvl1pPr marL="457200" lvl="0" indent="-311150">
               <a:spcBef>
                 <a:spcPts val="0"/>
               </a:spcBef>
@@ -7769,7 +7705,7 @@
               <a:buChar char="●"/>
               <a:defRPr/>
             </a:lvl1pPr>
-            <a:lvl2pPr indent="-298450" lvl="1" marL="914400">
+            <a:lvl2pPr marL="914400" lvl="1" indent="-298450">
               <a:spcBef>
                 <a:spcPts val="0"/>
               </a:spcBef>
@@ -7780,7 +7716,7 @@
               <a:buChar char="○"/>
               <a:defRPr/>
             </a:lvl2pPr>
-            <a:lvl3pPr indent="-298450" lvl="2" marL="1371600">
+            <a:lvl3pPr marL="1371600" lvl="2" indent="-298450">
               <a:spcBef>
                 <a:spcPts val="0"/>
               </a:spcBef>
@@ -7791,7 +7727,7 @@
               <a:buChar char="■"/>
               <a:defRPr/>
             </a:lvl3pPr>
-            <a:lvl4pPr indent="-298450" lvl="3" marL="1828800">
+            <a:lvl4pPr marL="1828800" lvl="3" indent="-298450">
               <a:spcBef>
                 <a:spcPts val="0"/>
               </a:spcBef>
@@ -7802,7 +7738,7 @@
               <a:buChar char="●"/>
               <a:defRPr/>
             </a:lvl4pPr>
-            <a:lvl5pPr indent="-298450" lvl="4" marL="2286000">
+            <a:lvl5pPr marL="2286000" lvl="4" indent="-298450">
               <a:spcBef>
                 <a:spcPts val="0"/>
               </a:spcBef>
@@ -7813,7 +7749,7 @@
               <a:buChar char="○"/>
               <a:defRPr/>
             </a:lvl5pPr>
-            <a:lvl6pPr indent="-298450" lvl="5" marL="2743200">
+            <a:lvl6pPr marL="2743200" lvl="5" indent="-298450">
               <a:spcBef>
                 <a:spcPts val="0"/>
               </a:spcBef>
@@ -7824,7 +7760,7 @@
               <a:buChar char="■"/>
               <a:defRPr/>
             </a:lvl6pPr>
-            <a:lvl7pPr indent="-298450" lvl="6" marL="3200400">
+            <a:lvl7pPr marL="3200400" lvl="6" indent="-298450">
               <a:spcBef>
                 <a:spcPts val="0"/>
               </a:spcBef>
@@ -7835,7 +7771,7 @@
               <a:buChar char="●"/>
               <a:defRPr/>
             </a:lvl7pPr>
-            <a:lvl8pPr indent="-298450" lvl="7" marL="3657600">
+            <a:lvl8pPr marL="3657600" lvl="7" indent="-298450">
               <a:spcBef>
                 <a:spcPts val="0"/>
               </a:spcBef>
@@ -7846,7 +7782,7 @@
               <a:buChar char="○"/>
               <a:defRPr/>
             </a:lvl8pPr>
-            <a:lvl9pPr indent="-298450" lvl="8" marL="4114800">
+            <a:lvl9pPr marL="4114800" lvl="8" indent="-298450">
               <a:spcBef>
                 <a:spcPts val="0"/>
               </a:spcBef>
@@ -7858,15 +7794,19 @@
               <a:defRPr/>
             </a:lvl9pPr>
           </a:lstStyle>
-          <a:p/>
+          <a:p>
+            <a:endParaRPr/>
+          </a:p>
         </p:txBody>
       </p:sp>
       <p:sp>
         <p:nvSpPr>
           <p:cNvPr id="98" name="Google Shape;98;p9"/>
-          <p:cNvSpPr txBox="1"/>
+          <p:cNvSpPr txBox="1">
+            <a:spLocks noGrp="1"/>
+          </p:cNvSpPr>
           <p:nvPr>
-            <p:ph idx="12" type="sldNum"/>
+            <p:ph type="sldNum" idx="12"/>
           </p:nvPr>
         </p:nvSpPr>
         <p:spPr>
@@ -7879,7 +7819,7 @@
           </a:prstGeom>
         </p:spPr>
         <p:txBody>
-          <a:bodyPr anchorCtr="0" anchor="ctr" bIns="91425" lIns="91425" spcFirstLastPara="1" rIns="91425" wrap="square" tIns="91425">
+          <a:bodyPr spcFirstLastPara="1" wrap="square" lIns="91425" tIns="91425" rIns="91425" bIns="91425" anchor="ctr" anchorCtr="0">
             <a:normAutofit/>
           </a:bodyPr>
           <a:lstStyle>
@@ -7921,7 +7861,7 @@
             </a:lvl9pPr>
           </a:lstStyle>
           <a:p>
-            <a:pPr indent="0" lvl="0" marL="0" rtl="0" algn="r">
+            <a:pPr marL="0" lvl="0" indent="0" algn="r" rtl="0">
               <a:spcBef>
                 <a:spcPts val="0"/>
               </a:spcBef>
@@ -7947,11 +7887,11 @@
 </file>
 
 <file path=ppt/slideLayouts/slideLayout9.xml><?xml version="1.0" encoding="utf-8"?>
-<p:sldLayout xmlns:a="http://schemas.openxmlformats.org/drawingml/2006/main" xmlns:r="http://schemas.openxmlformats.org/officeDocument/2006/relationships" xmlns:mc="http://schemas.openxmlformats.org/markup-compatibility/2006" xmlns:mv="urn:schemas-microsoft-com:mac:vml" xmlns:p="http://schemas.openxmlformats.org/presentationml/2006/main" xmlns:c="http://schemas.openxmlformats.org/drawingml/2006/chart" xmlns:dgm="http://schemas.openxmlformats.org/drawingml/2006/diagram" xmlns:o="urn:schemas-microsoft-com:office:office" xmlns:v="urn:schemas-microsoft-com:vml" xmlns:pvml="urn:schemas-microsoft-com:office:powerpoint" xmlns:com="http://schemas.openxmlformats.org/drawingml/2006/compatibility" xmlns:p14="http://schemas.microsoft.com/office/powerpoint/2010/main" xmlns:p15="http://schemas.microsoft.com/office/powerpoint/2012/main" xmlns:ahyp="http://schemas.microsoft.com/office/drawing/2018/hyperlinkcolor" matchingName="Caption">
+<p:sldLayout xmlns:a="http://schemas.openxmlformats.org/drawingml/2006/main" xmlns:r="http://schemas.openxmlformats.org/officeDocument/2006/relationships" xmlns:p="http://schemas.openxmlformats.org/presentationml/2006/main" matchingName="Caption">
   <p:cSld name="CAPTION_ONLY">
     <p:spTree>
       <p:nvGrpSpPr>
-        <p:cNvPr id="99" name="Shape 99"/>
+        <p:cNvPr id="1" name="Shape 99"/>
         <p:cNvGrpSpPr/>
         <p:nvPr/>
       </p:nvGrpSpPr>
@@ -7990,7 +7930,7 @@
             </a:xfrm>
             <a:prstGeom prst="diagStripe">
               <a:avLst>
-                <a:gd fmla="val 50000" name="adj"/>
+                <a:gd name="adj" fmla="val 50000"/>
               </a:avLst>
             </a:prstGeom>
             <a:solidFill>
@@ -8003,12 +7943,12 @@
             </a:ln>
           </p:spPr>
           <p:txBody>
-            <a:bodyPr anchorCtr="0" anchor="ctr" bIns="91425" lIns="91425" spcFirstLastPara="1" rIns="91425" wrap="square" tIns="91425">
+            <a:bodyPr spcFirstLastPara="1" wrap="square" lIns="91425" tIns="91425" rIns="91425" bIns="91425" anchor="ctr" anchorCtr="0">
               <a:noAutofit/>
             </a:bodyPr>
             <a:lstStyle/>
             <a:p>
-              <a:pPr indent="0" lvl="0" marL="0" rtl="0" algn="l">
+              <a:pPr marL="0" lvl="0" indent="0" algn="l" rtl="0">
                 <a:spcBef>
                   <a:spcPts val="0"/>
                 </a:spcBef>
@@ -8017,9 +7957,6 @@
                 </a:spcAft>
                 <a:buNone/>
               </a:pPr>
-              <a:r>
-                <a:t/>
-              </a:r>
               <a:endParaRPr/>
             </a:p>
           </p:txBody>
@@ -8037,7 +7974,7 @@
             </a:xfrm>
             <a:prstGeom prst="diagStripe">
               <a:avLst>
-                <a:gd fmla="val 50000" name="adj"/>
+                <a:gd name="adj" fmla="val 50000"/>
               </a:avLst>
             </a:prstGeom>
             <a:solidFill>
@@ -8050,12 +7987,12 @@
             </a:ln>
           </p:spPr>
           <p:txBody>
-            <a:bodyPr anchorCtr="0" anchor="ctr" bIns="91425" lIns="91425" spcFirstLastPara="1" rIns="91425" wrap="square" tIns="91425">
+            <a:bodyPr spcFirstLastPara="1" wrap="square" lIns="91425" tIns="91425" rIns="91425" bIns="91425" anchor="ctr" anchorCtr="0">
               <a:noAutofit/>
             </a:bodyPr>
             <a:lstStyle/>
             <a:p>
-              <a:pPr indent="0" lvl="0" marL="0" rtl="0" algn="l">
+              <a:pPr marL="0" lvl="0" indent="0" algn="l" rtl="0">
                 <a:spcBef>
                   <a:spcPts val="0"/>
                 </a:spcBef>
@@ -8064,9 +8001,6 @@
                 </a:spcAft>
                 <a:buNone/>
               </a:pPr>
-              <a:r>
-                <a:t/>
-              </a:r>
               <a:endParaRPr/>
             </a:p>
           </p:txBody>
@@ -8075,9 +8009,11 @@
       <p:sp>
         <p:nvSpPr>
           <p:cNvPr id="103" name="Google Shape;103;p10"/>
-          <p:cNvSpPr txBox="1"/>
+          <p:cNvSpPr txBox="1">
+            <a:spLocks noGrp="1"/>
+          </p:cNvSpPr>
           <p:nvPr>
-            <p:ph idx="1" type="body"/>
+            <p:ph type="body" idx="1"/>
           </p:nvPr>
         </p:nvSpPr>
         <p:spPr>
@@ -8090,11 +8026,11 @@
           </a:prstGeom>
         </p:spPr>
         <p:txBody>
-          <a:bodyPr anchorCtr="0" anchor="ctr" bIns="91425" lIns="91425" spcFirstLastPara="1" rIns="91425" wrap="square" tIns="91425">
+          <a:bodyPr spcFirstLastPara="1" wrap="square" lIns="91425" tIns="91425" rIns="91425" bIns="91425" anchor="ctr" anchorCtr="0">
             <a:normAutofit/>
           </a:bodyPr>
           <a:lstStyle>
-            <a:lvl1pPr indent="-228600" lvl="0" marL="457200">
+            <a:lvl1pPr marL="457200" lvl="0" indent="-228600">
               <a:lnSpc>
                 <a:spcPct val="100000"/>
               </a:lnSpc>
@@ -8109,15 +8045,19 @@
               <a:defRPr/>
             </a:lvl1pPr>
           </a:lstStyle>
-          <a:p/>
+          <a:p>
+            <a:endParaRPr/>
+          </a:p>
         </p:txBody>
       </p:sp>
       <p:sp>
         <p:nvSpPr>
           <p:cNvPr id="104" name="Google Shape;104;p10"/>
-          <p:cNvSpPr txBox="1"/>
+          <p:cNvSpPr txBox="1">
+            <a:spLocks noGrp="1"/>
+          </p:cNvSpPr>
           <p:nvPr>
-            <p:ph idx="12" type="sldNum"/>
+            <p:ph type="sldNum" idx="12"/>
           </p:nvPr>
         </p:nvSpPr>
         <p:spPr>
@@ -8130,7 +8070,7 @@
           </a:prstGeom>
         </p:spPr>
         <p:txBody>
-          <a:bodyPr anchorCtr="0" anchor="ctr" bIns="91425" lIns="91425" spcFirstLastPara="1" rIns="91425" wrap="square" tIns="91425">
+          <a:bodyPr spcFirstLastPara="1" wrap="square" lIns="91425" tIns="91425" rIns="91425" bIns="91425" anchor="ctr" anchorCtr="0">
             <a:normAutofit/>
           </a:bodyPr>
           <a:lstStyle>
@@ -8172,7 +8112,7 @@
             </a:lvl9pPr>
           </a:lstStyle>
           <a:p>
-            <a:pPr indent="0" lvl="0" marL="0" rtl="0" algn="r">
+            <a:pPr marL="0" lvl="0" indent="0" algn="r" rtl="0">
               <a:spcBef>
                 <a:spcPts val="0"/>
               </a:spcBef>
@@ -8198,18 +8138,19 @@
 </file>
 
 <file path=ppt/slideMasters/slideMaster1.xml><?xml version="1.0" encoding="utf-8"?>
-<p:sldMaster xmlns:a="http://schemas.openxmlformats.org/drawingml/2006/main" xmlns:r="http://schemas.openxmlformats.org/officeDocument/2006/relationships" xmlns:mc="http://schemas.openxmlformats.org/markup-compatibility/2006" xmlns:mv="urn:schemas-microsoft-com:mac:vml" xmlns:p="http://schemas.openxmlformats.org/presentationml/2006/main" xmlns:c="http://schemas.openxmlformats.org/drawingml/2006/chart" xmlns:dgm="http://schemas.openxmlformats.org/drawingml/2006/diagram" xmlns:o="urn:schemas-microsoft-com:office:office" xmlns:v="urn:schemas-microsoft-com:vml" xmlns:pvml="urn:schemas-microsoft-com:office:powerpoint" xmlns:com="http://schemas.openxmlformats.org/drawingml/2006/compatibility" xmlns:p14="http://schemas.microsoft.com/office/powerpoint/2010/main" xmlns:p15="http://schemas.microsoft.com/office/powerpoint/2012/main" xmlns:ahyp="http://schemas.microsoft.com/office/drawing/2018/hyperlinkcolor">
+<p:sldMaster xmlns:a="http://schemas.openxmlformats.org/drawingml/2006/main" xmlns:r="http://schemas.openxmlformats.org/officeDocument/2006/relationships" xmlns:p="http://schemas.openxmlformats.org/presentationml/2006/main">
   <p:cSld name="focus">
     <p:bg>
       <p:bgPr>
         <a:solidFill>
           <a:schemeClr val="dk1"/>
         </a:solidFill>
+        <a:effectLst/>
       </p:bgPr>
     </p:bg>
     <p:spTree>
       <p:nvGrpSpPr>
-        <p:cNvPr id="5" name="Shape 5"/>
+        <p:cNvPr id="1" name="Shape 5"/>
         <p:cNvGrpSpPr/>
         <p:nvPr/>
       </p:nvGrpSpPr>
@@ -8224,7 +8165,9 @@
       <p:sp>
         <p:nvSpPr>
           <p:cNvPr id="6" name="Google Shape;6;p1"/>
-          <p:cNvSpPr txBox="1"/>
+          <p:cNvSpPr txBox="1">
+            <a:spLocks noGrp="1"/>
+          </p:cNvSpPr>
           <p:nvPr>
             <p:ph type="title"/>
           </p:nvPr>
@@ -8243,7 +8186,7 @@
           </a:ln>
         </p:spPr>
         <p:txBody>
-          <a:bodyPr anchorCtr="0" anchor="t" bIns="91425" lIns="91425" spcFirstLastPara="1" rIns="91425" wrap="square" tIns="91425">
+          <a:bodyPr spcFirstLastPara="1" wrap="square" lIns="91425" tIns="91425" rIns="91425" bIns="91425" anchor="t" anchorCtr="0">
             <a:normAutofit/>
           </a:bodyPr>
           <a:lstStyle>
@@ -8455,15 +8398,19 @@
               </a:defRPr>
             </a:lvl9pPr>
           </a:lstStyle>
-          <a:p/>
+          <a:p>
+            <a:endParaRPr/>
+          </a:p>
         </p:txBody>
       </p:sp>
       <p:sp>
         <p:nvSpPr>
           <p:cNvPr id="7" name="Google Shape;7;p1"/>
-          <p:cNvSpPr txBox="1"/>
+          <p:cNvSpPr txBox="1">
+            <a:spLocks noGrp="1"/>
+          </p:cNvSpPr>
           <p:nvPr>
-            <p:ph idx="1" type="body"/>
+            <p:ph type="body" idx="1"/>
           </p:nvPr>
         </p:nvSpPr>
         <p:spPr>
@@ -8480,11 +8427,11 @@
           </a:ln>
         </p:spPr>
         <p:txBody>
-          <a:bodyPr anchorCtr="0" anchor="t" bIns="91425" lIns="91425" spcFirstLastPara="1" rIns="91425" wrap="square" tIns="91425">
+          <a:bodyPr spcFirstLastPara="1" wrap="square" lIns="91425" tIns="91425" rIns="91425" bIns="91425" anchor="t" anchorCtr="0">
             <a:normAutofit/>
           </a:bodyPr>
           <a:lstStyle>
-            <a:lvl1pPr indent="-311150" lvl="0" marL="457200">
+            <a:lvl1pPr marL="457200" lvl="0" indent="-311150">
               <a:lnSpc>
                 <a:spcPct val="115000"/>
               </a:lnSpc>
@@ -8510,7 +8457,7 @@
                 <a:sym typeface="Lato"/>
               </a:defRPr>
             </a:lvl1pPr>
-            <a:lvl2pPr indent="-298450" lvl="1" marL="914400">
+            <a:lvl2pPr marL="914400" lvl="1" indent="-298450">
               <a:lnSpc>
                 <a:spcPct val="115000"/>
               </a:lnSpc>
@@ -8536,7 +8483,7 @@
                 <a:sym typeface="Lato"/>
               </a:defRPr>
             </a:lvl2pPr>
-            <a:lvl3pPr indent="-298450" lvl="2" marL="1371600">
+            <a:lvl3pPr marL="1371600" lvl="2" indent="-298450">
               <a:lnSpc>
                 <a:spcPct val="115000"/>
               </a:lnSpc>
@@ -8562,7 +8509,7 @@
                 <a:sym typeface="Lato"/>
               </a:defRPr>
             </a:lvl3pPr>
-            <a:lvl4pPr indent="-298450" lvl="3" marL="1828800">
+            <a:lvl4pPr marL="1828800" lvl="3" indent="-298450">
               <a:lnSpc>
                 <a:spcPct val="115000"/>
               </a:lnSpc>
@@ -8588,7 +8535,7 @@
                 <a:sym typeface="Lato"/>
               </a:defRPr>
             </a:lvl4pPr>
-            <a:lvl5pPr indent="-298450" lvl="4" marL="2286000">
+            <a:lvl5pPr marL="2286000" lvl="4" indent="-298450">
               <a:lnSpc>
                 <a:spcPct val="115000"/>
               </a:lnSpc>
@@ -8614,7 +8561,7 @@
                 <a:sym typeface="Lato"/>
               </a:defRPr>
             </a:lvl5pPr>
-            <a:lvl6pPr indent="-298450" lvl="5" marL="2743200">
+            <a:lvl6pPr marL="2743200" lvl="5" indent="-298450">
               <a:lnSpc>
                 <a:spcPct val="115000"/>
               </a:lnSpc>
@@ -8640,7 +8587,7 @@
                 <a:sym typeface="Lato"/>
               </a:defRPr>
             </a:lvl6pPr>
-            <a:lvl7pPr indent="-298450" lvl="6" marL="3200400">
+            <a:lvl7pPr marL="3200400" lvl="6" indent="-298450">
               <a:lnSpc>
                 <a:spcPct val="115000"/>
               </a:lnSpc>
@@ -8666,7 +8613,7 @@
                 <a:sym typeface="Lato"/>
               </a:defRPr>
             </a:lvl7pPr>
-            <a:lvl8pPr indent="-298450" lvl="7" marL="3657600">
+            <a:lvl8pPr marL="3657600" lvl="7" indent="-298450">
               <a:lnSpc>
                 <a:spcPct val="115000"/>
               </a:lnSpc>
@@ -8692,7 +8639,7 @@
                 <a:sym typeface="Lato"/>
               </a:defRPr>
             </a:lvl8pPr>
-            <a:lvl9pPr indent="-298450" lvl="8" marL="4114800">
+            <a:lvl9pPr marL="4114800" lvl="8" indent="-298450">
               <a:lnSpc>
                 <a:spcPct val="115000"/>
               </a:lnSpc>
@@ -8719,15 +8666,19 @@
               </a:defRPr>
             </a:lvl9pPr>
           </a:lstStyle>
-          <a:p/>
+          <a:p>
+            <a:endParaRPr/>
+          </a:p>
         </p:txBody>
       </p:sp>
       <p:sp>
         <p:nvSpPr>
           <p:cNvPr id="8" name="Google Shape;8;p1"/>
-          <p:cNvSpPr txBox="1"/>
+          <p:cNvSpPr txBox="1">
+            <a:spLocks noGrp="1"/>
+          </p:cNvSpPr>
           <p:nvPr>
-            <p:ph idx="12" type="sldNum"/>
+            <p:ph type="sldNum" idx="12"/>
           </p:nvPr>
         </p:nvSpPr>
         <p:spPr>
@@ -8744,7 +8695,7 @@
           </a:ln>
         </p:spPr>
         <p:txBody>
-          <a:bodyPr anchorCtr="0" anchor="ctr" bIns="91425" lIns="91425" spcFirstLastPara="1" rIns="91425" wrap="square" tIns="91425">
+          <a:bodyPr spcFirstLastPara="1" wrap="square" lIns="91425" tIns="91425" rIns="91425" bIns="91425" anchor="ctr" anchorCtr="0">
             <a:normAutofit/>
           </a:bodyPr>
           <a:lstStyle>
@@ -8858,7 +8809,7 @@
             </a:lvl9pPr>
           </a:lstStyle>
           <a:p>
-            <a:pPr indent="0" lvl="0" marL="0" rtl="0" algn="r">
+            <a:pPr marL="0" lvl="0" indent="0" algn="r" rtl="0">
               <a:spcBef>
                 <a:spcPts val="0"/>
               </a:spcBef>
@@ -8877,7 +8828,7 @@
       </p:sp>
     </p:spTree>
   </p:cSld>
-  <p:clrMap accent1="accent1" accent2="accent2" accent3="accent3" accent4="accent4" accent5="accent5" accent6="accent6" bg1="lt1" bg2="dk2" tx1="dk1" tx2="lt2" folHlink="folHlink" hlink="hlink"/>
+  <p:clrMap bg1="lt1" tx1="dk1" bg2="dk2" tx2="lt2" accent1="accent1" accent2="accent2" accent3="accent3" accent4="accent4" accent5="accent5" accent6="accent6" hlink="hlink" folHlink="folHlink"/>
   <p:sldLayoutIdLst>
     <p:sldLayoutId id="2147483648" r:id="rId1"/>
     <p:sldLayoutId id="2147483649" r:id="rId2"/>
@@ -8891,10 +8842,10 @@
     <p:sldLayoutId id="2147483657" r:id="rId10"/>
     <p:sldLayoutId id="2147483658" r:id="rId11"/>
   </p:sldLayoutIdLst>
-  <p:hf dt="0" ftr="0" hdr="0" sldNum="0"/>
+  <p:hf sldNum="0" hdr="0" ftr="0" dt="0"/>
   <p:txStyles>
     <p:titleStyle>
-      <a:defPPr lvl="0" marR="0" rtl="0" algn="l">
+      <a:defPPr marR="0" lvl="0" algn="l" rtl="0">
         <a:lnSpc>
           <a:spcPct val="100000"/>
         </a:lnSpc>
@@ -8905,7 +8856,7 @@
           <a:spcPts val="0"/>
         </a:spcAft>
       </a:defPPr>
-      <a:lvl1pPr lvl="0" marR="0" rtl="0" algn="l">
+      <a:lvl1pPr marR="0" lvl="0" algn="l" rtl="0">
         <a:lnSpc>
           <a:spcPct val="100000"/>
         </a:lnSpc>
@@ -8919,7 +8870,7 @@
           <a:srgbClr val="000000"/>
         </a:buClr>
         <a:buFont typeface="Arial"/>
-        <a:defRPr b="0" i="0" sz="1400" u="none" cap="none" strike="noStrike">
+        <a:defRPr sz="1400" b="0" i="0" u="none" strike="noStrike" cap="none">
           <a:solidFill>
             <a:srgbClr val="000000"/>
           </a:solidFill>
@@ -8929,7 +8880,7 @@
           <a:sym typeface="Arial"/>
         </a:defRPr>
       </a:lvl1pPr>
-      <a:lvl2pPr lvl="1" marR="0" rtl="0" algn="l">
+      <a:lvl2pPr marR="0" lvl="1" algn="l" rtl="0">
         <a:lnSpc>
           <a:spcPct val="100000"/>
         </a:lnSpc>
@@ -8943,7 +8894,7 @@
           <a:srgbClr val="000000"/>
         </a:buClr>
         <a:buFont typeface="Arial"/>
-        <a:defRPr b="0" i="0" sz="1400" u="none" cap="none" strike="noStrike">
+        <a:defRPr sz="1400" b="0" i="0" u="none" strike="noStrike" cap="none">
           <a:solidFill>
             <a:srgbClr val="000000"/>
           </a:solidFill>
@@ -8953,7 +8904,7 @@
           <a:sym typeface="Arial"/>
         </a:defRPr>
       </a:lvl2pPr>
-      <a:lvl3pPr lvl="2" marR="0" rtl="0" algn="l">
+      <a:lvl3pPr marR="0" lvl="2" algn="l" rtl="0">
         <a:lnSpc>
           <a:spcPct val="100000"/>
         </a:lnSpc>
@@ -8967,7 +8918,7 @@
           <a:srgbClr val="000000"/>
         </a:buClr>
         <a:buFont typeface="Arial"/>
-        <a:defRPr b="0" i="0" sz="1400" u="none" cap="none" strike="noStrike">
+        <a:defRPr sz="1400" b="0" i="0" u="none" strike="noStrike" cap="none">
           <a:solidFill>
             <a:srgbClr val="000000"/>
           </a:solidFill>
@@ -8977,7 +8928,7 @@
           <a:sym typeface="Arial"/>
         </a:defRPr>
       </a:lvl3pPr>
-      <a:lvl4pPr lvl="3" marR="0" rtl="0" algn="l">
+      <a:lvl4pPr marR="0" lvl="3" algn="l" rtl="0">
         <a:lnSpc>
           <a:spcPct val="100000"/>
         </a:lnSpc>
@@ -8991,7 +8942,7 @@
           <a:srgbClr val="000000"/>
         </a:buClr>
         <a:buFont typeface="Arial"/>
-        <a:defRPr b="0" i="0" sz="1400" u="none" cap="none" strike="noStrike">
+        <a:defRPr sz="1400" b="0" i="0" u="none" strike="noStrike" cap="none">
           <a:solidFill>
             <a:srgbClr val="000000"/>
           </a:solidFill>
@@ -9001,7 +8952,7 @@
           <a:sym typeface="Arial"/>
         </a:defRPr>
       </a:lvl4pPr>
-      <a:lvl5pPr lvl="4" marR="0" rtl="0" algn="l">
+      <a:lvl5pPr marR="0" lvl="4" algn="l" rtl="0">
         <a:lnSpc>
           <a:spcPct val="100000"/>
         </a:lnSpc>
@@ -9015,7 +8966,7 @@
           <a:srgbClr val="000000"/>
         </a:buClr>
         <a:buFont typeface="Arial"/>
-        <a:defRPr b="0" i="0" sz="1400" u="none" cap="none" strike="noStrike">
+        <a:defRPr sz="1400" b="0" i="0" u="none" strike="noStrike" cap="none">
           <a:solidFill>
             <a:srgbClr val="000000"/>
           </a:solidFill>
@@ -9025,7 +8976,7 @@
           <a:sym typeface="Arial"/>
         </a:defRPr>
       </a:lvl5pPr>
-      <a:lvl6pPr lvl="5" marR="0" rtl="0" algn="l">
+      <a:lvl6pPr marR="0" lvl="5" algn="l" rtl="0">
         <a:lnSpc>
           <a:spcPct val="100000"/>
         </a:lnSpc>
@@ -9039,7 +8990,7 @@
           <a:srgbClr val="000000"/>
         </a:buClr>
         <a:buFont typeface="Arial"/>
-        <a:defRPr b="0" i="0" sz="1400" u="none" cap="none" strike="noStrike">
+        <a:defRPr sz="1400" b="0" i="0" u="none" strike="noStrike" cap="none">
           <a:solidFill>
             <a:srgbClr val="000000"/>
           </a:solidFill>
@@ -9049,7 +9000,7 @@
           <a:sym typeface="Arial"/>
         </a:defRPr>
       </a:lvl6pPr>
-      <a:lvl7pPr lvl="6" marR="0" rtl="0" algn="l">
+      <a:lvl7pPr marR="0" lvl="6" algn="l" rtl="0">
         <a:lnSpc>
           <a:spcPct val="100000"/>
         </a:lnSpc>
@@ -9063,7 +9014,7 @@
           <a:srgbClr val="000000"/>
         </a:buClr>
         <a:buFont typeface="Arial"/>
-        <a:defRPr b="0" i="0" sz="1400" u="none" cap="none" strike="noStrike">
+        <a:defRPr sz="1400" b="0" i="0" u="none" strike="noStrike" cap="none">
           <a:solidFill>
             <a:srgbClr val="000000"/>
           </a:solidFill>
@@ -9073,7 +9024,7 @@
           <a:sym typeface="Arial"/>
         </a:defRPr>
       </a:lvl7pPr>
-      <a:lvl8pPr lvl="7" marR="0" rtl="0" algn="l">
+      <a:lvl8pPr marR="0" lvl="7" algn="l" rtl="0">
         <a:lnSpc>
           <a:spcPct val="100000"/>
         </a:lnSpc>
@@ -9087,7 +9038,7 @@
           <a:srgbClr val="000000"/>
         </a:buClr>
         <a:buFont typeface="Arial"/>
-        <a:defRPr b="0" i="0" sz="1400" u="none" cap="none" strike="noStrike">
+        <a:defRPr sz="1400" b="0" i="0" u="none" strike="noStrike" cap="none">
           <a:solidFill>
             <a:srgbClr val="000000"/>
           </a:solidFill>
@@ -9097,7 +9048,7 @@
           <a:sym typeface="Arial"/>
         </a:defRPr>
       </a:lvl8pPr>
-      <a:lvl9pPr lvl="8" marR="0" rtl="0" algn="l">
+      <a:lvl9pPr marR="0" lvl="8" algn="l" rtl="0">
         <a:lnSpc>
           <a:spcPct val="100000"/>
         </a:lnSpc>
@@ -9111,7 +9062,7 @@
           <a:srgbClr val="000000"/>
         </a:buClr>
         <a:buFont typeface="Arial"/>
-        <a:defRPr b="0" i="0" sz="1400" u="none" cap="none" strike="noStrike">
+        <a:defRPr sz="1400" b="0" i="0" u="none" strike="noStrike" cap="none">
           <a:solidFill>
             <a:srgbClr val="000000"/>
           </a:solidFill>
@@ -9123,7 +9074,7 @@
       </a:lvl9pPr>
     </p:titleStyle>
     <p:bodyStyle>
-      <a:defPPr lvl="0" marR="0" rtl="0" algn="l">
+      <a:defPPr marR="0" lvl="0" algn="l" rtl="0">
         <a:lnSpc>
           <a:spcPct val="100000"/>
         </a:lnSpc>
@@ -9134,7 +9085,7 @@
           <a:spcPts val="0"/>
         </a:spcAft>
       </a:defPPr>
-      <a:lvl1pPr lvl="0" marR="0" rtl="0" algn="l">
+      <a:lvl1pPr marR="0" lvl="0" algn="l" rtl="0">
         <a:lnSpc>
           <a:spcPct val="100000"/>
         </a:lnSpc>
@@ -9148,7 +9099,7 @@
           <a:srgbClr val="000000"/>
         </a:buClr>
         <a:buFont typeface="Arial"/>
-        <a:defRPr b="0" i="0" sz="1400" u="none" cap="none" strike="noStrike">
+        <a:defRPr sz="1400" b="0" i="0" u="none" strike="noStrike" cap="none">
           <a:solidFill>
             <a:srgbClr val="000000"/>
           </a:solidFill>
@@ -9158,7 +9109,7 @@
           <a:sym typeface="Arial"/>
         </a:defRPr>
       </a:lvl1pPr>
-      <a:lvl2pPr lvl="1" marR="0" rtl="0" algn="l">
+      <a:lvl2pPr marR="0" lvl="1" algn="l" rtl="0">
         <a:lnSpc>
           <a:spcPct val="100000"/>
         </a:lnSpc>
@@ -9172,7 +9123,7 @@
           <a:srgbClr val="000000"/>
         </a:buClr>
         <a:buFont typeface="Arial"/>
-        <a:defRPr b="0" i="0" sz="1400" u="none" cap="none" strike="noStrike">
+        <a:defRPr sz="1400" b="0" i="0" u="none" strike="noStrike" cap="none">
           <a:solidFill>
             <a:srgbClr val="000000"/>
           </a:solidFill>
@@ -9182,7 +9133,7 @@
           <a:sym typeface="Arial"/>
         </a:defRPr>
       </a:lvl2pPr>
-      <a:lvl3pPr lvl="2" marR="0" rtl="0" algn="l">
+      <a:lvl3pPr marR="0" lvl="2" algn="l" rtl="0">
         <a:lnSpc>
           <a:spcPct val="100000"/>
         </a:lnSpc>
@@ -9196,7 +9147,7 @@
           <a:srgbClr val="000000"/>
         </a:buClr>
         <a:buFont typeface="Arial"/>
-        <a:defRPr b="0" i="0" sz="1400" u="none" cap="none" strike="noStrike">
+        <a:defRPr sz="1400" b="0" i="0" u="none" strike="noStrike" cap="none">
           <a:solidFill>
             <a:srgbClr val="000000"/>
           </a:solidFill>
@@ -9206,7 +9157,7 @@
           <a:sym typeface="Arial"/>
         </a:defRPr>
       </a:lvl3pPr>
-      <a:lvl4pPr lvl="3" marR="0" rtl="0" algn="l">
+      <a:lvl4pPr marR="0" lvl="3" algn="l" rtl="0">
         <a:lnSpc>
           <a:spcPct val="100000"/>
         </a:lnSpc>
@@ -9220,7 +9171,7 @@
           <a:srgbClr val="000000"/>
         </a:buClr>
         <a:buFont typeface="Arial"/>
-        <a:defRPr b="0" i="0" sz="1400" u="none" cap="none" strike="noStrike">
+        <a:defRPr sz="1400" b="0" i="0" u="none" strike="noStrike" cap="none">
           <a:solidFill>
             <a:srgbClr val="000000"/>
           </a:solidFill>
@@ -9230,7 +9181,7 @@
           <a:sym typeface="Arial"/>
         </a:defRPr>
       </a:lvl4pPr>
-      <a:lvl5pPr lvl="4" marR="0" rtl="0" algn="l">
+      <a:lvl5pPr marR="0" lvl="4" algn="l" rtl="0">
         <a:lnSpc>
           <a:spcPct val="100000"/>
         </a:lnSpc>
@@ -9244,7 +9195,7 @@
           <a:srgbClr val="000000"/>
         </a:buClr>
         <a:buFont typeface="Arial"/>
-        <a:defRPr b="0" i="0" sz="1400" u="none" cap="none" strike="noStrike">
+        <a:defRPr sz="1400" b="0" i="0" u="none" strike="noStrike" cap="none">
           <a:solidFill>
             <a:srgbClr val="000000"/>
           </a:solidFill>
@@ -9254,7 +9205,7 @@
           <a:sym typeface="Arial"/>
         </a:defRPr>
       </a:lvl5pPr>
-      <a:lvl6pPr lvl="5" marR="0" rtl="0" algn="l">
+      <a:lvl6pPr marR="0" lvl="5" algn="l" rtl="0">
         <a:lnSpc>
           <a:spcPct val="100000"/>
         </a:lnSpc>
@@ -9268,7 +9219,7 @@
           <a:srgbClr val="000000"/>
         </a:buClr>
         <a:buFont typeface="Arial"/>
-        <a:defRPr b="0" i="0" sz="1400" u="none" cap="none" strike="noStrike">
+        <a:defRPr sz="1400" b="0" i="0" u="none" strike="noStrike" cap="none">
           <a:solidFill>
             <a:srgbClr val="000000"/>
           </a:solidFill>
@@ -9278,7 +9229,7 @@
           <a:sym typeface="Arial"/>
         </a:defRPr>
       </a:lvl6pPr>
-      <a:lvl7pPr lvl="6" marR="0" rtl="0" algn="l">
+      <a:lvl7pPr marR="0" lvl="6" algn="l" rtl="0">
         <a:lnSpc>
           <a:spcPct val="100000"/>
         </a:lnSpc>
@@ -9292,7 +9243,7 @@
           <a:srgbClr val="000000"/>
         </a:buClr>
         <a:buFont typeface="Arial"/>
-        <a:defRPr b="0" i="0" sz="1400" u="none" cap="none" strike="noStrike">
+        <a:defRPr sz="1400" b="0" i="0" u="none" strike="noStrike" cap="none">
           <a:solidFill>
             <a:srgbClr val="000000"/>
           </a:solidFill>
@@ -9302,7 +9253,7 @@
           <a:sym typeface="Arial"/>
         </a:defRPr>
       </a:lvl7pPr>
-      <a:lvl8pPr lvl="7" marR="0" rtl="0" algn="l">
+      <a:lvl8pPr marR="0" lvl="7" algn="l" rtl="0">
         <a:lnSpc>
           <a:spcPct val="100000"/>
         </a:lnSpc>
@@ -9316,7 +9267,7 @@
           <a:srgbClr val="000000"/>
         </a:buClr>
         <a:buFont typeface="Arial"/>
-        <a:defRPr b="0" i="0" sz="1400" u="none" cap="none" strike="noStrike">
+        <a:defRPr sz="1400" b="0" i="0" u="none" strike="noStrike" cap="none">
           <a:solidFill>
             <a:srgbClr val="000000"/>
           </a:solidFill>
@@ -9326,7 +9277,7 @@
           <a:sym typeface="Arial"/>
         </a:defRPr>
       </a:lvl8pPr>
-      <a:lvl9pPr lvl="8" marR="0" rtl="0" algn="l">
+      <a:lvl9pPr marR="0" lvl="8" algn="l" rtl="0">
         <a:lnSpc>
           <a:spcPct val="100000"/>
         </a:lnSpc>
@@ -9340,7 +9291,7 @@
           <a:srgbClr val="000000"/>
         </a:buClr>
         <a:buFont typeface="Arial"/>
-        <a:defRPr b="0" i="0" sz="1400" u="none" cap="none" strike="noStrike">
+        <a:defRPr sz="1400" b="0" i="0" u="none" strike="noStrike" cap="none">
           <a:solidFill>
             <a:srgbClr val="000000"/>
           </a:solidFill>
@@ -9352,7 +9303,7 @@
       </a:lvl9pPr>
     </p:bodyStyle>
     <p:otherStyle>
-      <a:defPPr lvl="0" marR="0" rtl="0" algn="l">
+      <a:defPPr marR="0" lvl="0" algn="l" rtl="0">
         <a:lnSpc>
           <a:spcPct val="100000"/>
         </a:lnSpc>
@@ -9363,7 +9314,7 @@
           <a:spcPts val="0"/>
         </a:spcAft>
       </a:defPPr>
-      <a:lvl1pPr lvl="0" marR="0" rtl="0" algn="l">
+      <a:lvl1pPr marR="0" lvl="0" algn="l" rtl="0">
         <a:lnSpc>
           <a:spcPct val="100000"/>
         </a:lnSpc>
@@ -9377,7 +9328,7 @@
           <a:srgbClr val="000000"/>
         </a:buClr>
         <a:buFont typeface="Arial"/>
-        <a:defRPr b="0" i="0" sz="1400" u="none" cap="none" strike="noStrike">
+        <a:defRPr sz="1400" b="0" i="0" u="none" strike="noStrike" cap="none">
           <a:solidFill>
             <a:srgbClr val="000000"/>
           </a:solidFill>
@@ -9387,7 +9338,7 @@
           <a:sym typeface="Arial"/>
         </a:defRPr>
       </a:lvl1pPr>
-      <a:lvl2pPr lvl="1" marR="0" rtl="0" algn="l">
+      <a:lvl2pPr marR="0" lvl="1" algn="l" rtl="0">
         <a:lnSpc>
           <a:spcPct val="100000"/>
         </a:lnSpc>
@@ -9401,7 +9352,7 @@
           <a:srgbClr val="000000"/>
         </a:buClr>
         <a:buFont typeface="Arial"/>
-        <a:defRPr b="0" i="0" sz="1400" u="none" cap="none" strike="noStrike">
+        <a:defRPr sz="1400" b="0" i="0" u="none" strike="noStrike" cap="none">
           <a:solidFill>
             <a:srgbClr val="000000"/>
           </a:solidFill>
@@ -9411,7 +9362,7 @@
           <a:sym typeface="Arial"/>
         </a:defRPr>
       </a:lvl2pPr>
-      <a:lvl3pPr lvl="2" marR="0" rtl="0" algn="l">
+      <a:lvl3pPr marR="0" lvl="2" algn="l" rtl="0">
         <a:lnSpc>
           <a:spcPct val="100000"/>
         </a:lnSpc>
@@ -9425,7 +9376,7 @@
           <a:srgbClr val="000000"/>
         </a:buClr>
         <a:buFont typeface="Arial"/>
-        <a:defRPr b="0" i="0" sz="1400" u="none" cap="none" strike="noStrike">
+        <a:defRPr sz="1400" b="0" i="0" u="none" strike="noStrike" cap="none">
           <a:solidFill>
             <a:srgbClr val="000000"/>
           </a:solidFill>
@@ -9435,7 +9386,7 @@
           <a:sym typeface="Arial"/>
         </a:defRPr>
       </a:lvl3pPr>
-      <a:lvl4pPr lvl="3" marR="0" rtl="0" algn="l">
+      <a:lvl4pPr marR="0" lvl="3" algn="l" rtl="0">
         <a:lnSpc>
           <a:spcPct val="100000"/>
         </a:lnSpc>
@@ -9449,7 +9400,7 @@
           <a:srgbClr val="000000"/>
         </a:buClr>
         <a:buFont typeface="Arial"/>
-        <a:defRPr b="0" i="0" sz="1400" u="none" cap="none" strike="noStrike">
+        <a:defRPr sz="1400" b="0" i="0" u="none" strike="noStrike" cap="none">
           <a:solidFill>
             <a:srgbClr val="000000"/>
           </a:solidFill>
@@ -9459,7 +9410,7 @@
           <a:sym typeface="Arial"/>
         </a:defRPr>
       </a:lvl4pPr>
-      <a:lvl5pPr lvl="4" marR="0" rtl="0" algn="l">
+      <a:lvl5pPr marR="0" lvl="4" algn="l" rtl="0">
         <a:lnSpc>
           <a:spcPct val="100000"/>
         </a:lnSpc>
@@ -9473,7 +9424,7 @@
           <a:srgbClr val="000000"/>
         </a:buClr>
         <a:buFont typeface="Arial"/>
-        <a:defRPr b="0" i="0" sz="1400" u="none" cap="none" strike="noStrike">
+        <a:defRPr sz="1400" b="0" i="0" u="none" strike="noStrike" cap="none">
           <a:solidFill>
             <a:srgbClr val="000000"/>
           </a:solidFill>
@@ -9483,7 +9434,7 @@
           <a:sym typeface="Arial"/>
         </a:defRPr>
       </a:lvl5pPr>
-      <a:lvl6pPr lvl="5" marR="0" rtl="0" algn="l">
+      <a:lvl6pPr marR="0" lvl="5" algn="l" rtl="0">
         <a:lnSpc>
           <a:spcPct val="100000"/>
         </a:lnSpc>
@@ -9497,7 +9448,7 @@
           <a:srgbClr val="000000"/>
         </a:buClr>
         <a:buFont typeface="Arial"/>
-        <a:defRPr b="0" i="0" sz="1400" u="none" cap="none" strike="noStrike">
+        <a:defRPr sz="1400" b="0" i="0" u="none" strike="noStrike" cap="none">
           <a:solidFill>
             <a:srgbClr val="000000"/>
           </a:solidFill>
@@ -9507,7 +9458,7 @@
           <a:sym typeface="Arial"/>
         </a:defRPr>
       </a:lvl6pPr>
-      <a:lvl7pPr lvl="6" marR="0" rtl="0" algn="l">
+      <a:lvl7pPr marR="0" lvl="6" algn="l" rtl="0">
         <a:lnSpc>
           <a:spcPct val="100000"/>
         </a:lnSpc>
@@ -9521,7 +9472,7 @@
           <a:srgbClr val="000000"/>
         </a:buClr>
         <a:buFont typeface="Arial"/>
-        <a:defRPr b="0" i="0" sz="1400" u="none" cap="none" strike="noStrike">
+        <a:defRPr sz="1400" b="0" i="0" u="none" strike="noStrike" cap="none">
           <a:solidFill>
             <a:srgbClr val="000000"/>
           </a:solidFill>
@@ -9531,7 +9482,7 @@
           <a:sym typeface="Arial"/>
         </a:defRPr>
       </a:lvl7pPr>
-      <a:lvl8pPr lvl="7" marR="0" rtl="0" algn="l">
+      <a:lvl8pPr marR="0" lvl="7" algn="l" rtl="0">
         <a:lnSpc>
           <a:spcPct val="100000"/>
         </a:lnSpc>
@@ -9545,7 +9496,7 @@
           <a:srgbClr val="000000"/>
         </a:buClr>
         <a:buFont typeface="Arial"/>
-        <a:defRPr b="0" i="0" sz="1400" u="none" cap="none" strike="noStrike">
+        <a:defRPr sz="1400" b="0" i="0" u="none" strike="noStrike" cap="none">
           <a:solidFill>
             <a:srgbClr val="000000"/>
           </a:solidFill>
@@ -9555,7 +9506,7 @@
           <a:sym typeface="Arial"/>
         </a:defRPr>
       </a:lvl8pPr>
-      <a:lvl9pPr lvl="8" marR="0" rtl="0" algn="l">
+      <a:lvl9pPr marR="0" lvl="8" algn="l" rtl="0">
         <a:lnSpc>
           <a:spcPct val="100000"/>
         </a:lnSpc>
@@ -9569,7 +9520,7 @@
           <a:srgbClr val="000000"/>
         </a:buClr>
         <a:buFont typeface="Arial"/>
-        <a:defRPr b="0" i="0" sz="1400" u="none" cap="none" strike="noStrike">
+        <a:defRPr sz="1400" b="0" i="0" u="none" strike="noStrike" cap="none">
           <a:solidFill>
             <a:srgbClr val="000000"/>
           </a:solidFill>
@@ -9585,11 +9536,11 @@
 </file>
 
 <file path=ppt/slides/slide1.xml><?xml version="1.0" encoding="utf-8"?>
-<p:sld xmlns:a="http://schemas.openxmlformats.org/drawingml/2006/main" xmlns:r="http://schemas.openxmlformats.org/officeDocument/2006/relationships" xmlns:mc="http://schemas.openxmlformats.org/markup-compatibility/2006" xmlns:mv="urn:schemas-microsoft-com:mac:vml" xmlns:p="http://schemas.openxmlformats.org/presentationml/2006/main" xmlns:c="http://schemas.openxmlformats.org/drawingml/2006/chart" xmlns:dgm="http://schemas.openxmlformats.org/drawingml/2006/diagram" xmlns:o="urn:schemas-microsoft-com:office:office" xmlns:v="urn:schemas-microsoft-com:vml" xmlns:pvml="urn:schemas-microsoft-com:office:powerpoint" xmlns:com="http://schemas.openxmlformats.org/drawingml/2006/compatibility" xmlns:p14="http://schemas.microsoft.com/office/powerpoint/2010/main" xmlns:p15="http://schemas.microsoft.com/office/powerpoint/2012/main" xmlns:ahyp="http://schemas.microsoft.com/office/drawing/2018/hyperlinkcolor">
+<p:sld xmlns:a="http://schemas.openxmlformats.org/drawingml/2006/main" xmlns:r="http://schemas.openxmlformats.org/officeDocument/2006/relationships" xmlns:p="http://schemas.openxmlformats.org/presentationml/2006/main">
   <p:cSld>
     <p:spTree>
       <p:nvGrpSpPr>
-        <p:cNvPr id="133" name="Shape 133"/>
+        <p:cNvPr id="1" name="Shape 133"/>
         <p:cNvGrpSpPr/>
         <p:nvPr/>
       </p:nvGrpSpPr>
@@ -9604,7 +9555,9 @@
       <p:sp>
         <p:nvSpPr>
           <p:cNvPr id="134" name="Google Shape;134;p13"/>
-          <p:cNvSpPr txBox="1"/>
+          <p:cNvSpPr txBox="1">
+            <a:spLocks noGrp="1"/>
+          </p:cNvSpPr>
           <p:nvPr>
             <p:ph type="ctrTitle"/>
           </p:nvPr>
@@ -9619,12 +9572,12 @@
           </a:prstGeom>
         </p:spPr>
         <p:txBody>
-          <a:bodyPr anchorCtr="0" anchor="t" bIns="91425" lIns="91425" spcFirstLastPara="1" rIns="91425" wrap="square" tIns="91425">
+          <a:bodyPr spcFirstLastPara="1" wrap="square" lIns="91425" tIns="91425" rIns="91425" bIns="91425" anchor="t" anchorCtr="0">
             <a:normAutofit fontScale="90000"/>
           </a:bodyPr>
           <a:lstStyle/>
           <a:p>
-            <a:pPr indent="0" lvl="0" marL="0" rtl="0" algn="l">
+            <a:pPr marL="0" lvl="0" indent="0" algn="l" rtl="0">
               <a:spcBef>
                 <a:spcPts val="0"/>
               </a:spcBef>
@@ -9634,13 +9587,13 @@
               <a:buNone/>
             </a:pPr>
             <a:r>
-              <a:rPr b="1" lang="en" u="sng"/>
+              <a:rPr lang="en" b="1" u="sng"/>
               <a:t>APSR</a:t>
             </a:r>
             <a:endParaRPr b="1" u="sng"/>
           </a:p>
           <a:p>
-            <a:pPr indent="0" lvl="0" marL="0" rtl="0" algn="l">
+            <a:pPr marL="0" lvl="0" indent="0" algn="l" rtl="0">
               <a:spcBef>
                 <a:spcPts val="0"/>
               </a:spcBef>
@@ -9667,9 +9620,11 @@
       <p:sp>
         <p:nvSpPr>
           <p:cNvPr id="135" name="Google Shape;135;p13"/>
-          <p:cNvSpPr txBox="1"/>
+          <p:cNvSpPr txBox="1">
+            <a:spLocks noGrp="1"/>
+          </p:cNvSpPr>
           <p:nvPr>
-            <p:ph idx="1" type="subTitle"/>
+            <p:ph type="subTitle" idx="1"/>
           </p:nvPr>
         </p:nvSpPr>
         <p:spPr>
@@ -9682,12 +9637,12 @@
           </a:prstGeom>
         </p:spPr>
         <p:txBody>
-          <a:bodyPr anchorCtr="0" anchor="t" bIns="91425" lIns="91425" spcFirstLastPara="1" rIns="91425" wrap="square" tIns="91425">
+          <a:bodyPr spcFirstLastPara="1" wrap="square" lIns="91425" tIns="91425" rIns="91425" bIns="91425" anchor="t" anchorCtr="0">
             <a:normAutofit lnSpcReduction="20000"/>
           </a:bodyPr>
           <a:lstStyle/>
           <a:p>
-            <a:pPr indent="0" lvl="0" marL="0" rtl="0" algn="l">
+            <a:pPr marL="0" lvl="0" indent="0" algn="l" rtl="0">
               <a:spcBef>
                 <a:spcPts val="0"/>
               </a:spcBef>
@@ -9719,12 +9674,100 @@
 </p:sld>
 </file>
 
-<file path=ppt/slides/slide2.xml><?xml version="1.0" encoding="utf-8"?>
-<p:sld xmlns:a="http://schemas.openxmlformats.org/drawingml/2006/main" xmlns:r="http://schemas.openxmlformats.org/officeDocument/2006/relationships" xmlns:mc="http://schemas.openxmlformats.org/markup-compatibility/2006" xmlns:mv="urn:schemas-microsoft-com:mac:vml" xmlns:p="http://schemas.openxmlformats.org/presentationml/2006/main" xmlns:c="http://schemas.openxmlformats.org/drawingml/2006/chart" xmlns:dgm="http://schemas.openxmlformats.org/drawingml/2006/diagram" xmlns:o="urn:schemas-microsoft-com:office:office" xmlns:v="urn:schemas-microsoft-com:vml" xmlns:pvml="urn:schemas-microsoft-com:office:powerpoint" xmlns:com="http://schemas.openxmlformats.org/drawingml/2006/compatibility" xmlns:p14="http://schemas.microsoft.com/office/powerpoint/2010/main" xmlns:p15="http://schemas.microsoft.com/office/powerpoint/2012/main" xmlns:ahyp="http://schemas.microsoft.com/office/drawing/2018/hyperlinkcolor">
+<file path=ppt/slides/slide10.xml><?xml version="1.0" encoding="utf-8"?>
+<p:sld xmlns:a="http://schemas.openxmlformats.org/drawingml/2006/main" xmlns:r="http://schemas.openxmlformats.org/officeDocument/2006/relationships" xmlns:p="http://schemas.openxmlformats.org/presentationml/2006/main">
   <p:cSld>
     <p:spTree>
       <p:nvGrpSpPr>
-        <p:cNvPr id="139" name="Shape 139"/>
+        <p:cNvPr id="1" name=""/>
+        <p:cNvGrpSpPr/>
+        <p:nvPr/>
+      </p:nvGrpSpPr>
+      <p:grpSpPr>
+        <a:xfrm>
+          <a:off x="0" y="0"/>
+          <a:ext cx="0" cy="0"/>
+          <a:chOff x="0" y="0"/>
+          <a:chExt cx="0" cy="0"/>
+        </a:xfrm>
+      </p:grpSpPr>
+      <p:sp>
+        <p:nvSpPr>
+          <p:cNvPr id="2" name="Cím 1">
+            <a:extLst>
+              <a:ext uri="{FF2B5EF4-FFF2-40B4-BE49-F238E27FC236}">
+                <a16:creationId xmlns:a16="http://schemas.microsoft.com/office/drawing/2014/main" id="{30D2524B-2E5F-9C56-A194-6F692C95AFCC}"/>
+              </a:ext>
+            </a:extLst>
+          </p:cNvPr>
+          <p:cNvSpPr>
+            <a:spLocks noGrp="1"/>
+          </p:cNvSpPr>
+          <p:nvPr>
+            <p:ph type="title"/>
+          </p:nvPr>
+        </p:nvSpPr>
+        <p:spPr/>
+        <p:txBody>
+          <a:bodyPr/>
+          <a:lstStyle/>
+          <a:p>
+            <a:r>
+              <a:rPr lang="hu-HU"/>
+              <a:t>Langgraph Workflow for Agentic processing</a:t>
+            </a:r>
+          </a:p>
+        </p:txBody>
+      </p:sp>
+      <p:pic>
+        <p:nvPicPr>
+          <p:cNvPr id="5" name="Kép 4">
+            <a:extLst>
+              <a:ext uri="{FF2B5EF4-FFF2-40B4-BE49-F238E27FC236}">
+                <a16:creationId xmlns:a16="http://schemas.microsoft.com/office/drawing/2014/main" id="{56394341-7F2C-B329-C0C6-6C33852E1ACC}"/>
+              </a:ext>
+            </a:extLst>
+          </p:cNvPr>
+          <p:cNvPicPr>
+            <a:picLocks noChangeAspect="1"/>
+          </p:cNvPicPr>
+          <p:nvPr/>
+        </p:nvPicPr>
+        <p:blipFill>
+          <a:blip r:embed="rId2"/>
+          <a:stretch>
+            <a:fillRect/>
+          </a:stretch>
+        </p:blipFill>
+        <p:spPr>
+          <a:xfrm>
+            <a:off x="794657" y="1025651"/>
+            <a:ext cx="7554686" cy="3832427"/>
+          </a:xfrm>
+          <a:prstGeom prst="rect">
+            <a:avLst/>
+          </a:prstGeom>
+        </p:spPr>
+      </p:pic>
+    </p:spTree>
+    <p:extLst>
+      <p:ext uri="{BB962C8B-B14F-4D97-AF65-F5344CB8AC3E}">
+        <p14:creationId xmlns:p14="http://schemas.microsoft.com/office/powerpoint/2010/main" val="4238779655"/>
+      </p:ext>
+    </p:extLst>
+  </p:cSld>
+  <p:clrMapOvr>
+    <a:masterClrMapping/>
+  </p:clrMapOvr>
+</p:sld>
+</file>
+
+<file path=ppt/slides/slide2.xml><?xml version="1.0" encoding="utf-8"?>
+<p:sld xmlns:a="http://schemas.openxmlformats.org/drawingml/2006/main" xmlns:r="http://schemas.openxmlformats.org/officeDocument/2006/relationships" xmlns:p="http://schemas.openxmlformats.org/presentationml/2006/main">
+  <p:cSld>
+    <p:spTree>
+      <p:nvGrpSpPr>
+        <p:cNvPr id="1" name="Shape 139"/>
         <p:cNvGrpSpPr/>
         <p:nvPr/>
       </p:nvGrpSpPr>
@@ -9739,7 +9782,9 @@
       <p:sp>
         <p:nvSpPr>
           <p:cNvPr id="140" name="Google Shape;140;p14"/>
-          <p:cNvSpPr txBox="1"/>
+          <p:cNvSpPr txBox="1">
+            <a:spLocks noGrp="1"/>
+          </p:cNvSpPr>
           <p:nvPr>
             <p:ph type="title"/>
           </p:nvPr>
@@ -9754,12 +9799,12 @@
           </a:prstGeom>
         </p:spPr>
         <p:txBody>
-          <a:bodyPr anchorCtr="0" anchor="t" bIns="91425" lIns="91425" spcFirstLastPara="1" rIns="91425" wrap="square" tIns="91425">
+          <a:bodyPr spcFirstLastPara="1" wrap="square" lIns="91425" tIns="91425" rIns="91425" bIns="91425" anchor="t" anchorCtr="0">
             <a:normAutofit fontScale="90000"/>
           </a:bodyPr>
           <a:lstStyle/>
           <a:p>
-            <a:pPr indent="0" lvl="0" marL="0" rtl="0" algn="l">
+            <a:pPr marL="0" lvl="0" indent="0" algn="l" rtl="0">
               <a:spcBef>
                 <a:spcPts val="0"/>
               </a:spcBef>
@@ -9786,7 +9831,7 @@
           <a:blip r:embed="rId3">
             <a:alphaModFix/>
           </a:blip>
-          <a:srcRect b="2812" l="3380" r="4010" t="4389"/>
+          <a:srcRect l="3380" t="4389" r="4010" b="2812"/>
           <a:stretch/>
         </p:blipFill>
         <p:spPr>
@@ -9812,11 +9857,11 @@
 </file>
 
 <file path=ppt/slides/slide3.xml><?xml version="1.0" encoding="utf-8"?>
-<p:sld xmlns:a="http://schemas.openxmlformats.org/drawingml/2006/main" xmlns:r="http://schemas.openxmlformats.org/officeDocument/2006/relationships" xmlns:mc="http://schemas.openxmlformats.org/markup-compatibility/2006" xmlns:mv="urn:schemas-microsoft-com:mac:vml" xmlns:p="http://schemas.openxmlformats.org/presentationml/2006/main" xmlns:c="http://schemas.openxmlformats.org/drawingml/2006/chart" xmlns:dgm="http://schemas.openxmlformats.org/drawingml/2006/diagram" xmlns:o="urn:schemas-microsoft-com:office:office" xmlns:v="urn:schemas-microsoft-com:vml" xmlns:pvml="urn:schemas-microsoft-com:office:powerpoint" xmlns:com="http://schemas.openxmlformats.org/drawingml/2006/compatibility" xmlns:p14="http://schemas.microsoft.com/office/powerpoint/2010/main" xmlns:p15="http://schemas.microsoft.com/office/powerpoint/2012/main" xmlns:ahyp="http://schemas.microsoft.com/office/drawing/2018/hyperlinkcolor">
+<p:sld xmlns:a="http://schemas.openxmlformats.org/drawingml/2006/main" xmlns:r="http://schemas.openxmlformats.org/officeDocument/2006/relationships" xmlns:p="http://schemas.openxmlformats.org/presentationml/2006/main">
   <p:cSld>
     <p:spTree>
       <p:nvGrpSpPr>
-        <p:cNvPr id="145" name="Shape 145"/>
+        <p:cNvPr id="1" name="Shape 145"/>
         <p:cNvGrpSpPr/>
         <p:nvPr/>
       </p:nvGrpSpPr>
@@ -9831,7 +9876,9 @@
       <p:sp>
         <p:nvSpPr>
           <p:cNvPr id="146" name="Google Shape;146;p15"/>
-          <p:cNvSpPr txBox="1"/>
+          <p:cNvSpPr txBox="1">
+            <a:spLocks noGrp="1"/>
+          </p:cNvSpPr>
           <p:nvPr>
             <p:ph type="title"/>
           </p:nvPr>
@@ -9846,12 +9893,12 @@
           </a:prstGeom>
         </p:spPr>
         <p:txBody>
-          <a:bodyPr anchorCtr="0" anchor="t" bIns="91425" lIns="91425" spcFirstLastPara="1" rIns="91425" wrap="square" tIns="91425">
+          <a:bodyPr spcFirstLastPara="1" wrap="square" lIns="91425" tIns="91425" rIns="91425" bIns="91425" anchor="t" anchorCtr="0">
             <a:normAutofit/>
           </a:bodyPr>
           <a:lstStyle/>
           <a:p>
-            <a:pPr indent="0" lvl="0" marL="0" rtl="0" algn="ctr">
+            <a:pPr marL="0" lvl="0" indent="0" algn="ctr" rtl="0">
               <a:spcBef>
                 <a:spcPts val="0"/>
               </a:spcBef>
@@ -9895,7 +9942,7 @@
             <a:noFill/>
           </a:ln>
           <a:effectLst>
-            <a:outerShdw blurRad="57150" rotWithShape="0" algn="bl" dir="5400000" dist="19050">
+            <a:outerShdw blurRad="57150" dist="19050" dir="5400000" algn="bl" rotWithShape="0">
               <a:srgbClr val="000000">
                 <a:alpha val="50000"/>
               </a:srgbClr>
@@ -9930,7 +9977,7 @@
             <a:noFill/>
           </a:ln>
           <a:effectLst>
-            <a:outerShdw blurRad="57150" rotWithShape="0" algn="bl" dir="2520000" dist="57150">
+            <a:outerShdw blurRad="57150" dist="57150" dir="2520000" algn="bl" rotWithShape="0">
               <a:srgbClr val="000000">
                 <a:alpha val="50000"/>
               </a:srgbClr>
@@ -9947,11 +9994,11 @@
 </file>
 
 <file path=ppt/slides/slide4.xml><?xml version="1.0" encoding="utf-8"?>
-<p:sld xmlns:a="http://schemas.openxmlformats.org/drawingml/2006/main" xmlns:r="http://schemas.openxmlformats.org/officeDocument/2006/relationships" xmlns:mc="http://schemas.openxmlformats.org/markup-compatibility/2006" xmlns:mv="urn:schemas-microsoft-com:mac:vml" xmlns:p="http://schemas.openxmlformats.org/presentationml/2006/main" xmlns:c="http://schemas.openxmlformats.org/drawingml/2006/chart" xmlns:dgm="http://schemas.openxmlformats.org/drawingml/2006/diagram" xmlns:o="urn:schemas-microsoft-com:office:office" xmlns:v="urn:schemas-microsoft-com:vml" xmlns:pvml="urn:schemas-microsoft-com:office:powerpoint" xmlns:com="http://schemas.openxmlformats.org/drawingml/2006/compatibility" xmlns:p14="http://schemas.microsoft.com/office/powerpoint/2010/main" xmlns:p15="http://schemas.microsoft.com/office/powerpoint/2012/main" xmlns:ahyp="http://schemas.microsoft.com/office/drawing/2018/hyperlinkcolor">
+<p:sld xmlns:a="http://schemas.openxmlformats.org/drawingml/2006/main" xmlns:r="http://schemas.openxmlformats.org/officeDocument/2006/relationships" xmlns:p="http://schemas.openxmlformats.org/presentationml/2006/main">
   <p:cSld>
     <p:spTree>
       <p:nvGrpSpPr>
-        <p:cNvPr id="152" name="Shape 152"/>
+        <p:cNvPr id="1" name="Shape 152"/>
         <p:cNvGrpSpPr/>
         <p:nvPr/>
       </p:nvGrpSpPr>
@@ -9966,7 +10013,9 @@
       <p:sp>
         <p:nvSpPr>
           <p:cNvPr id="153" name="Google Shape;153;p16"/>
-          <p:cNvSpPr txBox="1"/>
+          <p:cNvSpPr txBox="1">
+            <a:spLocks noGrp="1"/>
+          </p:cNvSpPr>
           <p:nvPr>
             <p:ph type="title"/>
           </p:nvPr>
@@ -9981,12 +10030,12 @@
           </a:prstGeom>
         </p:spPr>
         <p:txBody>
-          <a:bodyPr anchorCtr="0" anchor="t" bIns="91425" lIns="91425" spcFirstLastPara="1" rIns="91425" wrap="square" tIns="91425">
+          <a:bodyPr spcFirstLastPara="1" wrap="square" lIns="91425" tIns="91425" rIns="91425" bIns="91425" anchor="t" anchorCtr="0">
             <a:normAutofit/>
           </a:bodyPr>
           <a:lstStyle/>
           <a:p>
-            <a:pPr indent="0" lvl="0" marL="0" rtl="0" algn="ctr">
+            <a:pPr marL="0" lvl="0" indent="0" algn="ctr" rtl="0">
               <a:spcBef>
                 <a:spcPts val="0"/>
               </a:spcBef>
@@ -10040,17 +10089,17 @@
             <a:avLst/>
           </a:prstGeom>
           <a:noFill/>
-          <a:ln cap="flat" cmpd="sng" w="9525">
+          <a:ln w="9525" cap="flat" cmpd="sng">
             <a:solidFill>
               <a:srgbClr val="666666"/>
             </a:solidFill>
             <a:prstDash val="solid"/>
             <a:round/>
-            <a:headEnd len="sm" w="sm" type="none"/>
-            <a:tailEnd len="sm" w="sm" type="none"/>
+            <a:headEnd type="none" w="sm" len="sm"/>
+            <a:tailEnd type="none" w="sm" len="sm"/>
           </a:ln>
           <a:effectLst>
-            <a:outerShdw blurRad="57150" rotWithShape="0" algn="bl" dir="2520000" dist="57150">
+            <a:outerShdw blurRad="57150" dist="57150" dir="2520000" algn="bl" rotWithShape="0">
               <a:srgbClr val="000000">
                 <a:alpha val="50000"/>
               </a:srgbClr>
@@ -10068,7 +10117,7 @@
           <a:blip r:embed="rId4">
             <a:alphaModFix/>
           </a:blip>
-          <a:srcRect b="0" l="0" r="4205" t="0"/>
+          <a:srcRect r="4205"/>
           <a:stretch/>
         </p:blipFill>
         <p:spPr>
@@ -10080,17 +10129,17 @@
             <a:avLst/>
           </a:prstGeom>
           <a:noFill/>
-          <a:ln cap="flat" cmpd="sng" w="9525">
+          <a:ln w="9525" cap="flat" cmpd="sng">
             <a:solidFill>
               <a:srgbClr val="666666"/>
             </a:solidFill>
             <a:prstDash val="solid"/>
             <a:round/>
-            <a:headEnd len="sm" w="sm" type="none"/>
-            <a:tailEnd len="sm" w="sm" type="none"/>
+            <a:headEnd type="none" w="sm" len="sm"/>
+            <a:tailEnd type="none" w="sm" len="sm"/>
           </a:ln>
           <a:effectLst>
-            <a:outerShdw blurRad="57150" rotWithShape="0" algn="bl" dir="13260000" dist="57150">
+            <a:outerShdw blurRad="57150" dist="57150" dir="13260000" algn="bl" rotWithShape="0">
               <a:srgbClr val="000000">
                 <a:alpha val="50000"/>
               </a:srgbClr>
@@ -10107,11 +10156,11 @@
 </file>
 
 <file path=ppt/slides/slide5.xml><?xml version="1.0" encoding="utf-8"?>
-<p:sld xmlns:a="http://schemas.openxmlformats.org/drawingml/2006/main" xmlns:r="http://schemas.openxmlformats.org/officeDocument/2006/relationships" xmlns:mc="http://schemas.openxmlformats.org/markup-compatibility/2006" xmlns:mv="urn:schemas-microsoft-com:mac:vml" xmlns:p="http://schemas.openxmlformats.org/presentationml/2006/main" xmlns:c="http://schemas.openxmlformats.org/drawingml/2006/chart" xmlns:dgm="http://schemas.openxmlformats.org/drawingml/2006/diagram" xmlns:o="urn:schemas-microsoft-com:office:office" xmlns:v="urn:schemas-microsoft-com:vml" xmlns:pvml="urn:schemas-microsoft-com:office:powerpoint" xmlns:com="http://schemas.openxmlformats.org/drawingml/2006/compatibility" xmlns:p14="http://schemas.microsoft.com/office/powerpoint/2010/main" xmlns:p15="http://schemas.microsoft.com/office/powerpoint/2012/main" xmlns:ahyp="http://schemas.microsoft.com/office/drawing/2018/hyperlinkcolor">
+<p:sld xmlns:a="http://schemas.openxmlformats.org/drawingml/2006/main" xmlns:r="http://schemas.openxmlformats.org/officeDocument/2006/relationships" xmlns:p="http://schemas.openxmlformats.org/presentationml/2006/main">
   <p:cSld>
     <p:spTree>
       <p:nvGrpSpPr>
-        <p:cNvPr id="159" name="Shape 159"/>
+        <p:cNvPr id="1" name="Shape 159"/>
         <p:cNvGrpSpPr/>
         <p:nvPr/>
       </p:nvGrpSpPr>
@@ -10126,7 +10175,9 @@
       <p:sp>
         <p:nvSpPr>
           <p:cNvPr id="160" name="Google Shape;160;p17"/>
-          <p:cNvSpPr txBox="1"/>
+          <p:cNvSpPr txBox="1">
+            <a:spLocks noGrp="1"/>
+          </p:cNvSpPr>
           <p:nvPr>
             <p:ph type="title"/>
           </p:nvPr>
@@ -10141,12 +10192,12 @@
           </a:prstGeom>
         </p:spPr>
         <p:txBody>
-          <a:bodyPr anchorCtr="0" anchor="t" bIns="91425" lIns="91425" spcFirstLastPara="1" rIns="91425" wrap="square" tIns="91425">
+          <a:bodyPr spcFirstLastPara="1" wrap="square" lIns="91425" tIns="91425" rIns="91425" bIns="91425" anchor="t" anchorCtr="0">
             <a:normAutofit/>
           </a:bodyPr>
           <a:lstStyle/>
           <a:p>
-            <a:pPr indent="0" lvl="0" marL="0" rtl="0" algn="l">
+            <a:pPr marL="0" lvl="0" indent="0" algn="l" rtl="0">
               <a:spcBef>
                 <a:spcPts val="0"/>
               </a:spcBef>
@@ -10186,17 +10237,17 @@
             <a:avLst/>
           </a:prstGeom>
           <a:noFill/>
-          <a:ln cap="flat" cmpd="sng" w="9525">
+          <a:ln w="9525" cap="flat" cmpd="sng">
             <a:solidFill>
               <a:srgbClr val="666666"/>
             </a:solidFill>
             <a:prstDash val="solid"/>
             <a:round/>
-            <a:headEnd len="sm" w="sm" type="none"/>
-            <a:tailEnd len="sm" w="sm" type="none"/>
+            <a:headEnd type="none" w="sm" len="sm"/>
+            <a:tailEnd type="none" w="sm" len="sm"/>
           </a:ln>
           <a:effectLst>
-            <a:outerShdw blurRad="57150" rotWithShape="0" algn="bl" dir="5400000" dist="19050">
+            <a:outerShdw blurRad="57150" dist="19050" dir="5400000" algn="bl" rotWithShape="0">
               <a:srgbClr val="000000">
                 <a:alpha val="50000"/>
               </a:srgbClr>
@@ -10227,17 +10278,17 @@
             <a:avLst/>
           </a:prstGeom>
           <a:noFill/>
-          <a:ln cap="flat" cmpd="sng" w="9525">
+          <a:ln w="9525" cap="flat" cmpd="sng">
             <a:solidFill>
               <a:srgbClr val="434343"/>
             </a:solidFill>
             <a:prstDash val="solid"/>
             <a:round/>
-            <a:headEnd len="sm" w="sm" type="none"/>
-            <a:tailEnd len="sm" w="sm" type="none"/>
+            <a:headEnd type="none" w="sm" len="sm"/>
+            <a:tailEnd type="none" w="sm" len="sm"/>
           </a:ln>
           <a:effectLst>
-            <a:outerShdw blurRad="57150" rotWithShape="0" algn="bl" dir="13260000" dist="95250">
+            <a:outerShdw blurRad="57150" dist="95250" dir="13260000" algn="bl" rotWithShape="0">
               <a:srgbClr val="000000">
                 <a:alpha val="50000"/>
               </a:srgbClr>
@@ -10254,11 +10305,11 @@
 </file>
 
 <file path=ppt/slides/slide6.xml><?xml version="1.0" encoding="utf-8"?>
-<p:sld xmlns:a="http://schemas.openxmlformats.org/drawingml/2006/main" xmlns:r="http://schemas.openxmlformats.org/officeDocument/2006/relationships" xmlns:mc="http://schemas.openxmlformats.org/markup-compatibility/2006" xmlns:mv="urn:schemas-microsoft-com:mac:vml" xmlns:p="http://schemas.openxmlformats.org/presentationml/2006/main" xmlns:c="http://schemas.openxmlformats.org/drawingml/2006/chart" xmlns:dgm="http://schemas.openxmlformats.org/drawingml/2006/diagram" xmlns:o="urn:schemas-microsoft-com:office:office" xmlns:v="urn:schemas-microsoft-com:vml" xmlns:pvml="urn:schemas-microsoft-com:office:powerpoint" xmlns:com="http://schemas.openxmlformats.org/drawingml/2006/compatibility" xmlns:p14="http://schemas.microsoft.com/office/powerpoint/2010/main" xmlns:p15="http://schemas.microsoft.com/office/powerpoint/2012/main" xmlns:ahyp="http://schemas.microsoft.com/office/drawing/2018/hyperlinkcolor">
+<p:sld xmlns:a="http://schemas.openxmlformats.org/drawingml/2006/main" xmlns:r="http://schemas.openxmlformats.org/officeDocument/2006/relationships" xmlns:p="http://schemas.openxmlformats.org/presentationml/2006/main">
   <p:cSld>
     <p:spTree>
       <p:nvGrpSpPr>
-        <p:cNvPr id="166" name="Shape 166"/>
+        <p:cNvPr id="1" name="Shape 166"/>
         <p:cNvGrpSpPr/>
         <p:nvPr/>
       </p:nvGrpSpPr>
@@ -10273,7 +10324,9 @@
       <p:sp>
         <p:nvSpPr>
           <p:cNvPr id="167" name="Google Shape;167;p18"/>
-          <p:cNvSpPr txBox="1"/>
+          <p:cNvSpPr txBox="1">
+            <a:spLocks noGrp="1"/>
+          </p:cNvSpPr>
           <p:nvPr>
             <p:ph type="title"/>
           </p:nvPr>
@@ -10288,12 +10341,12 @@
           </a:prstGeom>
         </p:spPr>
         <p:txBody>
-          <a:bodyPr anchorCtr="0" anchor="t" bIns="91425" lIns="91425" spcFirstLastPara="1" rIns="91425" wrap="square" tIns="91425">
+          <a:bodyPr spcFirstLastPara="1" wrap="square" lIns="91425" tIns="91425" rIns="91425" bIns="91425" anchor="t" anchorCtr="0">
             <a:normAutofit/>
           </a:bodyPr>
           <a:lstStyle/>
           <a:p>
-            <a:pPr indent="0" lvl="0" marL="0" rtl="0" algn="l">
+            <a:pPr marL="0" lvl="0" indent="0" algn="l" rtl="0">
               <a:spcBef>
                 <a:spcPts val="0"/>
               </a:spcBef>
@@ -10361,17 +10414,17 @@
             <a:avLst/>
           </a:prstGeom>
           <a:noFill/>
-          <a:ln cap="flat" cmpd="sng" w="9525">
+          <a:ln w="9525" cap="flat" cmpd="sng">
             <a:solidFill>
               <a:srgbClr val="666666"/>
             </a:solidFill>
             <a:prstDash val="solid"/>
             <a:round/>
-            <a:headEnd len="sm" w="sm" type="none"/>
-            <a:tailEnd len="sm" w="sm" type="none"/>
+            <a:headEnd type="none" w="sm" len="sm"/>
+            <a:tailEnd type="none" w="sm" len="sm"/>
           </a:ln>
           <a:effectLst>
-            <a:outerShdw blurRad="57150" rotWithShape="0" algn="bl" dir="13260000" dist="57150">
+            <a:outerShdw blurRad="57150" dist="57150" dir="13260000" algn="bl" rotWithShape="0">
               <a:srgbClr val="000000">
                 <a:alpha val="50000"/>
               </a:srgbClr>
@@ -10388,11 +10441,11 @@
 </file>
 
 <file path=ppt/slides/slide7.xml><?xml version="1.0" encoding="utf-8"?>
-<p:sld xmlns:a="http://schemas.openxmlformats.org/drawingml/2006/main" xmlns:r="http://schemas.openxmlformats.org/officeDocument/2006/relationships" xmlns:mc="http://schemas.openxmlformats.org/markup-compatibility/2006" xmlns:mv="urn:schemas-microsoft-com:mac:vml" xmlns:p="http://schemas.openxmlformats.org/presentationml/2006/main" xmlns:c="http://schemas.openxmlformats.org/drawingml/2006/chart" xmlns:dgm="http://schemas.openxmlformats.org/drawingml/2006/diagram" xmlns:o="urn:schemas-microsoft-com:office:office" xmlns:v="urn:schemas-microsoft-com:vml" xmlns:pvml="urn:schemas-microsoft-com:office:powerpoint" xmlns:com="http://schemas.openxmlformats.org/drawingml/2006/compatibility" xmlns:p14="http://schemas.microsoft.com/office/powerpoint/2010/main" xmlns:p15="http://schemas.microsoft.com/office/powerpoint/2012/main" xmlns:ahyp="http://schemas.microsoft.com/office/drawing/2018/hyperlinkcolor">
+<p:sld xmlns:a="http://schemas.openxmlformats.org/drawingml/2006/main" xmlns:r="http://schemas.openxmlformats.org/officeDocument/2006/relationships" xmlns:p="http://schemas.openxmlformats.org/presentationml/2006/main">
   <p:cSld>
     <p:spTree>
       <p:nvGrpSpPr>
-        <p:cNvPr id="173" name="Shape 173"/>
+        <p:cNvPr id="1" name="Shape 173"/>
         <p:cNvGrpSpPr/>
         <p:nvPr/>
       </p:nvGrpSpPr>
@@ -10407,7 +10460,9 @@
       <p:sp>
         <p:nvSpPr>
           <p:cNvPr id="174" name="Google Shape;174;p19"/>
-          <p:cNvSpPr txBox="1"/>
+          <p:cNvSpPr txBox="1">
+            <a:spLocks noGrp="1"/>
+          </p:cNvSpPr>
           <p:nvPr>
             <p:ph type="title"/>
           </p:nvPr>
@@ -10422,12 +10477,12 @@
           </a:prstGeom>
         </p:spPr>
         <p:txBody>
-          <a:bodyPr anchorCtr="0" anchor="t" bIns="91425" lIns="91425" spcFirstLastPara="1" rIns="91425" wrap="square" tIns="91425">
+          <a:bodyPr spcFirstLastPara="1" wrap="square" lIns="91425" tIns="91425" rIns="91425" bIns="91425" anchor="t" anchorCtr="0">
             <a:normAutofit/>
           </a:bodyPr>
           <a:lstStyle/>
           <a:p>
-            <a:pPr indent="0" lvl="0" marL="0" rtl="0" algn="l">
+            <a:pPr marL="0" lvl="0" indent="0" algn="l" rtl="0">
               <a:spcBef>
                 <a:spcPts val="0"/>
               </a:spcBef>
@@ -10492,12 +10547,12 @@
           </a:ln>
         </p:spPr>
         <p:txBody>
-          <a:bodyPr anchorCtr="0" anchor="t" bIns="91425" lIns="91425" spcFirstLastPara="1" rIns="91425" wrap="square" tIns="91425">
+          <a:bodyPr spcFirstLastPara="1" wrap="square" lIns="91425" tIns="91425" rIns="91425" bIns="91425" anchor="t" anchorCtr="0">
             <a:noAutofit/>
           </a:bodyPr>
           <a:lstStyle/>
           <a:p>
-            <a:pPr indent="0" lvl="0" marL="0" rtl="0" algn="l">
+            <a:pPr marL="0" lvl="0" indent="0" algn="l" rtl="0">
               <a:spcBef>
                 <a:spcPts val="0"/>
               </a:spcBef>
@@ -10507,7 +10562,7 @@
               <a:buNone/>
             </a:pPr>
             <a:r>
-              <a:rPr b="1" lang="en" sz="1300" u="sng">
+              <a:rPr lang="en" sz="1300" b="1" u="sng">
                 <a:solidFill>
                   <a:schemeClr val="lt1"/>
                 </a:solidFill>
@@ -10518,7 +10573,7 @@
               </a:rPr>
               <a:t>Metrics</a:t>
             </a:r>
-            <a:endParaRPr b="1" sz="1300" u="sng">
+            <a:endParaRPr sz="1300" b="1" u="sng">
               <a:solidFill>
                 <a:schemeClr val="lt1"/>
               </a:solidFill>
@@ -10529,7 +10584,7 @@
             </a:endParaRPr>
           </a:p>
           <a:p>
-            <a:pPr indent="0" lvl="0" marL="0" rtl="0" algn="l">
+            <a:pPr marL="0" lvl="0" indent="0" algn="l" rtl="0">
               <a:spcBef>
                 <a:spcPts val="0"/>
               </a:spcBef>
@@ -10538,10 +10593,7 @@
               </a:spcAft>
               <a:buNone/>
             </a:pPr>
-            <a:r>
-              <a:t/>
-            </a:r>
-            <a:endParaRPr b="1" sz="1300" u="sng">
+            <a:endParaRPr sz="1300" b="1" u="sng">
               <a:solidFill>
                 <a:schemeClr val="lt1"/>
               </a:solidFill>
@@ -10552,7 +10604,7 @@
             </a:endParaRPr>
           </a:p>
           <a:p>
-            <a:pPr indent="-304800" lvl="0" marL="457200" rtl="0" algn="l">
+            <a:pPr marL="457200" lvl="0" indent="-304800" algn="l" rtl="0">
               <a:spcBef>
                 <a:spcPts val="0"/>
               </a:spcBef>
@@ -10567,7 +10619,7 @@
               <a:buChar char="●"/>
             </a:pPr>
             <a:r>
-              <a:rPr b="1" lang="en" sz="1200">
+              <a:rPr lang="en" sz="1200" b="1">
                 <a:solidFill>
                   <a:schemeClr val="lt1"/>
                 </a:solidFill>
@@ -10591,7 +10643,7 @@
               <a:t>: </a:t>
             </a:r>
             <a:r>
-              <a:rPr i="1" lang="en" sz="1100">
+              <a:rPr lang="en" sz="1100" i="1">
                 <a:solidFill>
                   <a:srgbClr val="B7B7B7"/>
                 </a:solidFill>
@@ -10602,7 +10654,7 @@
               </a:rPr>
               <a:t>Assesses whether the retrieval step returns the correct supporting documents.</a:t>
             </a:r>
-            <a:endParaRPr i="1" sz="1100">
+            <a:endParaRPr sz="1100" i="1">
               <a:solidFill>
                 <a:srgbClr val="B7B7B7"/>
               </a:solidFill>
@@ -10613,7 +10665,7 @@
             </a:endParaRPr>
           </a:p>
           <a:p>
-            <a:pPr indent="-304800" lvl="0" marL="457200" rtl="0" algn="l">
+            <a:pPr marL="457200" lvl="0" indent="-304800" algn="l" rtl="0">
               <a:spcBef>
                 <a:spcPts val="0"/>
               </a:spcBef>
@@ -10628,7 +10680,7 @@
               <a:buChar char="●"/>
             </a:pPr>
             <a:r>
-              <a:rPr b="1" lang="en" sz="1200">
+              <a:rPr lang="en" sz="1200" b="1">
                 <a:solidFill>
                   <a:schemeClr val="lt1"/>
                 </a:solidFill>
@@ -10652,7 +10704,7 @@
               <a:t>: </a:t>
             </a:r>
             <a:r>
-              <a:rPr i="1" lang="en" sz="1100">
+              <a:rPr lang="en" sz="1100" i="1">
                 <a:solidFill>
                   <a:srgbClr val="B7B7B7"/>
                 </a:solidFill>
@@ -10663,7 +10715,7 @@
               </a:rPr>
               <a:t>Checks if the generated answer is grounded in the retrieved context (i.e., not hallucinated).</a:t>
             </a:r>
-            <a:endParaRPr i="1" sz="1100">
+            <a:endParaRPr sz="1100" i="1">
               <a:solidFill>
                 <a:srgbClr val="B7B7B7"/>
               </a:solidFill>
@@ -10674,7 +10726,7 @@
             </a:endParaRPr>
           </a:p>
           <a:p>
-            <a:pPr indent="-304800" lvl="0" marL="457200" rtl="0" algn="l">
+            <a:pPr marL="457200" lvl="0" indent="-304800" algn="l" rtl="0">
               <a:spcBef>
                 <a:spcPts val="0"/>
               </a:spcBef>
@@ -10689,7 +10741,7 @@
               <a:buChar char="●"/>
             </a:pPr>
             <a:r>
-              <a:rPr b="1" lang="en" sz="1200">
+              <a:rPr lang="en" sz="1200" b="1">
                 <a:solidFill>
                   <a:schemeClr val="lt1"/>
                 </a:solidFill>
@@ -10713,7 +10765,7 @@
               <a:t>: </a:t>
             </a:r>
             <a:r>
-              <a:rPr i="1" lang="en" sz="1100">
+              <a:rPr lang="en" sz="1100" i="1">
                 <a:solidFill>
                   <a:srgbClr val="B7B7B7"/>
                 </a:solidFill>
@@ -10724,7 +10776,7 @@
               </a:rPr>
               <a:t>Evaluates how relevant the generated answer is to the user’s question.</a:t>
             </a:r>
-            <a:endParaRPr i="1" sz="1100">
+            <a:endParaRPr sz="1100" i="1">
               <a:solidFill>
                 <a:srgbClr val="B7B7B7"/>
               </a:solidFill>
@@ -10735,7 +10787,7 @@
             </a:endParaRPr>
           </a:p>
           <a:p>
-            <a:pPr indent="-304800" lvl="0" marL="457200" rtl="0" algn="l">
+            <a:pPr marL="457200" lvl="0" indent="-304800" algn="l" rtl="0">
               <a:spcBef>
                 <a:spcPts val="0"/>
               </a:spcBef>
@@ -10750,7 +10802,7 @@
               <a:buChar char="●"/>
             </a:pPr>
             <a:r>
-              <a:rPr b="1" lang="en" sz="1200">
+              <a:rPr lang="en" sz="1200" b="1">
                 <a:solidFill>
                   <a:schemeClr val="lt1"/>
                 </a:solidFill>
@@ -10774,7 +10826,7 @@
               <a:t>: </a:t>
             </a:r>
             <a:r>
-              <a:rPr i="1" lang="en" sz="1100">
+              <a:rPr lang="en" sz="1100" i="1">
                 <a:solidFill>
                   <a:srgbClr val="B7B7B7"/>
                 </a:solidFill>
@@ -10785,7 +10837,7 @@
               </a:rPr>
               <a:t>Measures if the answer is factually correct, often compared to a ground-truth answer.</a:t>
             </a:r>
-            <a:endParaRPr i="1" sz="1100">
+            <a:endParaRPr sz="1100" i="1">
               <a:solidFill>
                 <a:srgbClr val="B7B7B7"/>
               </a:solidFill>
@@ -10805,8 +10857,485 @@
 </p:sld>
 </file>
 
+<file path=ppt/slides/slide8.xml><?xml version="1.0" encoding="utf-8"?>
+<p:sld xmlns:a="http://schemas.openxmlformats.org/drawingml/2006/main" xmlns:r="http://schemas.openxmlformats.org/officeDocument/2006/relationships" xmlns:p="http://schemas.openxmlformats.org/presentationml/2006/main">
+  <p:cSld>
+    <p:spTree>
+      <p:nvGrpSpPr>
+        <p:cNvPr id="1" name=""/>
+        <p:cNvGrpSpPr/>
+        <p:nvPr/>
+      </p:nvGrpSpPr>
+      <p:grpSpPr>
+        <a:xfrm>
+          <a:off x="0" y="0"/>
+          <a:ext cx="0" cy="0"/>
+          <a:chOff x="0" y="0"/>
+          <a:chExt cx="0" cy="0"/>
+        </a:xfrm>
+      </p:grpSpPr>
+      <p:sp>
+        <p:nvSpPr>
+          <p:cNvPr id="3" name="Szöveg helye 2">
+            <a:extLst>
+              <a:ext uri="{FF2B5EF4-FFF2-40B4-BE49-F238E27FC236}">
+                <a16:creationId xmlns:a16="http://schemas.microsoft.com/office/drawing/2014/main" id="{599BBDD1-7716-EBC2-394B-489C941E4017}"/>
+              </a:ext>
+            </a:extLst>
+          </p:cNvPr>
+          <p:cNvSpPr>
+            <a:spLocks noGrp="1"/>
+          </p:cNvSpPr>
+          <p:nvPr>
+            <p:ph type="body" idx="1"/>
+          </p:nvPr>
+        </p:nvSpPr>
+        <p:spPr>
+          <a:xfrm>
+            <a:off x="1324714" y="288479"/>
+            <a:ext cx="7234843" cy="445586"/>
+          </a:xfrm>
+        </p:spPr>
+        <p:txBody>
+          <a:bodyPr>
+            <a:noAutofit/>
+          </a:bodyPr>
+          <a:lstStyle/>
+          <a:p>
+            <a:pPr marL="146050" indent="0">
+              <a:lnSpc>
+                <a:spcPct val="114999"/>
+              </a:lnSpc>
+              <a:buNone/>
+            </a:pPr>
+            <a:r>
+              <a:rPr lang="hu-HU" sz="2400">
+                <a:latin typeface="Montserrat"/>
+              </a:rPr>
+              <a:t>Admin UI for reservation management</a:t>
+            </a:r>
+          </a:p>
+        </p:txBody>
+      </p:sp>
+      <p:pic>
+        <p:nvPicPr>
+          <p:cNvPr id="5" name="Kép 4">
+            <a:extLst>
+              <a:ext uri="{FF2B5EF4-FFF2-40B4-BE49-F238E27FC236}">
+                <a16:creationId xmlns:a16="http://schemas.microsoft.com/office/drawing/2014/main" id="{C9E46B4A-BF99-2506-5532-5283BE6DAEF4}"/>
+              </a:ext>
+            </a:extLst>
+          </p:cNvPr>
+          <p:cNvPicPr>
+            <a:picLocks noChangeAspect="1"/>
+          </p:cNvPicPr>
+          <p:nvPr/>
+        </p:nvPicPr>
+        <p:blipFill>
+          <a:blip r:embed="rId2"/>
+          <a:stretch>
+            <a:fillRect/>
+          </a:stretch>
+        </p:blipFill>
+        <p:spPr>
+          <a:xfrm>
+            <a:off x="1690453" y="1039585"/>
+            <a:ext cx="6508765" cy="3804558"/>
+          </a:xfrm>
+          <a:prstGeom prst="rect">
+            <a:avLst/>
+          </a:prstGeom>
+        </p:spPr>
+      </p:pic>
+    </p:spTree>
+    <p:extLst>
+      <p:ext uri="{BB962C8B-B14F-4D97-AF65-F5344CB8AC3E}">
+        <p14:creationId xmlns:p14="http://schemas.microsoft.com/office/powerpoint/2010/main" val="858644780"/>
+      </p:ext>
+    </p:extLst>
+  </p:cSld>
+  <p:clrMapOvr>
+    <a:masterClrMapping/>
+  </p:clrMapOvr>
+</p:sld>
+</file>
+
+<file path=ppt/slides/slide9.xml><?xml version="1.0" encoding="utf-8"?>
+<p:sld xmlns:a="http://schemas.openxmlformats.org/drawingml/2006/main" xmlns:r="http://schemas.openxmlformats.org/officeDocument/2006/relationships" xmlns:p="http://schemas.openxmlformats.org/presentationml/2006/main">
+  <p:cSld>
+    <p:spTree>
+      <p:nvGrpSpPr>
+        <p:cNvPr id="1" name=""/>
+        <p:cNvGrpSpPr/>
+        <p:nvPr/>
+      </p:nvGrpSpPr>
+      <p:grpSpPr>
+        <a:xfrm>
+          <a:off x="0" y="0"/>
+          <a:ext cx="0" cy="0"/>
+          <a:chOff x="0" y="0"/>
+          <a:chExt cx="0" cy="0"/>
+        </a:xfrm>
+      </p:grpSpPr>
+      <p:sp>
+        <p:nvSpPr>
+          <p:cNvPr id="2" name="Cím 1">
+            <a:extLst>
+              <a:ext uri="{FF2B5EF4-FFF2-40B4-BE49-F238E27FC236}">
+                <a16:creationId xmlns:a16="http://schemas.microsoft.com/office/drawing/2014/main" id="{20F39B9E-1A4D-9820-6FB2-8F548147B67C}"/>
+              </a:ext>
+            </a:extLst>
+          </p:cNvPr>
+          <p:cNvSpPr>
+            <a:spLocks noGrp="1"/>
+          </p:cNvSpPr>
+          <p:nvPr>
+            <p:ph type="title"/>
+          </p:nvPr>
+        </p:nvSpPr>
+        <p:spPr>
+          <a:xfrm>
+            <a:off x="1471671" y="328435"/>
+            <a:ext cx="7038900" cy="560316"/>
+          </a:xfrm>
+        </p:spPr>
+        <p:txBody>
+          <a:bodyPr/>
+          <a:lstStyle/>
+          <a:p>
+            <a:r>
+              <a:rPr lang="hu-HU"/>
+              <a:t>Admin UI for reservation approval</a:t>
+            </a:r>
+          </a:p>
+        </p:txBody>
+      </p:sp>
+      <p:pic>
+        <p:nvPicPr>
+          <p:cNvPr id="4" name="Kép 3">
+            <a:extLst>
+              <a:ext uri="{FF2B5EF4-FFF2-40B4-BE49-F238E27FC236}">
+                <a16:creationId xmlns:a16="http://schemas.microsoft.com/office/drawing/2014/main" id="{4188C70F-7A91-2417-9D3C-145C537CABF3}"/>
+              </a:ext>
+            </a:extLst>
+          </p:cNvPr>
+          <p:cNvPicPr>
+            <a:picLocks noChangeAspect="1"/>
+          </p:cNvPicPr>
+          <p:nvPr/>
+        </p:nvPicPr>
+        <p:blipFill>
+          <a:blip r:embed="rId2"/>
+          <a:stretch>
+            <a:fillRect/>
+          </a:stretch>
+        </p:blipFill>
+        <p:spPr>
+          <a:xfrm>
+            <a:off x="1377042" y="951968"/>
+            <a:ext cx="7407729" cy="3245006"/>
+          </a:xfrm>
+          <a:prstGeom prst="rect">
+            <a:avLst/>
+          </a:prstGeom>
+        </p:spPr>
+      </p:pic>
+    </p:spTree>
+    <p:extLst>
+      <p:ext uri="{BB962C8B-B14F-4D97-AF65-F5344CB8AC3E}">
+        <p14:creationId xmlns:p14="http://schemas.microsoft.com/office/powerpoint/2010/main" val="464264814"/>
+      </p:ext>
+    </p:extLst>
+  </p:cSld>
+  <p:clrMapOvr>
+    <a:masterClrMapping/>
+  </p:clrMapOvr>
+</p:sld>
+</file>
+
 <file path=ppt/theme/theme1.xml><?xml version="1.0" encoding="utf-8"?>
-<a:theme xmlns:a="http://schemas.openxmlformats.org/drawingml/2006/main" xmlns:r="http://schemas.openxmlformats.org/officeDocument/2006/relationships">
+<a:theme xmlns:a="http://schemas.openxmlformats.org/drawingml/2006/main" name="Focus">
+  <a:themeElements>
+    <a:clrScheme name="Focus">
+      <a:dk1>
+        <a:srgbClr val="1B212C"/>
+      </a:dk1>
+      <a:lt1>
+        <a:srgbClr val="FFFFFF"/>
+      </a:lt1>
+      <a:dk2>
+        <a:srgbClr val="D9D9D9"/>
+      </a:dk2>
+      <a:lt2>
+        <a:srgbClr val="82C7A5"/>
+      </a:lt2>
+      <a:accent1>
+        <a:srgbClr val="0145AC"/>
+      </a:accent1>
+      <a:accent2>
+        <a:srgbClr val="EECE1A"/>
+      </a:accent2>
+      <a:accent3>
+        <a:srgbClr val="4E5567"/>
+      </a:accent3>
+      <a:accent4>
+        <a:srgbClr val="F4D6AD"/>
+      </a:accent4>
+      <a:accent5>
+        <a:srgbClr val="7890CD"/>
+      </a:accent5>
+      <a:accent6>
+        <a:srgbClr val="F15E22"/>
+      </a:accent6>
+      <a:hlink>
+        <a:srgbClr val="7890CD"/>
+      </a:hlink>
+      <a:folHlink>
+        <a:srgbClr val="7890CD"/>
+      </a:folHlink>
+    </a:clrScheme>
+    <a:fontScheme name="Office">
+      <a:majorFont>
+        <a:latin typeface="Arial"/>
+        <a:ea typeface=""/>
+        <a:cs typeface=""/>
+        <a:font script="Jpan" typeface="ＭＳ Ｐゴシック"/>
+        <a:font script="Hang" typeface="맑은 고딕"/>
+        <a:font script="Hans" typeface="宋体"/>
+        <a:font script="Hant" typeface="新細明體"/>
+        <a:font script="Arab" typeface="Times New Roman"/>
+        <a:font script="Hebr" typeface="Times New Roman"/>
+        <a:font script="Thai" typeface="Angsana New"/>
+        <a:font script="Ethi" typeface="Nyala"/>
+        <a:font script="Beng" typeface="Vrinda"/>
+        <a:font script="Gujr" typeface="Shruti"/>
+        <a:font script="Khmr" typeface="MoolBoran"/>
+        <a:font script="Knda" typeface="Tunga"/>
+        <a:font script="Guru" typeface="Raavi"/>
+        <a:font script="Cans" typeface="Euphemia"/>
+        <a:font script="Cher" typeface="Plantagenet Cherokee"/>
+        <a:font script="Yiii" typeface="Microsoft Yi Baiti"/>
+        <a:font script="Tibt" typeface="Microsoft Himalaya"/>
+        <a:font script="Thaa" typeface="MV Boli"/>
+        <a:font script="Deva" typeface="Mangal"/>
+        <a:font script="Telu" typeface="Gautami"/>
+        <a:font script="Taml" typeface="Latha"/>
+        <a:font script="Syrc" typeface="Estrangelo Edessa"/>
+        <a:font script="Orya" typeface="Kalinga"/>
+        <a:font script="Mlym" typeface="Kartika"/>
+        <a:font script="Laoo" typeface="DokChampa"/>
+        <a:font script="Sinh" typeface="Iskoola Pota"/>
+        <a:font script="Mong" typeface="Mongolian Baiti"/>
+        <a:font script="Viet" typeface="Times New Roman"/>
+        <a:font script="Uigh" typeface="Microsoft Uighur"/>
+        <a:font script="Geor" typeface="Sylfaen"/>
+      </a:majorFont>
+      <a:minorFont>
+        <a:latin typeface="Arial"/>
+        <a:ea typeface=""/>
+        <a:cs typeface=""/>
+        <a:font script="Jpan" typeface="ＭＳ Ｐゴシック"/>
+        <a:font script="Hang" typeface="맑은 고딕"/>
+        <a:font script="Hans" typeface="宋体"/>
+        <a:font script="Hant" typeface="新細明體"/>
+        <a:font script="Arab" typeface="Arial"/>
+        <a:font script="Hebr" typeface="Arial"/>
+        <a:font script="Thai" typeface="Cordia New"/>
+        <a:font script="Ethi" typeface="Nyala"/>
+        <a:font script="Beng" typeface="Vrinda"/>
+        <a:font script="Gujr" typeface="Shruti"/>
+        <a:font script="Khmr" typeface="DaunPenh"/>
+        <a:font script="Knda" typeface="Tunga"/>
+        <a:font script="Guru" typeface="Raavi"/>
+        <a:font script="Cans" typeface="Euphemia"/>
+        <a:font script="Cher" typeface="Plantagenet Cherokee"/>
+        <a:font script="Yiii" typeface="Microsoft Yi Baiti"/>
+        <a:font script="Tibt" typeface="Microsoft Himalaya"/>
+        <a:font script="Thaa" typeface="MV Boli"/>
+        <a:font script="Deva" typeface="Mangal"/>
+        <a:font script="Telu" typeface="Gautami"/>
+        <a:font script="Taml" typeface="Latha"/>
+        <a:font script="Syrc" typeface="Estrangelo Edessa"/>
+        <a:font script="Orya" typeface="Kalinga"/>
+        <a:font script="Mlym" typeface="Kartika"/>
+        <a:font script="Laoo" typeface="DokChampa"/>
+        <a:font script="Sinh" typeface="Iskoola Pota"/>
+        <a:font script="Mong" typeface="Mongolian Baiti"/>
+        <a:font script="Viet" typeface="Arial"/>
+        <a:font script="Uigh" typeface="Microsoft Uighur"/>
+        <a:font script="Geor" typeface="Sylfaen"/>
+      </a:minorFont>
+    </a:fontScheme>
+    <a:fmtScheme name="Office">
+      <a:fillStyleLst>
+        <a:solidFill>
+          <a:schemeClr val="phClr"/>
+        </a:solidFill>
+        <a:gradFill rotWithShape="1">
+          <a:gsLst>
+            <a:gs pos="0">
+              <a:schemeClr val="phClr">
+                <a:tint val="50000"/>
+                <a:satMod val="300000"/>
+              </a:schemeClr>
+            </a:gs>
+            <a:gs pos="35000">
+              <a:schemeClr val="phClr">
+                <a:tint val="37000"/>
+                <a:satMod val="300000"/>
+              </a:schemeClr>
+            </a:gs>
+            <a:gs pos="100000">
+              <a:schemeClr val="phClr">
+                <a:tint val="15000"/>
+                <a:satMod val="350000"/>
+              </a:schemeClr>
+            </a:gs>
+          </a:gsLst>
+          <a:lin ang="16200000" scaled="1"/>
+        </a:gradFill>
+        <a:gradFill rotWithShape="1">
+          <a:gsLst>
+            <a:gs pos="0">
+              <a:schemeClr val="phClr">
+                <a:tint val="100000"/>
+                <a:shade val="100000"/>
+                <a:satMod val="130000"/>
+              </a:schemeClr>
+            </a:gs>
+            <a:gs pos="100000">
+              <a:schemeClr val="phClr">
+                <a:tint val="50000"/>
+                <a:shade val="100000"/>
+                <a:satMod val="350000"/>
+              </a:schemeClr>
+            </a:gs>
+          </a:gsLst>
+          <a:lin ang="16200000" scaled="0"/>
+        </a:gradFill>
+      </a:fillStyleLst>
+      <a:lnStyleLst>
+        <a:ln w="9525" cap="flat" cmpd="sng" algn="ctr">
+          <a:solidFill>
+            <a:schemeClr val="phClr">
+              <a:shade val="95000"/>
+              <a:satMod val="105000"/>
+            </a:schemeClr>
+          </a:solidFill>
+          <a:prstDash val="solid"/>
+        </a:ln>
+        <a:ln w="25400" cap="flat" cmpd="sng" algn="ctr">
+          <a:solidFill>
+            <a:schemeClr val="phClr"/>
+          </a:solidFill>
+          <a:prstDash val="solid"/>
+        </a:ln>
+        <a:ln w="38100" cap="flat" cmpd="sng" algn="ctr">
+          <a:solidFill>
+            <a:schemeClr val="phClr"/>
+          </a:solidFill>
+          <a:prstDash val="solid"/>
+        </a:ln>
+      </a:lnStyleLst>
+      <a:effectStyleLst>
+        <a:effectStyle>
+          <a:effectLst>
+            <a:outerShdw blurRad="40000" dist="20000" dir="5400000" rotWithShape="0">
+              <a:srgbClr val="000000">
+                <a:alpha val="38000"/>
+              </a:srgbClr>
+            </a:outerShdw>
+          </a:effectLst>
+        </a:effectStyle>
+        <a:effectStyle>
+          <a:effectLst>
+            <a:outerShdw blurRad="40000" dist="23000" dir="5400000" rotWithShape="0">
+              <a:srgbClr val="000000">
+                <a:alpha val="35000"/>
+              </a:srgbClr>
+            </a:outerShdw>
+          </a:effectLst>
+        </a:effectStyle>
+        <a:effectStyle>
+          <a:effectLst>
+            <a:outerShdw blurRad="40000" dist="23000" dir="5400000" rotWithShape="0">
+              <a:srgbClr val="000000">
+                <a:alpha val="35000"/>
+              </a:srgbClr>
+            </a:outerShdw>
+          </a:effectLst>
+          <a:scene3d>
+            <a:camera prst="orthographicFront">
+              <a:rot lat="0" lon="0" rev="0"/>
+            </a:camera>
+            <a:lightRig rig="threePt" dir="t">
+              <a:rot lat="0" lon="0" rev="1200000"/>
+            </a:lightRig>
+          </a:scene3d>
+          <a:sp3d>
+            <a:bevelT w="63500" h="25400"/>
+          </a:sp3d>
+        </a:effectStyle>
+      </a:effectStyleLst>
+      <a:bgFillStyleLst>
+        <a:solidFill>
+          <a:schemeClr val="phClr"/>
+        </a:solidFill>
+        <a:gradFill rotWithShape="1">
+          <a:gsLst>
+            <a:gs pos="0">
+              <a:schemeClr val="phClr">
+                <a:tint val="40000"/>
+                <a:satMod val="350000"/>
+              </a:schemeClr>
+            </a:gs>
+            <a:gs pos="40000">
+              <a:schemeClr val="phClr">
+                <a:tint val="45000"/>
+                <a:shade val="99000"/>
+                <a:satMod val="350000"/>
+              </a:schemeClr>
+            </a:gs>
+            <a:gs pos="100000">
+              <a:schemeClr val="phClr">
+                <a:shade val="20000"/>
+                <a:satMod val="255000"/>
+              </a:schemeClr>
+            </a:gs>
+          </a:gsLst>
+          <a:path path="circle">
+            <a:fillToRect l="50000" t="-80000" r="50000" b="180000"/>
+          </a:path>
+        </a:gradFill>
+        <a:gradFill rotWithShape="1">
+          <a:gsLst>
+            <a:gs pos="0">
+              <a:schemeClr val="phClr">
+                <a:tint val="80000"/>
+                <a:satMod val="300000"/>
+              </a:schemeClr>
+            </a:gs>
+            <a:gs pos="100000">
+              <a:schemeClr val="phClr">
+                <a:shade val="30000"/>
+                <a:satMod val="200000"/>
+              </a:schemeClr>
+            </a:gs>
+          </a:gsLst>
+          <a:path path="circle">
+            <a:fillToRect l="50000" t="50000" r="50000" b="50000"/>
+          </a:path>
+        </a:gradFill>
+      </a:bgFillStyleLst>
+    </a:fmtScheme>
+  </a:themeElements>
+  <a:objectDefaults/>
+  <a:extraClrSchemeLst/>
+</a:theme>
+</file>
+
+<file path=ppt/theme/theme2.xml><?xml version="1.0" encoding="utf-8"?>
+<a:theme xmlns:a="http://schemas.openxmlformats.org/drawingml/2006/main">
   <a:themeElements>
     <a:clrScheme name="Default">
       <a:dk1>
@@ -11081,284 +11610,7 @@
       </a:bgFillStyleLst>
     </a:fmtScheme>
   </a:themeElements>
-</a:theme>
-</file>
-
-<file path=ppt/theme/theme2.xml><?xml version="1.0" encoding="utf-8"?>
-<a:theme xmlns:a="http://schemas.openxmlformats.org/drawingml/2006/main" xmlns:r="http://schemas.openxmlformats.org/officeDocument/2006/relationships" name="Focus">
-  <a:themeElements>
-    <a:clrScheme name="Focus">
-      <a:dk1>
-        <a:srgbClr val="1B212C"/>
-      </a:dk1>
-      <a:lt1>
-        <a:srgbClr val="FFFFFF"/>
-      </a:lt1>
-      <a:dk2>
-        <a:srgbClr val="D9D9D9"/>
-      </a:dk2>
-      <a:lt2>
-        <a:srgbClr val="82C7A5"/>
-      </a:lt2>
-      <a:accent1>
-        <a:srgbClr val="0145AC"/>
-      </a:accent1>
-      <a:accent2>
-        <a:srgbClr val="EECE1A"/>
-      </a:accent2>
-      <a:accent3>
-        <a:srgbClr val="4E5567"/>
-      </a:accent3>
-      <a:accent4>
-        <a:srgbClr val="F4D6AD"/>
-      </a:accent4>
-      <a:accent5>
-        <a:srgbClr val="7890CD"/>
-      </a:accent5>
-      <a:accent6>
-        <a:srgbClr val="F15E22"/>
-      </a:accent6>
-      <a:hlink>
-        <a:srgbClr val="7890CD"/>
-      </a:hlink>
-      <a:folHlink>
-        <a:srgbClr val="7890CD"/>
-      </a:folHlink>
-    </a:clrScheme>
-    <a:fontScheme name="Office">
-      <a:majorFont>
-        <a:latin typeface="Arial"/>
-        <a:ea typeface=""/>
-        <a:cs typeface=""/>
-        <a:font script="Jpan" typeface="ＭＳ Ｐゴシック"/>
-        <a:font script="Hang" typeface="맑은 고딕"/>
-        <a:font script="Hans" typeface="宋体"/>
-        <a:font script="Hant" typeface="新細明體"/>
-        <a:font script="Arab" typeface="Times New Roman"/>
-        <a:font script="Hebr" typeface="Times New Roman"/>
-        <a:font script="Thai" typeface="Angsana New"/>
-        <a:font script="Ethi" typeface="Nyala"/>
-        <a:font script="Beng" typeface="Vrinda"/>
-        <a:font script="Gujr" typeface="Shruti"/>
-        <a:font script="Khmr" typeface="MoolBoran"/>
-        <a:font script="Knda" typeface="Tunga"/>
-        <a:font script="Guru" typeface="Raavi"/>
-        <a:font script="Cans" typeface="Euphemia"/>
-        <a:font script="Cher" typeface="Plantagenet Cherokee"/>
-        <a:font script="Yiii" typeface="Microsoft Yi Baiti"/>
-        <a:font script="Tibt" typeface="Microsoft Himalaya"/>
-        <a:font script="Thaa" typeface="MV Boli"/>
-        <a:font script="Deva" typeface="Mangal"/>
-        <a:font script="Telu" typeface="Gautami"/>
-        <a:font script="Taml" typeface="Latha"/>
-        <a:font script="Syrc" typeface="Estrangelo Edessa"/>
-        <a:font script="Orya" typeface="Kalinga"/>
-        <a:font script="Mlym" typeface="Kartika"/>
-        <a:font script="Laoo" typeface="DokChampa"/>
-        <a:font script="Sinh" typeface="Iskoola Pota"/>
-        <a:font script="Mong" typeface="Mongolian Baiti"/>
-        <a:font script="Viet" typeface="Times New Roman"/>
-        <a:font script="Uigh" typeface="Microsoft Uighur"/>
-        <a:font script="Geor" typeface="Sylfaen"/>
-      </a:majorFont>
-      <a:minorFont>
-        <a:latin typeface="Arial"/>
-        <a:ea typeface=""/>
-        <a:cs typeface=""/>
-        <a:font script="Jpan" typeface="ＭＳ Ｐゴシック"/>
-        <a:font script="Hang" typeface="맑은 고딕"/>
-        <a:font script="Hans" typeface="宋体"/>
-        <a:font script="Hant" typeface="新細明體"/>
-        <a:font script="Arab" typeface="Arial"/>
-        <a:font script="Hebr" typeface="Arial"/>
-        <a:font script="Thai" typeface="Cordia New"/>
-        <a:font script="Ethi" typeface="Nyala"/>
-        <a:font script="Beng" typeface="Vrinda"/>
-        <a:font script="Gujr" typeface="Shruti"/>
-        <a:font script="Khmr" typeface="DaunPenh"/>
-        <a:font script="Knda" typeface="Tunga"/>
-        <a:font script="Guru" typeface="Raavi"/>
-        <a:font script="Cans" typeface="Euphemia"/>
-        <a:font script="Cher" typeface="Plantagenet Cherokee"/>
-        <a:font script="Yiii" typeface="Microsoft Yi Baiti"/>
-        <a:font script="Tibt" typeface="Microsoft Himalaya"/>
-        <a:font script="Thaa" typeface="MV Boli"/>
-        <a:font script="Deva" typeface="Mangal"/>
-        <a:font script="Telu" typeface="Gautami"/>
-        <a:font script="Taml" typeface="Latha"/>
-        <a:font script="Syrc" typeface="Estrangelo Edessa"/>
-        <a:font script="Orya" typeface="Kalinga"/>
-        <a:font script="Mlym" typeface="Kartika"/>
-        <a:font script="Laoo" typeface="DokChampa"/>
-        <a:font script="Sinh" typeface="Iskoola Pota"/>
-        <a:font script="Mong" typeface="Mongolian Baiti"/>
-        <a:font script="Viet" typeface="Arial"/>
-        <a:font script="Uigh" typeface="Microsoft Uighur"/>
-        <a:font script="Geor" typeface="Sylfaen"/>
-      </a:minorFont>
-    </a:fontScheme>
-    <a:fmtScheme name="Office">
-      <a:fillStyleLst>
-        <a:solidFill>
-          <a:schemeClr val="phClr"/>
-        </a:solidFill>
-        <a:gradFill rotWithShape="1">
-          <a:gsLst>
-            <a:gs pos="0">
-              <a:schemeClr val="phClr">
-                <a:tint val="50000"/>
-                <a:satMod val="300000"/>
-              </a:schemeClr>
-            </a:gs>
-            <a:gs pos="35000">
-              <a:schemeClr val="phClr">
-                <a:tint val="37000"/>
-                <a:satMod val="300000"/>
-              </a:schemeClr>
-            </a:gs>
-            <a:gs pos="100000">
-              <a:schemeClr val="phClr">
-                <a:tint val="15000"/>
-                <a:satMod val="350000"/>
-              </a:schemeClr>
-            </a:gs>
-          </a:gsLst>
-          <a:lin ang="16200000" scaled="1"/>
-        </a:gradFill>
-        <a:gradFill rotWithShape="1">
-          <a:gsLst>
-            <a:gs pos="0">
-              <a:schemeClr val="phClr">
-                <a:tint val="100000"/>
-                <a:shade val="100000"/>
-                <a:satMod val="130000"/>
-              </a:schemeClr>
-            </a:gs>
-            <a:gs pos="100000">
-              <a:schemeClr val="phClr">
-                <a:tint val="50000"/>
-                <a:shade val="100000"/>
-                <a:satMod val="350000"/>
-              </a:schemeClr>
-            </a:gs>
-          </a:gsLst>
-          <a:lin ang="16200000" scaled="0"/>
-        </a:gradFill>
-      </a:fillStyleLst>
-      <a:lnStyleLst>
-        <a:ln w="9525" cap="flat" cmpd="sng" algn="ctr">
-          <a:solidFill>
-            <a:schemeClr val="phClr">
-              <a:shade val="95000"/>
-              <a:satMod val="105000"/>
-            </a:schemeClr>
-          </a:solidFill>
-          <a:prstDash val="solid"/>
-        </a:ln>
-        <a:ln w="25400" cap="flat" cmpd="sng" algn="ctr">
-          <a:solidFill>
-            <a:schemeClr val="phClr"/>
-          </a:solidFill>
-          <a:prstDash val="solid"/>
-        </a:ln>
-        <a:ln w="38100" cap="flat" cmpd="sng" algn="ctr">
-          <a:solidFill>
-            <a:schemeClr val="phClr"/>
-          </a:solidFill>
-          <a:prstDash val="solid"/>
-        </a:ln>
-      </a:lnStyleLst>
-      <a:effectStyleLst>
-        <a:effectStyle>
-          <a:effectLst>
-            <a:outerShdw blurRad="40000" dist="20000" dir="5400000" rotWithShape="0">
-              <a:srgbClr val="000000">
-                <a:alpha val="38000"/>
-              </a:srgbClr>
-            </a:outerShdw>
-          </a:effectLst>
-        </a:effectStyle>
-        <a:effectStyle>
-          <a:effectLst>
-            <a:outerShdw blurRad="40000" dist="23000" dir="5400000" rotWithShape="0">
-              <a:srgbClr val="000000">
-                <a:alpha val="35000"/>
-              </a:srgbClr>
-            </a:outerShdw>
-          </a:effectLst>
-        </a:effectStyle>
-        <a:effectStyle>
-          <a:effectLst>
-            <a:outerShdw blurRad="40000" dist="23000" dir="5400000" rotWithShape="0">
-              <a:srgbClr val="000000">
-                <a:alpha val="35000"/>
-              </a:srgbClr>
-            </a:outerShdw>
-          </a:effectLst>
-          <a:scene3d>
-            <a:camera prst="orthographicFront">
-              <a:rot lat="0" lon="0" rev="0"/>
-            </a:camera>
-            <a:lightRig rig="threePt" dir="t">
-              <a:rot lat="0" lon="0" rev="1200000"/>
-            </a:lightRig>
-          </a:scene3d>
-          <a:sp3d>
-            <a:bevelT w="63500" h="25400"/>
-          </a:sp3d>
-        </a:effectStyle>
-      </a:effectStyleLst>
-      <a:bgFillStyleLst>
-        <a:solidFill>
-          <a:schemeClr val="phClr"/>
-        </a:solidFill>
-        <a:gradFill rotWithShape="1">
-          <a:gsLst>
-            <a:gs pos="0">
-              <a:schemeClr val="phClr">
-                <a:tint val="40000"/>
-                <a:satMod val="350000"/>
-              </a:schemeClr>
-            </a:gs>
-            <a:gs pos="40000">
-              <a:schemeClr val="phClr">
-                <a:tint val="45000"/>
-                <a:shade val="99000"/>
-                <a:satMod val="350000"/>
-              </a:schemeClr>
-            </a:gs>
-            <a:gs pos="100000">
-              <a:schemeClr val="phClr">
-                <a:shade val="20000"/>
-                <a:satMod val="255000"/>
-              </a:schemeClr>
-            </a:gs>
-          </a:gsLst>
-          <a:path path="circle">
-            <a:fillToRect l="50000" t="-80000" r="50000" b="180000"/>
-          </a:path>
-        </a:gradFill>
-        <a:gradFill rotWithShape="1">
-          <a:gsLst>
-            <a:gs pos="0">
-              <a:schemeClr val="phClr">
-                <a:tint val="80000"/>
-                <a:satMod val="300000"/>
-              </a:schemeClr>
-            </a:gs>
-            <a:gs pos="100000">
-              <a:schemeClr val="phClr">
-                <a:shade val="30000"/>
-                <a:satMod val="200000"/>
-              </a:schemeClr>
-            </a:gs>
-          </a:gsLst>
-          <a:path path="circle">
-            <a:fillToRect l="50000" t="50000" r="50000" b="50000"/>
-          </a:path>
-        </a:gradFill>
-      </a:bgFillStyleLst>
-    </a:fmtScheme>
-  </a:themeElements>
+  <a:objectDefaults/>
+  <a:extraClrSchemeLst/>
 </a:theme>
 </file>